--- a/report/20260520/lele_AI工具指南/20260520_AI工具指南.pptx
+++ b/report/20260520/lele_AI工具指南/20260520_AI工具指南.pptx
@@ -16,9 +16,10 @@
     <p:sldId id="264" r:id="rId10"/>
     <p:sldId id="265" r:id="rId11"/>
     <p:sldId id="266" r:id="rId12"/>
+    <p:sldId id="267" r:id="rId13"/>
   </p:sldIdLst>
   <p:notesMasterIdLst>
-    <p:notesMasterId r:id="rId13"/>
+    <p:notesMasterId r:id="rId14"/>
   </p:notesMasterIdLst>
   <p:sldSz cx="9144000" cy="5143500"/>
   <p:notesSz cx="5143500" cy="9144000"/>
@@ -712,6 +713,94 @@
             <a:fld id="{F7021451-1387-4CA6-816F-3879F97B5CBC}" type="slidenum">
               <a:rPr lang="en-US"/>
               <a:t>11</a:t>
+            </a:fld>
+            <a:endParaRPr lang="en-US"/>
+          </a:p>
+        </p:txBody>
+      </p:sp>
+    </p:spTree>
+    <p:extLst>
+      <p:ext uri="{BB962C8B-B14F-4D97-AF65-F5344CB8AC3E}">
+        <p14:creationId xmlns:p14="http://schemas.microsoft.com/office/powerpoint/2010/main" val="1024086991"/>
+      </p:ext>
+    </p:extLst>
+  </p:cSld>
+  <p:clrMapOvr>
+    <a:masterClrMapping/>
+  </p:clrMapOvr>
+</p:notes>
+</file>
+
+<file path=ppt/notesSlides/notesSlide12.xml><?xml version="1.0" encoding="utf-8"?>
+<p:notes xmlns:a="http://schemas.openxmlformats.org/drawingml/2006/main" xmlns:r="http://schemas.openxmlformats.org/officeDocument/2006/relationships" xmlns:p="http://schemas.openxmlformats.org/presentationml/2006/main">
+  <p:cSld>
+    <p:spTree>
+      <p:nvGrpSpPr>
+        <p:cNvPr id="1" name=""/>
+        <p:cNvGrpSpPr/>
+        <p:nvPr/>
+      </p:nvGrpSpPr>
+      <p:grpSpPr>
+        <a:xfrm>
+          <a:off x="0" y="0"/>
+          <a:ext cx="0" cy="0"/>
+          <a:chOff x="0" y="0"/>
+          <a:chExt cx="0" cy="0"/>
+        </a:xfrm>
+      </p:grpSpPr>
+      <p:sp>
+        <p:nvSpPr>
+          <p:cNvPr id="2" name="Slide Image Placeholder 1"/>
+          <p:cNvSpPr>
+            <a:spLocks noGrp="1" noRot="1" noChangeAspect="1"/>
+          </p:cNvSpPr>
+          <p:nvPr>
+            <p:ph type="sldImg"/>
+          </p:nvPr>
+        </p:nvSpPr>
+        <p:spPr/>
+      </p:sp>
+      <p:sp>
+        <p:nvSpPr>
+          <p:cNvPr id="3" name="Notes Placeholder 2"/>
+          <p:cNvSpPr>
+            <a:spLocks noGrp="1"/>
+          </p:cNvSpPr>
+          <p:nvPr>
+            <p:ph type="body" idx="1"/>
+          </p:nvPr>
+        </p:nvSpPr>
+        <p:spPr/>
+        <p:txBody>
+          <a:bodyPr/>
+          <a:lstStyle/>
+          <a:p>
+            <a:r>
+              <a:rPr lang="en-US" dirty="0"/>
+              <a:t/>
+            </a:r>
+            <a:endParaRPr lang="en-US" dirty="0"/>
+          </a:p>
+        </p:txBody>
+      </p:sp>
+      <p:sp>
+        <p:nvSpPr>
+          <p:cNvPr id="4" name="Slide Number Placeholder 3"/>
+          <p:cNvSpPr>
+            <a:spLocks noGrp="1"/>
+          </p:cNvSpPr>
+          <p:nvPr>
+            <p:ph type="sldNum" sz="quarter" idx="10"/>
+          </p:nvPr>
+        </p:nvSpPr>
+        <p:spPr/>
+        <p:txBody>
+          <a:bodyPr/>
+          <a:lstStyle/>
+          <a:p>
+            <a:fld id="{F7021451-1387-4CA6-816F-3879F97B5CBC}" type="slidenum">
+              <a:rPr lang="en-US"/>
+              <a:t>12</a:t>
             </a:fld>
             <a:endParaRPr lang="en-US"/>
           </a:p>
@@ -2031,7 +2120,7 @@
                 <a:ea typeface="Arial" pitchFamily="34" charset="-122"/>
                 <a:cs typeface="Arial" pitchFamily="34" charset="-120"/>
               </a:rPr>
-              <a:t>快速上手清单</a:t>
+              <a:t>AI 辅助做 PPT</a:t>
             </a:r>
             <a:endParaRPr lang="en-US" sz="3200" dirty="0"/>
           </a:p>
@@ -2070,7 +2159,7 @@
                 <a:ea typeface="Arial" pitchFamily="34" charset="-122"/>
                 <a:cs typeface="Arial" pitchFamily="34" charset="-120"/>
               </a:rPr>
-              <a:t>这周就能用起来的 3 件事</a:t>
+              <a:t>（2/2）实操步骤</a:t>
             </a:r>
             <a:endParaRPr lang="en-US" sz="1400" dirty="0"/>
           </a:p>
@@ -2085,604 +2174,7 @@
         <p:spPr>
           <a:xfrm>
             <a:off x="548640" y="1371600"/>
-            <a:ext cx="2651760" cy="2011680"/>
-          </a:xfrm>
-          <a:prstGeom prst="rect">
-            <a:avLst/>
-          </a:prstGeom>
-          <a:solidFill>
-            <a:srgbClr val="F8FAFC"/>
-          </a:solidFill>
-          <a:ln w="12700">
-            <a:solidFill>
-              <a:srgbClr val="E2E8F0"/>
-            </a:solidFill>
-            <a:prstDash val="solid"/>
-          </a:ln>
-        </p:spPr>
-      </p:sp>
-      <p:sp>
-        <p:nvSpPr>
-          <p:cNvPr id="6" name="Shape 4"/>
-          <p:cNvSpPr/>
-          <p:nvPr/>
-        </p:nvSpPr>
-        <p:spPr>
-          <a:xfrm>
-            <a:off x="548640" y="1371600"/>
-            <a:ext cx="2651760" cy="91440"/>
-          </a:xfrm>
-          <a:prstGeom prst="rect">
-            <a:avLst/>
-          </a:prstGeom>
-          <a:solidFill>
-            <a:srgbClr val="0D9488"/>
-          </a:solidFill>
-          <a:ln/>
-        </p:spPr>
-      </p:sp>
-      <p:sp>
-        <p:nvSpPr>
-          <p:cNvPr id="7" name="Shape 5"/>
-          <p:cNvSpPr/>
-          <p:nvPr/>
-        </p:nvSpPr>
-        <p:spPr>
-          <a:xfrm>
-            <a:off x="1508760" y="1645920"/>
-            <a:ext cx="731520" cy="731520"/>
-          </a:xfrm>
-          <a:prstGeom prst="ellipse">
-            <a:avLst/>
-          </a:prstGeom>
-          <a:solidFill>
-            <a:srgbClr val="0D9488"/>
-          </a:solidFill>
-          <a:ln/>
-        </p:spPr>
-      </p:sp>
-      <p:sp>
-        <p:nvSpPr>
-          <p:cNvPr id="8" name="Text 6"/>
-          <p:cNvSpPr/>
-          <p:nvPr/>
-        </p:nvSpPr>
-        <p:spPr>
-          <a:xfrm>
-            <a:off x="1508760" y="1645920"/>
-            <a:ext cx="731520" cy="731520"/>
-          </a:xfrm>
-          <a:prstGeom prst="rect">
-            <a:avLst/>
-          </a:prstGeom>
-          <a:noFill/>
-          <a:ln/>
-        </p:spPr>
-        <p:txBody>
-          <a:bodyPr wrap="square" lIns="0" tIns="0" rIns="0" bIns="0" rtlCol="0" anchor="ctr"/>
-          <a:lstStyle/>
-          <a:p>
-            <a:pPr algn="ctr" indent="0" marL="0">
-              <a:buNone/>
-            </a:pPr>
-            <a:r>
-              <a:rPr lang="en-US" sz="2400" b="1" dirty="0">
-                <a:solidFill>
-                  <a:srgbClr val="FFFFFF"/>
-                </a:solidFill>
-                <a:latin typeface="Arial" pitchFamily="34" charset="0"/>
-                <a:ea typeface="Arial" pitchFamily="34" charset="-122"/>
-                <a:cs typeface="Arial" pitchFamily="34" charset="-120"/>
-              </a:rPr>
-              <a:t>1</a:t>
-            </a:r>
-            <a:endParaRPr lang="en-US" sz="2400" dirty="0"/>
-          </a:p>
-        </p:txBody>
-      </p:sp>
-      <p:sp>
-        <p:nvSpPr>
-          <p:cNvPr id="9" name="Text 7"/>
-          <p:cNvSpPr/>
-          <p:nvPr/>
-        </p:nvSpPr>
-        <p:spPr>
-          <a:xfrm>
-            <a:off x="548640" y="2468880"/>
-            <a:ext cx="2651760" cy="274320"/>
-          </a:xfrm>
-          <a:prstGeom prst="rect">
-            <a:avLst/>
-          </a:prstGeom>
-          <a:noFill/>
-          <a:ln/>
-        </p:spPr>
-        <p:txBody>
-          <a:bodyPr wrap="square" lIns="0" tIns="0" rIns="0" bIns="0" rtlCol="0" anchor="ctr"/>
-          <a:lstStyle/>
-          <a:p>
-            <a:pPr algn="ctr" indent="0" marL="0">
-              <a:buNone/>
-            </a:pPr>
-            <a:r>
-              <a:rPr lang="en-US" sz="1600" b="1" dirty="0">
-                <a:solidFill>
-                  <a:srgbClr val="1E2761"/>
-                </a:solidFill>
-                <a:latin typeface="Arial" pitchFamily="34" charset="0"/>
-                <a:ea typeface="Arial" pitchFamily="34" charset="-122"/>
-                <a:cs typeface="Arial" pitchFamily="34" charset="-120"/>
-              </a:rPr>
-              <a:t>Git</a:t>
-            </a:r>
-            <a:endParaRPr lang="en-US" sz="1600" dirty="0"/>
-          </a:p>
-        </p:txBody>
-      </p:sp>
-      <p:sp>
-        <p:nvSpPr>
-          <p:cNvPr id="10" name="Text 8"/>
-          <p:cNvSpPr/>
-          <p:nvPr/>
-        </p:nvSpPr>
-        <p:spPr>
-          <a:xfrm>
-            <a:off x="685800" y="2788920"/>
-            <a:ext cx="2377440" cy="731520"/>
-          </a:xfrm>
-          <a:prstGeom prst="rect">
-            <a:avLst/>
-          </a:prstGeom>
-          <a:noFill/>
-          <a:ln/>
-        </p:spPr>
-        <p:txBody>
-          <a:bodyPr wrap="square" lIns="0" tIns="0" rIns="0" bIns="0" rtlCol="0" anchor="ctr"/>
-          <a:lstStyle/>
-          <a:p>
-            <a:pPr algn="ctr" indent="0" marL="0">
-              <a:buNone/>
-            </a:pPr>
-            <a:r>
-              <a:rPr lang="en-US" sz="1100" dirty="0">
-                <a:solidFill>
-                  <a:srgbClr val="475569"/>
-                </a:solidFill>
-                <a:latin typeface="Arial" pitchFamily="34" charset="0"/>
-                <a:ea typeface="Arial" pitchFamily="34" charset="-122"/>
-                <a:cs typeface="Arial" pitchFamily="34" charset="-120"/>
-              </a:rPr>
-              <a:t>把当前项目 init 了</a:t>
-            </a:r>
-            <a:endParaRPr lang="en-US" sz="1100" dirty="0"/>
-          </a:p>
-          <a:p>
-            <a:pPr algn="ctr" indent="0" marL="0">
-              <a:buNone/>
-            </a:pPr>
-            <a:r>
-              <a:rPr lang="en-US" sz="1100" dirty="0">
-                <a:solidFill>
-                  <a:srgbClr val="475569"/>
-                </a:solidFill>
-                <a:latin typeface="Arial" pitchFamily="34" charset="0"/>
-                <a:ea typeface="Arial" pitchFamily="34" charset="-122"/>
-                <a:cs typeface="Arial" pitchFamily="34" charset="-120"/>
-              </a:rPr>
-              <a:t>每天下班前 commit 一次</a:t>
-            </a:r>
-            <a:endParaRPr lang="en-US" sz="1100" dirty="0"/>
-          </a:p>
-        </p:txBody>
-      </p:sp>
-      <p:sp>
-        <p:nvSpPr>
-          <p:cNvPr id="11" name="Shape 9"/>
-          <p:cNvSpPr/>
-          <p:nvPr/>
-        </p:nvSpPr>
-        <p:spPr>
-          <a:xfrm>
-            <a:off x="3337560" y="1371600"/>
-            <a:ext cx="2651760" cy="2011680"/>
-          </a:xfrm>
-          <a:prstGeom prst="rect">
-            <a:avLst/>
-          </a:prstGeom>
-          <a:solidFill>
-            <a:srgbClr val="F8FAFC"/>
-          </a:solidFill>
-          <a:ln w="12700">
-            <a:solidFill>
-              <a:srgbClr val="E2E8F0"/>
-            </a:solidFill>
-            <a:prstDash val="solid"/>
-          </a:ln>
-        </p:spPr>
-      </p:sp>
-      <p:sp>
-        <p:nvSpPr>
-          <p:cNvPr id="12" name="Shape 10"/>
-          <p:cNvSpPr/>
-          <p:nvPr/>
-        </p:nvSpPr>
-        <p:spPr>
-          <a:xfrm>
-            <a:off x="3337560" y="1371600"/>
-            <a:ext cx="2651760" cy="91440"/>
-          </a:xfrm>
-          <a:prstGeom prst="rect">
-            <a:avLst/>
-          </a:prstGeom>
-          <a:solidFill>
-            <a:srgbClr val="2563EB"/>
-          </a:solidFill>
-          <a:ln/>
-        </p:spPr>
-      </p:sp>
-      <p:sp>
-        <p:nvSpPr>
-          <p:cNvPr id="13" name="Shape 11"/>
-          <p:cNvSpPr/>
-          <p:nvPr/>
-        </p:nvSpPr>
-        <p:spPr>
-          <a:xfrm>
-            <a:off x="4297680" y="1645920"/>
-            <a:ext cx="731520" cy="731520"/>
-          </a:xfrm>
-          <a:prstGeom prst="ellipse">
-            <a:avLst/>
-          </a:prstGeom>
-          <a:solidFill>
-            <a:srgbClr val="2563EB"/>
-          </a:solidFill>
-          <a:ln/>
-        </p:spPr>
-      </p:sp>
-      <p:sp>
-        <p:nvSpPr>
-          <p:cNvPr id="14" name="Text 12"/>
-          <p:cNvSpPr/>
-          <p:nvPr/>
-        </p:nvSpPr>
-        <p:spPr>
-          <a:xfrm>
-            <a:off x="4297680" y="1645920"/>
-            <a:ext cx="731520" cy="731520"/>
-          </a:xfrm>
-          <a:prstGeom prst="rect">
-            <a:avLst/>
-          </a:prstGeom>
-          <a:noFill/>
-          <a:ln/>
-        </p:spPr>
-        <p:txBody>
-          <a:bodyPr wrap="square" lIns="0" tIns="0" rIns="0" bIns="0" rtlCol="0" anchor="ctr"/>
-          <a:lstStyle/>
-          <a:p>
-            <a:pPr algn="ctr" indent="0" marL="0">
-              <a:buNone/>
-            </a:pPr>
-            <a:r>
-              <a:rPr lang="en-US" sz="2400" b="1" dirty="0">
-                <a:solidFill>
-                  <a:srgbClr val="FFFFFF"/>
-                </a:solidFill>
-                <a:latin typeface="Arial" pitchFamily="34" charset="0"/>
-                <a:ea typeface="Arial" pitchFamily="34" charset="-122"/>
-                <a:cs typeface="Arial" pitchFamily="34" charset="-120"/>
-              </a:rPr>
-              <a:t>2</a:t>
-            </a:r>
-            <a:endParaRPr lang="en-US" sz="2400" dirty="0"/>
-          </a:p>
-        </p:txBody>
-      </p:sp>
-      <p:sp>
-        <p:nvSpPr>
-          <p:cNvPr id="15" name="Text 13"/>
-          <p:cNvSpPr/>
-          <p:nvPr/>
-        </p:nvSpPr>
-        <p:spPr>
-          <a:xfrm>
-            <a:off x="3337560" y="2468880"/>
-            <a:ext cx="2651760" cy="274320"/>
-          </a:xfrm>
-          <a:prstGeom prst="rect">
-            <a:avLst/>
-          </a:prstGeom>
-          <a:noFill/>
-          <a:ln/>
-        </p:spPr>
-        <p:txBody>
-          <a:bodyPr wrap="square" lIns="0" tIns="0" rIns="0" bIns="0" rtlCol="0" anchor="ctr"/>
-          <a:lstStyle/>
-          <a:p>
-            <a:pPr algn="ctr" indent="0" marL="0">
-              <a:buNone/>
-            </a:pPr>
-            <a:r>
-              <a:rPr lang="en-US" sz="1600" b="1" dirty="0">
-                <a:solidFill>
-                  <a:srgbClr val="1E2761"/>
-                </a:solidFill>
-                <a:latin typeface="Arial" pitchFamily="34" charset="0"/>
-                <a:ea typeface="Arial" pitchFamily="34" charset="-122"/>
-                <a:cs typeface="Arial" pitchFamily="34" charset="-120"/>
-              </a:rPr>
-              <a:t>CC Usage</a:t>
-            </a:r>
-            <a:endParaRPr lang="en-US" sz="1600" dirty="0"/>
-          </a:p>
-        </p:txBody>
-      </p:sp>
-      <p:sp>
-        <p:nvSpPr>
-          <p:cNvPr id="16" name="Text 14"/>
-          <p:cNvSpPr/>
-          <p:nvPr/>
-        </p:nvSpPr>
-        <p:spPr>
-          <a:xfrm>
-            <a:off x="3474720" y="2788920"/>
-            <a:ext cx="2377440" cy="731520"/>
-          </a:xfrm>
-          <a:prstGeom prst="rect">
-            <a:avLst/>
-          </a:prstGeom>
-          <a:noFill/>
-          <a:ln/>
-        </p:spPr>
-        <p:txBody>
-          <a:bodyPr wrap="square" lIns="0" tIns="0" rIns="0" bIns="0" rtlCol="0" anchor="ctr"/>
-          <a:lstStyle/>
-          <a:p>
-            <a:pPr algn="ctr" indent="0" marL="0">
-              <a:buNone/>
-            </a:pPr>
-            <a:r>
-              <a:rPr lang="en-US" sz="1100" dirty="0">
-                <a:solidFill>
-                  <a:srgbClr val="475569"/>
-                </a:solidFill>
-                <a:latin typeface="Arial" pitchFamily="34" charset="0"/>
-                <a:ea typeface="Arial" pitchFamily="34" charset="-122"/>
-                <a:cs typeface="Arial" pitchFamily="34" charset="-120"/>
-              </a:rPr>
-              <a:t>装完跑 ccusage today</a:t>
-            </a:r>
-            <a:endParaRPr lang="en-US" sz="1100" dirty="0"/>
-          </a:p>
-          <a:p>
-            <a:pPr algn="ctr" indent="0" marL="0">
-              <a:buNone/>
-            </a:pPr>
-            <a:r>
-              <a:rPr lang="en-US" sz="1100" dirty="0">
-                <a:solidFill>
-                  <a:srgbClr val="475569"/>
-                </a:solidFill>
-                <a:latin typeface="Arial" pitchFamily="34" charset="0"/>
-                <a:ea typeface="Arial" pitchFamily="34" charset="-122"/>
-                <a:cs typeface="Arial" pitchFamily="34" charset="-120"/>
-              </a:rPr>
-              <a:t>建立 baseline</a:t>
-            </a:r>
-            <a:endParaRPr lang="en-US" sz="1100" dirty="0"/>
-          </a:p>
-        </p:txBody>
-      </p:sp>
-      <p:sp>
-        <p:nvSpPr>
-          <p:cNvPr id="17" name="Shape 15"/>
-          <p:cNvSpPr/>
-          <p:nvPr/>
-        </p:nvSpPr>
-        <p:spPr>
-          <a:xfrm>
-            <a:off x="6126480" y="1371600"/>
-            <a:ext cx="2651760" cy="2011680"/>
-          </a:xfrm>
-          <a:prstGeom prst="rect">
-            <a:avLst/>
-          </a:prstGeom>
-          <a:solidFill>
-            <a:srgbClr val="F8FAFC"/>
-          </a:solidFill>
-          <a:ln w="12700">
-            <a:solidFill>
-              <a:srgbClr val="E2E8F0"/>
-            </a:solidFill>
-            <a:prstDash val="solid"/>
-          </a:ln>
-        </p:spPr>
-      </p:sp>
-      <p:sp>
-        <p:nvSpPr>
-          <p:cNvPr id="18" name="Shape 16"/>
-          <p:cNvSpPr/>
-          <p:nvPr/>
-        </p:nvSpPr>
-        <p:spPr>
-          <a:xfrm>
-            <a:off x="6126480" y="1371600"/>
-            <a:ext cx="2651760" cy="91440"/>
-          </a:xfrm>
-          <a:prstGeom prst="rect">
-            <a:avLst/>
-          </a:prstGeom>
-          <a:solidFill>
-            <a:srgbClr val="7C3AED"/>
-          </a:solidFill>
-          <a:ln/>
-        </p:spPr>
-      </p:sp>
-      <p:sp>
-        <p:nvSpPr>
-          <p:cNvPr id="19" name="Shape 17"/>
-          <p:cNvSpPr/>
-          <p:nvPr/>
-        </p:nvSpPr>
-        <p:spPr>
-          <a:xfrm>
-            <a:off x="7086600" y="1645920"/>
-            <a:ext cx="731520" cy="731520"/>
-          </a:xfrm>
-          <a:prstGeom prst="ellipse">
-            <a:avLst/>
-          </a:prstGeom>
-          <a:solidFill>
-            <a:srgbClr val="7C3AED"/>
-          </a:solidFill>
-          <a:ln/>
-        </p:spPr>
-      </p:sp>
-      <p:sp>
-        <p:nvSpPr>
-          <p:cNvPr id="20" name="Text 18"/>
-          <p:cNvSpPr/>
-          <p:nvPr/>
-        </p:nvSpPr>
-        <p:spPr>
-          <a:xfrm>
-            <a:off x="7086600" y="1645920"/>
-            <a:ext cx="731520" cy="731520"/>
-          </a:xfrm>
-          <a:prstGeom prst="rect">
-            <a:avLst/>
-          </a:prstGeom>
-          <a:noFill/>
-          <a:ln/>
-        </p:spPr>
-        <p:txBody>
-          <a:bodyPr wrap="square" lIns="0" tIns="0" rIns="0" bIns="0" rtlCol="0" anchor="ctr"/>
-          <a:lstStyle/>
-          <a:p>
-            <a:pPr algn="ctr" indent="0" marL="0">
-              <a:buNone/>
-            </a:pPr>
-            <a:r>
-              <a:rPr lang="en-US" sz="2400" b="1" dirty="0">
-                <a:solidFill>
-                  <a:srgbClr val="FFFFFF"/>
-                </a:solidFill>
-                <a:latin typeface="Arial" pitchFamily="34" charset="0"/>
-                <a:ea typeface="Arial" pitchFamily="34" charset="-122"/>
-                <a:cs typeface="Arial" pitchFamily="34" charset="-120"/>
-              </a:rPr>
-              <a:t>3</a:t>
-            </a:r>
-            <a:endParaRPr lang="en-US" sz="2400" dirty="0"/>
-          </a:p>
-        </p:txBody>
-      </p:sp>
-      <p:sp>
-        <p:nvSpPr>
-          <p:cNvPr id="21" name="Text 19"/>
-          <p:cNvSpPr/>
-          <p:nvPr/>
-        </p:nvSpPr>
-        <p:spPr>
-          <a:xfrm>
-            <a:off x="6126480" y="2468880"/>
-            <a:ext cx="2651760" cy="274320"/>
-          </a:xfrm>
-          <a:prstGeom prst="rect">
-            <a:avLst/>
-          </a:prstGeom>
-          <a:noFill/>
-          <a:ln/>
-        </p:spPr>
-        <p:txBody>
-          <a:bodyPr wrap="square" lIns="0" tIns="0" rIns="0" bIns="0" rtlCol="0" anchor="ctr"/>
-          <a:lstStyle/>
-          <a:p>
-            <a:pPr algn="ctr" indent="0" marL="0">
-              <a:buNone/>
-            </a:pPr>
-            <a:r>
-              <a:rPr lang="en-US" sz="1600" b="1" dirty="0">
-                <a:solidFill>
-                  <a:srgbClr val="1E2761"/>
-                </a:solidFill>
-                <a:latin typeface="Arial" pitchFamily="34" charset="0"/>
-                <a:ea typeface="Arial" pitchFamily="34" charset="-122"/>
-                <a:cs typeface="Arial" pitchFamily="34" charset="-120"/>
-              </a:rPr>
-              <a:t>PPT</a:t>
-            </a:r>
-            <a:endParaRPr lang="en-US" sz="1600" dirty="0"/>
-          </a:p>
-        </p:txBody>
-      </p:sp>
-      <p:sp>
-        <p:nvSpPr>
-          <p:cNvPr id="22" name="Text 20"/>
-          <p:cNvSpPr/>
-          <p:nvPr/>
-        </p:nvSpPr>
-        <p:spPr>
-          <a:xfrm>
-            <a:off x="6263640" y="2788920"/>
-            <a:ext cx="2377440" cy="731520"/>
-          </a:xfrm>
-          <a:prstGeom prst="rect">
-            <a:avLst/>
-          </a:prstGeom>
-          <a:noFill/>
-          <a:ln/>
-        </p:spPr>
-        <p:txBody>
-          <a:bodyPr wrap="square" lIns="0" tIns="0" rIns="0" bIns="0" rtlCol="0" anchor="ctr"/>
-          <a:lstStyle/>
-          <a:p>
-            <a:pPr algn="ctr" indent="0" marL="0">
-              <a:buNone/>
-            </a:pPr>
-            <a:r>
-              <a:rPr lang="en-US" sz="1100" dirty="0">
-                <a:solidFill>
-                  <a:srgbClr val="475569"/>
-                </a:solidFill>
-                <a:latin typeface="Arial" pitchFamily="34" charset="0"/>
-                <a:ea typeface="Arial" pitchFamily="34" charset="-122"/>
-                <a:cs typeface="Arial" pitchFamily="34" charset="-120"/>
-              </a:rPr>
-              <a:t>下次汇报前</a:t>
-            </a:r>
-            <a:endParaRPr lang="en-US" sz="1100" dirty="0"/>
-          </a:p>
-          <a:p>
-            <a:pPr algn="ctr" indent="0" marL="0">
-              <a:buNone/>
-            </a:pPr>
-            <a:r>
-              <a:rPr lang="en-US" sz="1100" dirty="0">
-                <a:solidFill>
-                  <a:srgbClr val="475569"/>
-                </a:solidFill>
-                <a:latin typeface="Arial" pitchFamily="34" charset="0"/>
-                <a:ea typeface="Arial" pitchFamily="34" charset="-122"/>
-                <a:cs typeface="Arial" pitchFamily="34" charset="-120"/>
-              </a:rPr>
-              <a:t>先用 AI 生成大纲</a:t>
-            </a:r>
-            <a:endParaRPr lang="en-US" sz="1100" dirty="0"/>
-          </a:p>
-        </p:txBody>
-      </p:sp>
-      <p:sp>
-        <p:nvSpPr>
-          <p:cNvPr id="23" name="Shape 21"/>
-          <p:cNvSpPr/>
-          <p:nvPr/>
-        </p:nvSpPr>
-        <p:spPr>
-          <a:xfrm>
-            <a:off x="548640" y="3657600"/>
-            <a:ext cx="8046720" cy="1188720"/>
+            <a:ext cx="3931920" cy="1737360"/>
           </a:xfrm>
           <a:prstGeom prst="rect">
             <a:avLst/>
@@ -2696,7 +2188,670 @@
             </a:solidFill>
             <a:prstDash val="solid"/>
           </a:ln>
-        </p:spPr>
+          <a:effectLst>
+            <a:outerShdw sx="100000" sy="100000" kx="0" ky="0" algn="bl" rotWithShape="0" blurRad="76200" dist="25400" dir="8100000">
+              <a:srgbClr val="000000">
+                <a:alpha val="12000"/>
+              </a:srgbClr>
+            </a:outerShdw>
+          </a:effectLst>
+        </p:spPr>
+      </p:sp>
+      <p:sp>
+        <p:nvSpPr>
+          <p:cNvPr id="6" name="Shape 4"/>
+          <p:cNvSpPr/>
+          <p:nvPr/>
+        </p:nvSpPr>
+        <p:spPr>
+          <a:xfrm>
+            <a:off x="731520" y="1508760"/>
+            <a:ext cx="731520" cy="256032"/>
+          </a:xfrm>
+          <a:prstGeom prst="rect">
+            <a:avLst/>
+          </a:prstGeom>
+          <a:solidFill>
+            <a:srgbClr val="1E2761"/>
+          </a:solidFill>
+          <a:ln/>
+        </p:spPr>
+      </p:sp>
+      <p:sp>
+        <p:nvSpPr>
+          <p:cNvPr id="7" name="Text 5"/>
+          <p:cNvSpPr/>
+          <p:nvPr/>
+        </p:nvSpPr>
+        <p:spPr>
+          <a:xfrm>
+            <a:off x="731520" y="1508760"/>
+            <a:ext cx="731520" cy="256032"/>
+          </a:xfrm>
+          <a:prstGeom prst="rect">
+            <a:avLst/>
+          </a:prstGeom>
+          <a:noFill/>
+          <a:ln/>
+        </p:spPr>
+        <p:txBody>
+          <a:bodyPr wrap="square" lIns="0" tIns="0" rIns="0" bIns="0" rtlCol="0" anchor="ctr"/>
+          <a:lstStyle/>
+          <a:p>
+            <a:pPr algn="ctr" indent="0" marL="0">
+              <a:buNone/>
+            </a:pPr>
+            <a:r>
+              <a:rPr lang="en-US" sz="1000" b="1" dirty="0">
+                <a:solidFill>
+                  <a:srgbClr val="FFFFFF"/>
+                </a:solidFill>
+                <a:latin typeface="Arial" pitchFamily="34" charset="0"/>
+                <a:ea typeface="Arial" pitchFamily="34" charset="-122"/>
+                <a:cs typeface="Arial" pitchFamily="34" charset="-120"/>
+              </a:rPr>
+              <a:t>Step 1</a:t>
+            </a:r>
+            <a:endParaRPr lang="en-US" sz="1000" dirty="0"/>
+          </a:p>
+        </p:txBody>
+      </p:sp>
+      <p:sp>
+        <p:nvSpPr>
+          <p:cNvPr id="8" name="Text 6"/>
+          <p:cNvSpPr/>
+          <p:nvPr/>
+        </p:nvSpPr>
+        <p:spPr>
+          <a:xfrm>
+            <a:off x="1554480" y="1508760"/>
+            <a:ext cx="2743200" cy="274320"/>
+          </a:xfrm>
+          <a:prstGeom prst="rect">
+            <a:avLst/>
+          </a:prstGeom>
+          <a:noFill/>
+          <a:ln/>
+        </p:spPr>
+        <p:txBody>
+          <a:bodyPr wrap="square" lIns="0" tIns="0" rIns="0" bIns="0" rtlCol="0" anchor="ctr"/>
+          <a:lstStyle/>
+          <a:p>
+            <a:pPr indent="0" marL="0">
+              <a:buNone/>
+            </a:pPr>
+            <a:r>
+              <a:rPr lang="en-US" sz="1400" b="1" dirty="0">
+                <a:solidFill>
+                  <a:srgbClr val="1E2761"/>
+                </a:solidFill>
+                <a:latin typeface="Arial" pitchFamily="34" charset="0"/>
+                <a:ea typeface="Arial" pitchFamily="34" charset="-122"/>
+                <a:cs typeface="Arial" pitchFamily="34" charset="-120"/>
+              </a:rPr>
+              <a:t>生成大纲</a:t>
+            </a:r>
+            <a:endParaRPr lang="en-US" sz="1400" dirty="0"/>
+          </a:p>
+        </p:txBody>
+      </p:sp>
+      <p:sp>
+        <p:nvSpPr>
+          <p:cNvPr id="9" name="Text 7"/>
+          <p:cNvSpPr/>
+          <p:nvPr/>
+        </p:nvSpPr>
+        <p:spPr>
+          <a:xfrm>
+            <a:off x="731520" y="1874520"/>
+            <a:ext cx="3566160" cy="1097280"/>
+          </a:xfrm>
+          <a:prstGeom prst="rect">
+            <a:avLst/>
+          </a:prstGeom>
+          <a:noFill/>
+          <a:ln/>
+        </p:spPr>
+        <p:txBody>
+          <a:bodyPr wrap="square" lIns="0" tIns="0" rIns="0" bIns="0" rtlCol="0" anchor="t"/>
+          <a:lstStyle/>
+          <a:p>
+            <a:pPr indent="0" marL="0">
+              <a:buNone/>
+            </a:pPr>
+            <a:r>
+              <a:rPr lang="en-US" sz="1100" dirty="0">
+                <a:solidFill>
+                  <a:srgbClr val="475569"/>
+                </a:solidFill>
+                <a:latin typeface="Arial" pitchFamily="34" charset="0"/>
+                <a:ea typeface="Arial" pitchFamily="34" charset="-122"/>
+                <a:cs typeface="Arial" pitchFamily="34" charset="-120"/>
+              </a:rPr>
+              <a:t>给 AI 主题 + 受众 + 页数 + 风格</a:t>
+            </a:r>
+            <a:endParaRPr lang="en-US" sz="1100" dirty="0"/>
+          </a:p>
+          <a:p>
+            <a:pPr indent="0" marL="0">
+              <a:buNone/>
+            </a:pPr>
+            <a:r>
+              <a:rPr lang="en-US" sz="1100" dirty="0">
+                <a:solidFill>
+                  <a:srgbClr val="475569"/>
+                </a:solidFill>
+                <a:latin typeface="Arial" pitchFamily="34" charset="0"/>
+                <a:ea typeface="Arial" pitchFamily="34" charset="-122"/>
+                <a:cs typeface="Arial" pitchFamily="34" charset="-120"/>
+              </a:rPr>
+              <a:t>AI 输出结构化的每页标题和要点</a:t>
+            </a:r>
+            <a:endParaRPr lang="en-US" sz="1100" dirty="0"/>
+          </a:p>
+        </p:txBody>
+      </p:sp>
+      <p:sp>
+        <p:nvSpPr>
+          <p:cNvPr id="10" name="Shape 8"/>
+          <p:cNvSpPr/>
+          <p:nvPr/>
+        </p:nvSpPr>
+        <p:spPr>
+          <a:xfrm>
+            <a:off x="4663440" y="1371600"/>
+            <a:ext cx="3931920" cy="1737360"/>
+          </a:xfrm>
+          <a:prstGeom prst="rect">
+            <a:avLst/>
+          </a:prstGeom>
+          <a:solidFill>
+            <a:srgbClr val="FFFFFF"/>
+          </a:solidFill>
+          <a:ln w="12700">
+            <a:solidFill>
+              <a:srgbClr val="E2E8F0"/>
+            </a:solidFill>
+            <a:prstDash val="solid"/>
+          </a:ln>
+          <a:effectLst>
+            <a:outerShdw sx="100000" sy="100000" kx="0" ky="0" algn="bl" rotWithShape="0" blurRad="76200" dist="25400" dir="8100000">
+              <a:srgbClr val="000000">
+                <a:alpha val="12000"/>
+              </a:srgbClr>
+            </a:outerShdw>
+          </a:effectLst>
+        </p:spPr>
+      </p:sp>
+      <p:sp>
+        <p:nvSpPr>
+          <p:cNvPr id="11" name="Shape 9"/>
+          <p:cNvSpPr/>
+          <p:nvPr/>
+        </p:nvSpPr>
+        <p:spPr>
+          <a:xfrm>
+            <a:off x="4846320" y="1508760"/>
+            <a:ext cx="731520" cy="256032"/>
+          </a:xfrm>
+          <a:prstGeom prst="rect">
+            <a:avLst/>
+          </a:prstGeom>
+          <a:solidFill>
+            <a:srgbClr val="1E2761"/>
+          </a:solidFill>
+          <a:ln/>
+        </p:spPr>
+      </p:sp>
+      <p:sp>
+        <p:nvSpPr>
+          <p:cNvPr id="12" name="Text 10"/>
+          <p:cNvSpPr/>
+          <p:nvPr/>
+        </p:nvSpPr>
+        <p:spPr>
+          <a:xfrm>
+            <a:off x="4846320" y="1508760"/>
+            <a:ext cx="731520" cy="256032"/>
+          </a:xfrm>
+          <a:prstGeom prst="rect">
+            <a:avLst/>
+          </a:prstGeom>
+          <a:noFill/>
+          <a:ln/>
+        </p:spPr>
+        <p:txBody>
+          <a:bodyPr wrap="square" lIns="0" tIns="0" rIns="0" bIns="0" rtlCol="0" anchor="ctr"/>
+          <a:lstStyle/>
+          <a:p>
+            <a:pPr algn="ctr" indent="0" marL="0">
+              <a:buNone/>
+            </a:pPr>
+            <a:r>
+              <a:rPr lang="en-US" sz="1000" b="1" dirty="0">
+                <a:solidFill>
+                  <a:srgbClr val="FFFFFF"/>
+                </a:solidFill>
+                <a:latin typeface="Arial" pitchFamily="34" charset="0"/>
+                <a:ea typeface="Arial" pitchFamily="34" charset="-122"/>
+                <a:cs typeface="Arial" pitchFamily="34" charset="-120"/>
+              </a:rPr>
+              <a:t>Step 2</a:t>
+            </a:r>
+            <a:endParaRPr lang="en-US" sz="1000" dirty="0"/>
+          </a:p>
+        </p:txBody>
+      </p:sp>
+      <p:sp>
+        <p:nvSpPr>
+          <p:cNvPr id="13" name="Text 11"/>
+          <p:cNvSpPr/>
+          <p:nvPr/>
+        </p:nvSpPr>
+        <p:spPr>
+          <a:xfrm>
+            <a:off x="5669280" y="1508760"/>
+            <a:ext cx="2743200" cy="274320"/>
+          </a:xfrm>
+          <a:prstGeom prst="rect">
+            <a:avLst/>
+          </a:prstGeom>
+          <a:noFill/>
+          <a:ln/>
+        </p:spPr>
+        <p:txBody>
+          <a:bodyPr wrap="square" lIns="0" tIns="0" rIns="0" bIns="0" rtlCol="0" anchor="ctr"/>
+          <a:lstStyle/>
+          <a:p>
+            <a:pPr indent="0" marL="0">
+              <a:buNone/>
+            </a:pPr>
+            <a:r>
+              <a:rPr lang="en-US" sz="1400" b="1" dirty="0">
+                <a:solidFill>
+                  <a:srgbClr val="1E2761"/>
+                </a:solidFill>
+                <a:latin typeface="Arial" pitchFamily="34" charset="0"/>
+                <a:ea typeface="Arial" pitchFamily="34" charset="-122"/>
+                <a:cs typeface="Arial" pitchFamily="34" charset="-120"/>
+              </a:rPr>
+              <a:t>扩写内容</a:t>
+            </a:r>
+            <a:endParaRPr lang="en-US" sz="1400" dirty="0"/>
+          </a:p>
+        </p:txBody>
+      </p:sp>
+      <p:sp>
+        <p:nvSpPr>
+          <p:cNvPr id="14" name="Text 12"/>
+          <p:cNvSpPr/>
+          <p:nvPr/>
+        </p:nvSpPr>
+        <p:spPr>
+          <a:xfrm>
+            <a:off x="4846320" y="1874520"/>
+            <a:ext cx="3566160" cy="1097280"/>
+          </a:xfrm>
+          <a:prstGeom prst="rect">
+            <a:avLst/>
+          </a:prstGeom>
+          <a:noFill/>
+          <a:ln/>
+        </p:spPr>
+        <p:txBody>
+          <a:bodyPr wrap="square" lIns="0" tIns="0" rIns="0" bIns="0" rtlCol="0" anchor="t"/>
+          <a:lstStyle/>
+          <a:p>
+            <a:pPr indent="0" marL="0">
+              <a:buNone/>
+            </a:pPr>
+            <a:r>
+              <a:rPr lang="en-US" sz="1100" dirty="0">
+                <a:solidFill>
+                  <a:srgbClr val="475569"/>
+                </a:solidFill>
+                <a:latin typeface="Arial" pitchFamily="34" charset="0"/>
+                <a:ea typeface="Arial" pitchFamily="34" charset="-122"/>
+                <a:cs typeface="Arial" pitchFamily="34" charset="-120"/>
+              </a:rPr>
+              <a:t>把大纲每页丢给 AI</a:t>
+            </a:r>
+            <a:endParaRPr lang="en-US" sz="1100" dirty="0"/>
+          </a:p>
+          <a:p>
+            <a:pPr indent="0" marL="0">
+              <a:buNone/>
+            </a:pPr>
+            <a:r>
+              <a:rPr lang="en-US" sz="1100" dirty="0">
+                <a:solidFill>
+                  <a:srgbClr val="475569"/>
+                </a:solidFill>
+                <a:latin typeface="Arial" pitchFamily="34" charset="0"/>
+                <a:ea typeface="Arial" pitchFamily="34" charset="-122"/>
+                <a:cs typeface="Arial" pitchFamily="34" charset="-120"/>
+              </a:rPr>
+              <a:t>要求扩写成 bullet points</a:t>
+            </a:r>
+            <a:endParaRPr lang="en-US" sz="1100" dirty="0"/>
+          </a:p>
+        </p:txBody>
+      </p:sp>
+      <p:sp>
+        <p:nvSpPr>
+          <p:cNvPr id="15" name="Shape 13"/>
+          <p:cNvSpPr/>
+          <p:nvPr/>
+        </p:nvSpPr>
+        <p:spPr>
+          <a:xfrm>
+            <a:off x="548640" y="3291840"/>
+            <a:ext cx="3931920" cy="1737360"/>
+          </a:xfrm>
+          <a:prstGeom prst="rect">
+            <a:avLst/>
+          </a:prstGeom>
+          <a:solidFill>
+            <a:srgbClr val="FFFFFF"/>
+          </a:solidFill>
+          <a:ln w="12700">
+            <a:solidFill>
+              <a:srgbClr val="E2E8F0"/>
+            </a:solidFill>
+            <a:prstDash val="solid"/>
+          </a:ln>
+          <a:effectLst>
+            <a:outerShdw sx="100000" sy="100000" kx="0" ky="0" algn="bl" rotWithShape="0" blurRad="76200" dist="25400" dir="8100000">
+              <a:srgbClr val="000000">
+                <a:alpha val="12000"/>
+              </a:srgbClr>
+            </a:outerShdw>
+          </a:effectLst>
+        </p:spPr>
+      </p:sp>
+      <p:sp>
+        <p:nvSpPr>
+          <p:cNvPr id="16" name="Shape 14"/>
+          <p:cNvSpPr/>
+          <p:nvPr/>
+        </p:nvSpPr>
+        <p:spPr>
+          <a:xfrm>
+            <a:off x="731520" y="3429000"/>
+            <a:ext cx="731520" cy="256032"/>
+          </a:xfrm>
+          <a:prstGeom prst="rect">
+            <a:avLst/>
+          </a:prstGeom>
+          <a:solidFill>
+            <a:srgbClr val="1E2761"/>
+          </a:solidFill>
+          <a:ln/>
+        </p:spPr>
+      </p:sp>
+      <p:sp>
+        <p:nvSpPr>
+          <p:cNvPr id="17" name="Text 15"/>
+          <p:cNvSpPr/>
+          <p:nvPr/>
+        </p:nvSpPr>
+        <p:spPr>
+          <a:xfrm>
+            <a:off x="731520" y="3429000"/>
+            <a:ext cx="731520" cy="256032"/>
+          </a:xfrm>
+          <a:prstGeom prst="rect">
+            <a:avLst/>
+          </a:prstGeom>
+          <a:noFill/>
+          <a:ln/>
+        </p:spPr>
+        <p:txBody>
+          <a:bodyPr wrap="square" lIns="0" tIns="0" rIns="0" bIns="0" rtlCol="0" anchor="ctr"/>
+          <a:lstStyle/>
+          <a:p>
+            <a:pPr algn="ctr" indent="0" marL="0">
+              <a:buNone/>
+            </a:pPr>
+            <a:r>
+              <a:rPr lang="en-US" sz="1000" b="1" dirty="0">
+                <a:solidFill>
+                  <a:srgbClr val="FFFFFF"/>
+                </a:solidFill>
+                <a:latin typeface="Arial" pitchFamily="34" charset="0"/>
+                <a:ea typeface="Arial" pitchFamily="34" charset="-122"/>
+                <a:cs typeface="Arial" pitchFamily="34" charset="-120"/>
+              </a:rPr>
+              <a:t>Step 3</a:t>
+            </a:r>
+            <a:endParaRPr lang="en-US" sz="1000" dirty="0"/>
+          </a:p>
+        </p:txBody>
+      </p:sp>
+      <p:sp>
+        <p:nvSpPr>
+          <p:cNvPr id="18" name="Text 16"/>
+          <p:cNvSpPr/>
+          <p:nvPr/>
+        </p:nvSpPr>
+        <p:spPr>
+          <a:xfrm>
+            <a:off x="1554480" y="3429000"/>
+            <a:ext cx="2743200" cy="274320"/>
+          </a:xfrm>
+          <a:prstGeom prst="rect">
+            <a:avLst/>
+          </a:prstGeom>
+          <a:noFill/>
+          <a:ln/>
+        </p:spPr>
+        <p:txBody>
+          <a:bodyPr wrap="square" lIns="0" tIns="0" rIns="0" bIns="0" rtlCol="0" anchor="ctr"/>
+          <a:lstStyle/>
+          <a:p>
+            <a:pPr indent="0" marL="0">
+              <a:buNone/>
+            </a:pPr>
+            <a:r>
+              <a:rPr lang="en-US" sz="1400" b="1" dirty="0">
+                <a:solidFill>
+                  <a:srgbClr val="1E2761"/>
+                </a:solidFill>
+                <a:latin typeface="Arial" pitchFamily="34" charset="0"/>
+                <a:ea typeface="Arial" pitchFamily="34" charset="-122"/>
+                <a:cs typeface="Arial" pitchFamily="34" charset="-120"/>
+              </a:rPr>
+              <a:t>生成 PPT 文件</a:t>
+            </a:r>
+            <a:endParaRPr lang="en-US" sz="1400" dirty="0"/>
+          </a:p>
+        </p:txBody>
+      </p:sp>
+      <p:sp>
+        <p:nvSpPr>
+          <p:cNvPr id="19" name="Text 17"/>
+          <p:cNvSpPr/>
+          <p:nvPr/>
+        </p:nvSpPr>
+        <p:spPr>
+          <a:xfrm>
+            <a:off x="731520" y="3794760"/>
+            <a:ext cx="3566160" cy="1097280"/>
+          </a:xfrm>
+          <a:prstGeom prst="rect">
+            <a:avLst/>
+          </a:prstGeom>
+          <a:noFill/>
+          <a:ln/>
+        </p:spPr>
+        <p:txBody>
+          <a:bodyPr wrap="square" lIns="0" tIns="0" rIns="0" bIns="0" rtlCol="0" anchor="t"/>
+          <a:lstStyle/>
+          <a:p>
+            <a:pPr indent="0" marL="0">
+              <a:buNone/>
+            </a:pPr>
+            <a:r>
+              <a:rPr lang="en-US" sz="1100" dirty="0">
+                <a:solidFill>
+                  <a:srgbClr val="475569"/>
+                </a:solidFill>
+                <a:latin typeface="Arial" pitchFamily="34" charset="0"/>
+                <a:ea typeface="Arial" pitchFamily="34" charset="-122"/>
+                <a:cs typeface="Arial" pitchFamily="34" charset="-120"/>
+              </a:rPr>
+              <a:t>· Claude Code 的 pptx skill 直接生成 .pptx</a:t>
+            </a:r>
+            <a:endParaRPr lang="en-US" sz="1100" dirty="0"/>
+          </a:p>
+          <a:p>
+            <a:pPr indent="0" marL="0">
+              <a:buNone/>
+            </a:pPr>
+            <a:r>
+              <a:rPr lang="en-US" sz="1100" dirty="0">
+                <a:solidFill>
+                  <a:srgbClr val="475569"/>
+                </a:solidFill>
+                <a:latin typeface="Arial" pitchFamily="34" charset="0"/>
+                <a:ea typeface="Arial" pitchFamily="34" charset="-122"/>
+                <a:cs typeface="Arial" pitchFamily="34" charset="-120"/>
+              </a:rPr>
+              <a:t>· 或在线工具（Gamma、Tome）导入 Markdown</a:t>
+            </a:r>
+            <a:endParaRPr lang="en-US" sz="1100" dirty="0"/>
+          </a:p>
+        </p:txBody>
+      </p:sp>
+      <p:sp>
+        <p:nvSpPr>
+          <p:cNvPr id="20" name="Shape 18"/>
+          <p:cNvSpPr/>
+          <p:nvPr/>
+        </p:nvSpPr>
+        <p:spPr>
+          <a:xfrm>
+            <a:off x="4663440" y="3291840"/>
+            <a:ext cx="3931920" cy="1737360"/>
+          </a:xfrm>
+          <a:prstGeom prst="rect">
+            <a:avLst/>
+          </a:prstGeom>
+          <a:solidFill>
+            <a:srgbClr val="FFFFFF"/>
+          </a:solidFill>
+          <a:ln w="12700">
+            <a:solidFill>
+              <a:srgbClr val="E2E8F0"/>
+            </a:solidFill>
+            <a:prstDash val="solid"/>
+          </a:ln>
+          <a:effectLst>
+            <a:outerShdw sx="100000" sy="100000" kx="0" ky="0" algn="bl" rotWithShape="0" blurRad="76200" dist="25400" dir="8100000">
+              <a:srgbClr val="000000">
+                <a:alpha val="12000"/>
+              </a:srgbClr>
+            </a:outerShdw>
+          </a:effectLst>
+        </p:spPr>
+      </p:sp>
+      <p:sp>
+        <p:nvSpPr>
+          <p:cNvPr id="21" name="Shape 19"/>
+          <p:cNvSpPr/>
+          <p:nvPr/>
+        </p:nvSpPr>
+        <p:spPr>
+          <a:xfrm>
+            <a:off x="4846320" y="3429000"/>
+            <a:ext cx="731520" cy="256032"/>
+          </a:xfrm>
+          <a:prstGeom prst="rect">
+            <a:avLst/>
+          </a:prstGeom>
+          <a:solidFill>
+            <a:srgbClr val="1E2761"/>
+          </a:solidFill>
+          <a:ln/>
+        </p:spPr>
+      </p:sp>
+      <p:sp>
+        <p:nvSpPr>
+          <p:cNvPr id="22" name="Text 20"/>
+          <p:cNvSpPr/>
+          <p:nvPr/>
+        </p:nvSpPr>
+        <p:spPr>
+          <a:xfrm>
+            <a:off x="4846320" y="3429000"/>
+            <a:ext cx="731520" cy="256032"/>
+          </a:xfrm>
+          <a:prstGeom prst="rect">
+            <a:avLst/>
+          </a:prstGeom>
+          <a:noFill/>
+          <a:ln/>
+        </p:spPr>
+        <p:txBody>
+          <a:bodyPr wrap="square" lIns="0" tIns="0" rIns="0" bIns="0" rtlCol="0" anchor="ctr"/>
+          <a:lstStyle/>
+          <a:p>
+            <a:pPr algn="ctr" indent="0" marL="0">
+              <a:buNone/>
+            </a:pPr>
+            <a:r>
+              <a:rPr lang="en-US" sz="1000" b="1" dirty="0">
+                <a:solidFill>
+                  <a:srgbClr val="FFFFFF"/>
+                </a:solidFill>
+                <a:latin typeface="Arial" pitchFamily="34" charset="0"/>
+                <a:ea typeface="Arial" pitchFamily="34" charset="-122"/>
+                <a:cs typeface="Arial" pitchFamily="34" charset="-120"/>
+              </a:rPr>
+              <a:t>Step 4</a:t>
+            </a:r>
+            <a:endParaRPr lang="en-US" sz="1000" dirty="0"/>
+          </a:p>
+        </p:txBody>
+      </p:sp>
+      <p:sp>
+        <p:nvSpPr>
+          <p:cNvPr id="23" name="Text 21"/>
+          <p:cNvSpPr/>
+          <p:nvPr/>
+        </p:nvSpPr>
+        <p:spPr>
+          <a:xfrm>
+            <a:off x="5669280" y="3429000"/>
+            <a:ext cx="2743200" cy="274320"/>
+          </a:xfrm>
+          <a:prstGeom prst="rect">
+            <a:avLst/>
+          </a:prstGeom>
+          <a:noFill/>
+          <a:ln/>
+        </p:spPr>
+        <p:txBody>
+          <a:bodyPr wrap="square" lIns="0" tIns="0" rIns="0" bIns="0" rtlCol="0" anchor="ctr"/>
+          <a:lstStyle/>
+          <a:p>
+            <a:pPr indent="0" marL="0">
+              <a:buNone/>
+            </a:pPr>
+            <a:r>
+              <a:rPr lang="en-US" sz="1400" b="1" dirty="0">
+                <a:solidFill>
+                  <a:srgbClr val="1E2761"/>
+                </a:solidFill>
+                <a:latin typeface="Arial" pitchFamily="34" charset="0"/>
+                <a:ea typeface="Arial" pitchFamily="34" charset="-122"/>
+                <a:cs typeface="Arial" pitchFamily="34" charset="-120"/>
+              </a:rPr>
+              <a:t>人工润色</a:t>
+            </a:r>
+            <a:endParaRPr lang="en-US" sz="1400" dirty="0"/>
+          </a:p>
+        </p:txBody>
       </p:sp>
       <p:sp>
         <p:nvSpPr>
@@ -2706,8 +2861,8 @@
         </p:nvSpPr>
         <p:spPr>
           <a:xfrm>
-            <a:off x="731520" y="3794760"/>
-            <a:ext cx="7680960" cy="914400"/>
+            <a:off x="4846320" y="3794760"/>
+            <a:ext cx="3566160" cy="1097280"/>
           </a:xfrm>
           <a:prstGeom prst="rect">
             <a:avLst/>
@@ -2716,35 +2871,58 @@
           <a:ln/>
         </p:spPr>
         <p:txBody>
-          <a:bodyPr wrap="square" lIns="0" tIns="0" rIns="0" bIns="0" rtlCol="0" anchor="ctr"/>
-          <a:lstStyle/>
-          <a:p>
-            <a:pPr indent="0" marL="0">
-              <a:buNone/>
-            </a:pPr>
-            <a:r>
-              <a:rPr lang="en-US" sz="1200" b="1" dirty="0">
-                <a:solidFill>
-                  <a:srgbClr val="1E2761"/>
-                </a:solidFill>
-              </a:rPr>
-              <a:t>进阶路线</a:t>
-            </a:r>
-            <a:endParaRPr lang="en-US" sz="1200" dirty="0"/>
-          </a:p>
-          <a:p>
-            <a:pPr indent="0" marL="0">
-              <a:buNone/>
-            </a:pPr>
-            <a:r>
-              <a:rPr lang="en-US" sz="1200" dirty="0">
+          <a:bodyPr wrap="square" lIns="0" tIns="0" rIns="0" bIns="0" rtlCol="0" anchor="t"/>
+          <a:lstStyle/>
+          <a:p>
+            <a:pPr indent="0" marL="0">
+              <a:buNone/>
+            </a:pPr>
+            <a:r>
+              <a:rPr lang="en-US" sz="1100" dirty="0">
                 <a:solidFill>
                   <a:srgbClr val="475569"/>
                 </a:solidFill>
-              </a:rPr>
-              <a:t>Week 1：熟练 Git 基础循环  →  Week 2：看懂 CC Usage 报告，优化 token 消耗  →  Week 3：独立用 AI 完成 PPT 从大纲到成品</a:t>
-            </a:r>
-            <a:endParaRPr lang="en-US" sz="1200" dirty="0"/>
+                <a:latin typeface="Arial" pitchFamily="34" charset="0"/>
+                <a:ea typeface="Arial" pitchFamily="34" charset="-122"/>
+                <a:cs typeface="Arial" pitchFamily="34" charset="-120"/>
+              </a:rPr>
+              <a:t>· AI 生成的是骨架，数据必须自己核对</a:t>
+            </a:r>
+            <a:endParaRPr lang="en-US" sz="1100" dirty="0"/>
+          </a:p>
+          <a:p>
+            <a:pPr indent="0" marL="0">
+              <a:buNone/>
+            </a:pPr>
+            <a:r>
+              <a:rPr lang="en-US" sz="1100" dirty="0">
+                <a:solidFill>
+                  <a:srgbClr val="475569"/>
+                </a:solidFill>
+                <a:latin typeface="Arial" pitchFamily="34" charset="0"/>
+                <a:ea typeface="Arial" pitchFamily="34" charset="-122"/>
+                <a:cs typeface="Arial" pitchFamily="34" charset="-120"/>
+              </a:rPr>
+              <a:t>· 关键结论和数字，人工 double-check</a:t>
+            </a:r>
+            <a:endParaRPr lang="en-US" sz="1100" dirty="0"/>
+          </a:p>
+          <a:p>
+            <a:pPr indent="0" marL="0">
+              <a:buNone/>
+            </a:pPr>
+            <a:r>
+              <a:rPr lang="en-US" sz="1100" dirty="0">
+                <a:solidFill>
+                  <a:srgbClr val="475569"/>
+                </a:solidFill>
+                <a:latin typeface="Arial" pitchFamily="34" charset="0"/>
+                <a:ea typeface="Arial" pitchFamily="34" charset="-122"/>
+                <a:cs typeface="Arial" pitchFamily="34" charset="-120"/>
+              </a:rPr>
+              <a:t>· 配色和字体按公司规范调整</a:t>
+            </a:r>
+            <a:endParaRPr lang="en-US" sz="1100" dirty="0"/>
           </a:p>
         </p:txBody>
       </p:sp>
@@ -2759,6 +2937,808 @@
 <file path=ppt/slides/slide11.xml><?xml version="1.0" encoding="utf-8"?>
 <p:sld xmlns:a="http://schemas.openxmlformats.org/drawingml/2006/main" xmlns:r="http://schemas.openxmlformats.org/officeDocument/2006/relationships" xmlns:p="http://schemas.openxmlformats.org/presentationml/2006/main">
   <p:cSld name="Slide 11">
+    <p:bg>
+      <p:bgPr>
+        <a:solidFill>
+          <a:srgbClr val="FFFFFF"/>
+        </a:solidFill>
+      </p:bgPr>
+    </p:bg>
+    <p:spTree>
+      <p:nvGrpSpPr>
+        <p:cNvPr id="1" name=""/>
+        <p:cNvGrpSpPr/>
+        <p:nvPr/>
+      </p:nvGrpSpPr>
+      <p:grpSpPr>
+        <a:xfrm>
+          <a:off x="0" y="0"/>
+          <a:ext cx="0" cy="0"/>
+          <a:chOff x="0" y="0"/>
+          <a:chExt cx="0" cy="0"/>
+        </a:xfrm>
+      </p:grpSpPr>
+      <p:sp>
+        <p:nvSpPr>
+          <p:cNvPr id="2" name="Shape 0"/>
+          <p:cNvSpPr/>
+          <p:nvPr/>
+        </p:nvSpPr>
+        <p:spPr>
+          <a:xfrm>
+            <a:off x="0" y="0"/>
+            <a:ext cx="137160" cy="5143500"/>
+          </a:xfrm>
+          <a:prstGeom prst="rect">
+            <a:avLst/>
+          </a:prstGeom>
+          <a:solidFill>
+            <a:srgbClr val="1E2761"/>
+          </a:solidFill>
+          <a:ln/>
+        </p:spPr>
+      </p:sp>
+      <p:sp>
+        <p:nvSpPr>
+          <p:cNvPr id="3" name="Text 1"/>
+          <p:cNvSpPr/>
+          <p:nvPr/>
+        </p:nvSpPr>
+        <p:spPr>
+          <a:xfrm>
+            <a:off x="548640" y="320040"/>
+            <a:ext cx="8046720" cy="548640"/>
+          </a:xfrm>
+          <a:prstGeom prst="rect">
+            <a:avLst/>
+          </a:prstGeom>
+          <a:noFill/>
+          <a:ln/>
+        </p:spPr>
+        <p:txBody>
+          <a:bodyPr wrap="square" lIns="0" tIns="0" rIns="0" bIns="0" rtlCol="0" anchor="ctr"/>
+          <a:lstStyle/>
+          <a:p>
+            <a:pPr indent="0" marL="0">
+              <a:buNone/>
+            </a:pPr>
+            <a:r>
+              <a:rPr lang="en-US" sz="3200" b="1" dirty="0">
+                <a:solidFill>
+                  <a:srgbClr val="1E2761"/>
+                </a:solidFill>
+                <a:latin typeface="Arial" pitchFamily="34" charset="0"/>
+                <a:ea typeface="Arial" pitchFamily="34" charset="-122"/>
+                <a:cs typeface="Arial" pitchFamily="34" charset="-120"/>
+              </a:rPr>
+              <a:t>快速上手清单</a:t>
+            </a:r>
+            <a:endParaRPr lang="en-US" sz="3200" dirty="0"/>
+          </a:p>
+        </p:txBody>
+      </p:sp>
+      <p:sp>
+        <p:nvSpPr>
+          <p:cNvPr id="4" name="Text 2"/>
+          <p:cNvSpPr/>
+          <p:nvPr/>
+        </p:nvSpPr>
+        <p:spPr>
+          <a:xfrm>
+            <a:off x="548640" y="822960"/>
+            <a:ext cx="8046720" cy="320040"/>
+          </a:xfrm>
+          <a:prstGeom prst="rect">
+            <a:avLst/>
+          </a:prstGeom>
+          <a:noFill/>
+          <a:ln/>
+        </p:spPr>
+        <p:txBody>
+          <a:bodyPr wrap="square" lIns="0" tIns="0" rIns="0" bIns="0" rtlCol="0" anchor="ctr"/>
+          <a:lstStyle/>
+          <a:p>
+            <a:pPr indent="0" marL="0">
+              <a:buNone/>
+            </a:pPr>
+            <a:r>
+              <a:rPr lang="en-US" sz="1400" dirty="0">
+                <a:solidFill>
+                  <a:srgbClr val="64748B"/>
+                </a:solidFill>
+                <a:latin typeface="Arial" pitchFamily="34" charset="0"/>
+                <a:ea typeface="Arial" pitchFamily="34" charset="-122"/>
+                <a:cs typeface="Arial" pitchFamily="34" charset="-120"/>
+              </a:rPr>
+              <a:t>这周就能用起来的 3 件事</a:t>
+            </a:r>
+            <a:endParaRPr lang="en-US" sz="1400" dirty="0"/>
+          </a:p>
+        </p:txBody>
+      </p:sp>
+      <p:sp>
+        <p:nvSpPr>
+          <p:cNvPr id="5" name="Shape 3"/>
+          <p:cNvSpPr/>
+          <p:nvPr/>
+        </p:nvSpPr>
+        <p:spPr>
+          <a:xfrm>
+            <a:off x="548640" y="1371600"/>
+            <a:ext cx="2651760" cy="2011680"/>
+          </a:xfrm>
+          <a:prstGeom prst="rect">
+            <a:avLst/>
+          </a:prstGeom>
+          <a:solidFill>
+            <a:srgbClr val="F8FAFC"/>
+          </a:solidFill>
+          <a:ln w="12700">
+            <a:solidFill>
+              <a:srgbClr val="E2E8F0"/>
+            </a:solidFill>
+            <a:prstDash val="solid"/>
+          </a:ln>
+        </p:spPr>
+      </p:sp>
+      <p:sp>
+        <p:nvSpPr>
+          <p:cNvPr id="6" name="Shape 4"/>
+          <p:cNvSpPr/>
+          <p:nvPr/>
+        </p:nvSpPr>
+        <p:spPr>
+          <a:xfrm>
+            <a:off x="548640" y="1371600"/>
+            <a:ext cx="2651760" cy="91440"/>
+          </a:xfrm>
+          <a:prstGeom prst="rect">
+            <a:avLst/>
+          </a:prstGeom>
+          <a:solidFill>
+            <a:srgbClr val="0D9488"/>
+          </a:solidFill>
+          <a:ln/>
+        </p:spPr>
+      </p:sp>
+      <p:sp>
+        <p:nvSpPr>
+          <p:cNvPr id="7" name="Shape 5"/>
+          <p:cNvSpPr/>
+          <p:nvPr/>
+        </p:nvSpPr>
+        <p:spPr>
+          <a:xfrm>
+            <a:off x="1508760" y="1645920"/>
+            <a:ext cx="731520" cy="731520"/>
+          </a:xfrm>
+          <a:prstGeom prst="ellipse">
+            <a:avLst/>
+          </a:prstGeom>
+          <a:solidFill>
+            <a:srgbClr val="0D9488"/>
+          </a:solidFill>
+          <a:ln/>
+        </p:spPr>
+      </p:sp>
+      <p:sp>
+        <p:nvSpPr>
+          <p:cNvPr id="8" name="Text 6"/>
+          <p:cNvSpPr/>
+          <p:nvPr/>
+        </p:nvSpPr>
+        <p:spPr>
+          <a:xfrm>
+            <a:off x="1508760" y="1645920"/>
+            <a:ext cx="731520" cy="731520"/>
+          </a:xfrm>
+          <a:prstGeom prst="rect">
+            <a:avLst/>
+          </a:prstGeom>
+          <a:noFill/>
+          <a:ln/>
+        </p:spPr>
+        <p:txBody>
+          <a:bodyPr wrap="square" lIns="0" tIns="0" rIns="0" bIns="0" rtlCol="0" anchor="ctr"/>
+          <a:lstStyle/>
+          <a:p>
+            <a:pPr algn="ctr" indent="0" marL="0">
+              <a:buNone/>
+            </a:pPr>
+            <a:r>
+              <a:rPr lang="en-US" sz="2400" b="1" dirty="0">
+                <a:solidFill>
+                  <a:srgbClr val="FFFFFF"/>
+                </a:solidFill>
+                <a:latin typeface="Arial" pitchFamily="34" charset="0"/>
+                <a:ea typeface="Arial" pitchFamily="34" charset="-122"/>
+                <a:cs typeface="Arial" pitchFamily="34" charset="-120"/>
+              </a:rPr>
+              <a:t>1</a:t>
+            </a:r>
+            <a:endParaRPr lang="en-US" sz="2400" dirty="0"/>
+          </a:p>
+        </p:txBody>
+      </p:sp>
+      <p:sp>
+        <p:nvSpPr>
+          <p:cNvPr id="9" name="Text 7"/>
+          <p:cNvSpPr/>
+          <p:nvPr/>
+        </p:nvSpPr>
+        <p:spPr>
+          <a:xfrm>
+            <a:off x="548640" y="2468880"/>
+            <a:ext cx="2651760" cy="274320"/>
+          </a:xfrm>
+          <a:prstGeom prst="rect">
+            <a:avLst/>
+          </a:prstGeom>
+          <a:noFill/>
+          <a:ln/>
+        </p:spPr>
+        <p:txBody>
+          <a:bodyPr wrap="square" lIns="0" tIns="0" rIns="0" bIns="0" rtlCol="0" anchor="ctr"/>
+          <a:lstStyle/>
+          <a:p>
+            <a:pPr algn="ctr" indent="0" marL="0">
+              <a:buNone/>
+            </a:pPr>
+            <a:r>
+              <a:rPr lang="en-US" sz="1600" b="1" dirty="0">
+                <a:solidFill>
+                  <a:srgbClr val="1E2761"/>
+                </a:solidFill>
+                <a:latin typeface="Arial" pitchFamily="34" charset="0"/>
+                <a:ea typeface="Arial" pitchFamily="34" charset="-122"/>
+                <a:cs typeface="Arial" pitchFamily="34" charset="-120"/>
+              </a:rPr>
+              <a:t>Git</a:t>
+            </a:r>
+            <a:endParaRPr lang="en-US" sz="1600" dirty="0"/>
+          </a:p>
+        </p:txBody>
+      </p:sp>
+      <p:sp>
+        <p:nvSpPr>
+          <p:cNvPr id="10" name="Text 8"/>
+          <p:cNvSpPr/>
+          <p:nvPr/>
+        </p:nvSpPr>
+        <p:spPr>
+          <a:xfrm>
+            <a:off x="685800" y="2788920"/>
+            <a:ext cx="2377440" cy="731520"/>
+          </a:xfrm>
+          <a:prstGeom prst="rect">
+            <a:avLst/>
+          </a:prstGeom>
+          <a:noFill/>
+          <a:ln/>
+        </p:spPr>
+        <p:txBody>
+          <a:bodyPr wrap="square" lIns="0" tIns="0" rIns="0" bIns="0" rtlCol="0" anchor="ctr"/>
+          <a:lstStyle/>
+          <a:p>
+            <a:pPr algn="ctr" indent="0" marL="0">
+              <a:buNone/>
+            </a:pPr>
+            <a:r>
+              <a:rPr lang="en-US" sz="1100" dirty="0">
+                <a:solidFill>
+                  <a:srgbClr val="475569"/>
+                </a:solidFill>
+                <a:latin typeface="Arial" pitchFamily="34" charset="0"/>
+                <a:ea typeface="Arial" pitchFamily="34" charset="-122"/>
+                <a:cs typeface="Arial" pitchFamily="34" charset="-120"/>
+              </a:rPr>
+              <a:t>把当前项目 init 了</a:t>
+            </a:r>
+            <a:endParaRPr lang="en-US" sz="1100" dirty="0"/>
+          </a:p>
+          <a:p>
+            <a:pPr algn="ctr" indent="0" marL="0">
+              <a:buNone/>
+            </a:pPr>
+            <a:r>
+              <a:rPr lang="en-US" sz="1100" dirty="0">
+                <a:solidFill>
+                  <a:srgbClr val="475569"/>
+                </a:solidFill>
+                <a:latin typeface="Arial" pitchFamily="34" charset="0"/>
+                <a:ea typeface="Arial" pitchFamily="34" charset="-122"/>
+                <a:cs typeface="Arial" pitchFamily="34" charset="-120"/>
+              </a:rPr>
+              <a:t>每天下班前 commit 一次</a:t>
+            </a:r>
+            <a:endParaRPr lang="en-US" sz="1100" dirty="0"/>
+          </a:p>
+        </p:txBody>
+      </p:sp>
+      <p:sp>
+        <p:nvSpPr>
+          <p:cNvPr id="11" name="Shape 9"/>
+          <p:cNvSpPr/>
+          <p:nvPr/>
+        </p:nvSpPr>
+        <p:spPr>
+          <a:xfrm>
+            <a:off x="3337560" y="1371600"/>
+            <a:ext cx="2651760" cy="2011680"/>
+          </a:xfrm>
+          <a:prstGeom prst="rect">
+            <a:avLst/>
+          </a:prstGeom>
+          <a:solidFill>
+            <a:srgbClr val="F8FAFC"/>
+          </a:solidFill>
+          <a:ln w="12700">
+            <a:solidFill>
+              <a:srgbClr val="E2E8F0"/>
+            </a:solidFill>
+            <a:prstDash val="solid"/>
+          </a:ln>
+        </p:spPr>
+      </p:sp>
+      <p:sp>
+        <p:nvSpPr>
+          <p:cNvPr id="12" name="Shape 10"/>
+          <p:cNvSpPr/>
+          <p:nvPr/>
+        </p:nvSpPr>
+        <p:spPr>
+          <a:xfrm>
+            <a:off x="3337560" y="1371600"/>
+            <a:ext cx="2651760" cy="91440"/>
+          </a:xfrm>
+          <a:prstGeom prst="rect">
+            <a:avLst/>
+          </a:prstGeom>
+          <a:solidFill>
+            <a:srgbClr val="2563EB"/>
+          </a:solidFill>
+          <a:ln/>
+        </p:spPr>
+      </p:sp>
+      <p:sp>
+        <p:nvSpPr>
+          <p:cNvPr id="13" name="Shape 11"/>
+          <p:cNvSpPr/>
+          <p:nvPr/>
+        </p:nvSpPr>
+        <p:spPr>
+          <a:xfrm>
+            <a:off x="4297680" y="1645920"/>
+            <a:ext cx="731520" cy="731520"/>
+          </a:xfrm>
+          <a:prstGeom prst="ellipse">
+            <a:avLst/>
+          </a:prstGeom>
+          <a:solidFill>
+            <a:srgbClr val="2563EB"/>
+          </a:solidFill>
+          <a:ln/>
+        </p:spPr>
+      </p:sp>
+      <p:sp>
+        <p:nvSpPr>
+          <p:cNvPr id="14" name="Text 12"/>
+          <p:cNvSpPr/>
+          <p:nvPr/>
+        </p:nvSpPr>
+        <p:spPr>
+          <a:xfrm>
+            <a:off x="4297680" y="1645920"/>
+            <a:ext cx="731520" cy="731520"/>
+          </a:xfrm>
+          <a:prstGeom prst="rect">
+            <a:avLst/>
+          </a:prstGeom>
+          <a:noFill/>
+          <a:ln/>
+        </p:spPr>
+        <p:txBody>
+          <a:bodyPr wrap="square" lIns="0" tIns="0" rIns="0" bIns="0" rtlCol="0" anchor="ctr"/>
+          <a:lstStyle/>
+          <a:p>
+            <a:pPr algn="ctr" indent="0" marL="0">
+              <a:buNone/>
+            </a:pPr>
+            <a:r>
+              <a:rPr lang="en-US" sz="2400" b="1" dirty="0">
+                <a:solidFill>
+                  <a:srgbClr val="FFFFFF"/>
+                </a:solidFill>
+                <a:latin typeface="Arial" pitchFamily="34" charset="0"/>
+                <a:ea typeface="Arial" pitchFamily="34" charset="-122"/>
+                <a:cs typeface="Arial" pitchFamily="34" charset="-120"/>
+              </a:rPr>
+              <a:t>2</a:t>
+            </a:r>
+            <a:endParaRPr lang="en-US" sz="2400" dirty="0"/>
+          </a:p>
+        </p:txBody>
+      </p:sp>
+      <p:sp>
+        <p:nvSpPr>
+          <p:cNvPr id="15" name="Text 13"/>
+          <p:cNvSpPr/>
+          <p:nvPr/>
+        </p:nvSpPr>
+        <p:spPr>
+          <a:xfrm>
+            <a:off x="3337560" y="2468880"/>
+            <a:ext cx="2651760" cy="274320"/>
+          </a:xfrm>
+          <a:prstGeom prst="rect">
+            <a:avLst/>
+          </a:prstGeom>
+          <a:noFill/>
+          <a:ln/>
+        </p:spPr>
+        <p:txBody>
+          <a:bodyPr wrap="square" lIns="0" tIns="0" rIns="0" bIns="0" rtlCol="0" anchor="ctr"/>
+          <a:lstStyle/>
+          <a:p>
+            <a:pPr algn="ctr" indent="0" marL="0">
+              <a:buNone/>
+            </a:pPr>
+            <a:r>
+              <a:rPr lang="en-US" sz="1600" b="1" dirty="0">
+                <a:solidFill>
+                  <a:srgbClr val="1E2761"/>
+                </a:solidFill>
+                <a:latin typeface="Arial" pitchFamily="34" charset="0"/>
+                <a:ea typeface="Arial" pitchFamily="34" charset="-122"/>
+                <a:cs typeface="Arial" pitchFamily="34" charset="-120"/>
+              </a:rPr>
+              <a:t>CC Usage</a:t>
+            </a:r>
+            <a:endParaRPr lang="en-US" sz="1600" dirty="0"/>
+          </a:p>
+        </p:txBody>
+      </p:sp>
+      <p:sp>
+        <p:nvSpPr>
+          <p:cNvPr id="16" name="Text 14"/>
+          <p:cNvSpPr/>
+          <p:nvPr/>
+        </p:nvSpPr>
+        <p:spPr>
+          <a:xfrm>
+            <a:off x="3474720" y="2788920"/>
+            <a:ext cx="2377440" cy="731520"/>
+          </a:xfrm>
+          <a:prstGeom prst="rect">
+            <a:avLst/>
+          </a:prstGeom>
+          <a:noFill/>
+          <a:ln/>
+        </p:spPr>
+        <p:txBody>
+          <a:bodyPr wrap="square" lIns="0" tIns="0" rIns="0" bIns="0" rtlCol="0" anchor="ctr"/>
+          <a:lstStyle/>
+          <a:p>
+            <a:pPr algn="ctr" indent="0" marL="0">
+              <a:buNone/>
+            </a:pPr>
+            <a:r>
+              <a:rPr lang="en-US" sz="1100" dirty="0">
+                <a:solidFill>
+                  <a:srgbClr val="475569"/>
+                </a:solidFill>
+                <a:latin typeface="Arial" pitchFamily="34" charset="0"/>
+                <a:ea typeface="Arial" pitchFamily="34" charset="-122"/>
+                <a:cs typeface="Arial" pitchFamily="34" charset="-120"/>
+              </a:rPr>
+              <a:t>装完跑 ccusage today</a:t>
+            </a:r>
+            <a:endParaRPr lang="en-US" sz="1100" dirty="0"/>
+          </a:p>
+          <a:p>
+            <a:pPr algn="ctr" indent="0" marL="0">
+              <a:buNone/>
+            </a:pPr>
+            <a:r>
+              <a:rPr lang="en-US" sz="1100" dirty="0">
+                <a:solidFill>
+                  <a:srgbClr val="475569"/>
+                </a:solidFill>
+                <a:latin typeface="Arial" pitchFamily="34" charset="0"/>
+                <a:ea typeface="Arial" pitchFamily="34" charset="-122"/>
+                <a:cs typeface="Arial" pitchFamily="34" charset="-120"/>
+              </a:rPr>
+              <a:t>建立 baseline</a:t>
+            </a:r>
+            <a:endParaRPr lang="en-US" sz="1100" dirty="0"/>
+          </a:p>
+        </p:txBody>
+      </p:sp>
+      <p:sp>
+        <p:nvSpPr>
+          <p:cNvPr id="17" name="Shape 15"/>
+          <p:cNvSpPr/>
+          <p:nvPr/>
+        </p:nvSpPr>
+        <p:spPr>
+          <a:xfrm>
+            <a:off x="6126480" y="1371600"/>
+            <a:ext cx="2651760" cy="2011680"/>
+          </a:xfrm>
+          <a:prstGeom prst="rect">
+            <a:avLst/>
+          </a:prstGeom>
+          <a:solidFill>
+            <a:srgbClr val="F8FAFC"/>
+          </a:solidFill>
+          <a:ln w="12700">
+            <a:solidFill>
+              <a:srgbClr val="E2E8F0"/>
+            </a:solidFill>
+            <a:prstDash val="solid"/>
+          </a:ln>
+        </p:spPr>
+      </p:sp>
+      <p:sp>
+        <p:nvSpPr>
+          <p:cNvPr id="18" name="Shape 16"/>
+          <p:cNvSpPr/>
+          <p:nvPr/>
+        </p:nvSpPr>
+        <p:spPr>
+          <a:xfrm>
+            <a:off x="6126480" y="1371600"/>
+            <a:ext cx="2651760" cy="91440"/>
+          </a:xfrm>
+          <a:prstGeom prst="rect">
+            <a:avLst/>
+          </a:prstGeom>
+          <a:solidFill>
+            <a:srgbClr val="7C3AED"/>
+          </a:solidFill>
+          <a:ln/>
+        </p:spPr>
+      </p:sp>
+      <p:sp>
+        <p:nvSpPr>
+          <p:cNvPr id="19" name="Shape 17"/>
+          <p:cNvSpPr/>
+          <p:nvPr/>
+        </p:nvSpPr>
+        <p:spPr>
+          <a:xfrm>
+            <a:off x="7086600" y="1645920"/>
+            <a:ext cx="731520" cy="731520"/>
+          </a:xfrm>
+          <a:prstGeom prst="ellipse">
+            <a:avLst/>
+          </a:prstGeom>
+          <a:solidFill>
+            <a:srgbClr val="7C3AED"/>
+          </a:solidFill>
+          <a:ln/>
+        </p:spPr>
+      </p:sp>
+      <p:sp>
+        <p:nvSpPr>
+          <p:cNvPr id="20" name="Text 18"/>
+          <p:cNvSpPr/>
+          <p:nvPr/>
+        </p:nvSpPr>
+        <p:spPr>
+          <a:xfrm>
+            <a:off x="7086600" y="1645920"/>
+            <a:ext cx="731520" cy="731520"/>
+          </a:xfrm>
+          <a:prstGeom prst="rect">
+            <a:avLst/>
+          </a:prstGeom>
+          <a:noFill/>
+          <a:ln/>
+        </p:spPr>
+        <p:txBody>
+          <a:bodyPr wrap="square" lIns="0" tIns="0" rIns="0" bIns="0" rtlCol="0" anchor="ctr"/>
+          <a:lstStyle/>
+          <a:p>
+            <a:pPr algn="ctr" indent="0" marL="0">
+              <a:buNone/>
+            </a:pPr>
+            <a:r>
+              <a:rPr lang="en-US" sz="2400" b="1" dirty="0">
+                <a:solidFill>
+                  <a:srgbClr val="FFFFFF"/>
+                </a:solidFill>
+                <a:latin typeface="Arial" pitchFamily="34" charset="0"/>
+                <a:ea typeface="Arial" pitchFamily="34" charset="-122"/>
+                <a:cs typeface="Arial" pitchFamily="34" charset="-120"/>
+              </a:rPr>
+              <a:t>3</a:t>
+            </a:r>
+            <a:endParaRPr lang="en-US" sz="2400" dirty="0"/>
+          </a:p>
+        </p:txBody>
+      </p:sp>
+      <p:sp>
+        <p:nvSpPr>
+          <p:cNvPr id="21" name="Text 19"/>
+          <p:cNvSpPr/>
+          <p:nvPr/>
+        </p:nvSpPr>
+        <p:spPr>
+          <a:xfrm>
+            <a:off x="6126480" y="2468880"/>
+            <a:ext cx="2651760" cy="274320"/>
+          </a:xfrm>
+          <a:prstGeom prst="rect">
+            <a:avLst/>
+          </a:prstGeom>
+          <a:noFill/>
+          <a:ln/>
+        </p:spPr>
+        <p:txBody>
+          <a:bodyPr wrap="square" lIns="0" tIns="0" rIns="0" bIns="0" rtlCol="0" anchor="ctr"/>
+          <a:lstStyle/>
+          <a:p>
+            <a:pPr algn="ctr" indent="0" marL="0">
+              <a:buNone/>
+            </a:pPr>
+            <a:r>
+              <a:rPr lang="en-US" sz="1600" b="1" dirty="0">
+                <a:solidFill>
+                  <a:srgbClr val="1E2761"/>
+                </a:solidFill>
+                <a:latin typeface="Arial" pitchFamily="34" charset="0"/>
+                <a:ea typeface="Arial" pitchFamily="34" charset="-122"/>
+                <a:cs typeface="Arial" pitchFamily="34" charset="-120"/>
+              </a:rPr>
+              <a:t>PPT</a:t>
+            </a:r>
+            <a:endParaRPr lang="en-US" sz="1600" dirty="0"/>
+          </a:p>
+        </p:txBody>
+      </p:sp>
+      <p:sp>
+        <p:nvSpPr>
+          <p:cNvPr id="22" name="Text 20"/>
+          <p:cNvSpPr/>
+          <p:nvPr/>
+        </p:nvSpPr>
+        <p:spPr>
+          <a:xfrm>
+            <a:off x="6263640" y="2788920"/>
+            <a:ext cx="2377440" cy="731520"/>
+          </a:xfrm>
+          <a:prstGeom prst="rect">
+            <a:avLst/>
+          </a:prstGeom>
+          <a:noFill/>
+          <a:ln/>
+        </p:spPr>
+        <p:txBody>
+          <a:bodyPr wrap="square" lIns="0" tIns="0" rIns="0" bIns="0" rtlCol="0" anchor="ctr"/>
+          <a:lstStyle/>
+          <a:p>
+            <a:pPr algn="ctr" indent="0" marL="0">
+              <a:buNone/>
+            </a:pPr>
+            <a:r>
+              <a:rPr lang="en-US" sz="1100" dirty="0">
+                <a:solidFill>
+                  <a:srgbClr val="475569"/>
+                </a:solidFill>
+                <a:latin typeface="Arial" pitchFamily="34" charset="0"/>
+                <a:ea typeface="Arial" pitchFamily="34" charset="-122"/>
+                <a:cs typeface="Arial" pitchFamily="34" charset="-120"/>
+              </a:rPr>
+              <a:t>下次汇报前</a:t>
+            </a:r>
+            <a:endParaRPr lang="en-US" sz="1100" dirty="0"/>
+          </a:p>
+          <a:p>
+            <a:pPr algn="ctr" indent="0" marL="0">
+              <a:buNone/>
+            </a:pPr>
+            <a:r>
+              <a:rPr lang="en-US" sz="1100" dirty="0">
+                <a:solidFill>
+                  <a:srgbClr val="475569"/>
+                </a:solidFill>
+                <a:latin typeface="Arial" pitchFamily="34" charset="0"/>
+                <a:ea typeface="Arial" pitchFamily="34" charset="-122"/>
+                <a:cs typeface="Arial" pitchFamily="34" charset="-120"/>
+              </a:rPr>
+              <a:t>先用 AI 生成大纲</a:t>
+            </a:r>
+            <a:endParaRPr lang="en-US" sz="1100" dirty="0"/>
+          </a:p>
+        </p:txBody>
+      </p:sp>
+      <p:sp>
+        <p:nvSpPr>
+          <p:cNvPr id="23" name="Shape 21"/>
+          <p:cNvSpPr/>
+          <p:nvPr/>
+        </p:nvSpPr>
+        <p:spPr>
+          <a:xfrm>
+            <a:off x="548640" y="3657600"/>
+            <a:ext cx="8046720" cy="1188720"/>
+          </a:xfrm>
+          <a:prstGeom prst="rect">
+            <a:avLst/>
+          </a:prstGeom>
+          <a:solidFill>
+            <a:srgbClr val="FFFFFF"/>
+          </a:solidFill>
+          <a:ln w="12700">
+            <a:solidFill>
+              <a:srgbClr val="E2E8F0"/>
+            </a:solidFill>
+            <a:prstDash val="solid"/>
+          </a:ln>
+        </p:spPr>
+      </p:sp>
+      <p:sp>
+        <p:nvSpPr>
+          <p:cNvPr id="24" name="Text 22"/>
+          <p:cNvSpPr/>
+          <p:nvPr/>
+        </p:nvSpPr>
+        <p:spPr>
+          <a:xfrm>
+            <a:off x="731520" y="3794760"/>
+            <a:ext cx="7680960" cy="914400"/>
+          </a:xfrm>
+          <a:prstGeom prst="rect">
+            <a:avLst/>
+          </a:prstGeom>
+          <a:noFill/>
+          <a:ln/>
+        </p:spPr>
+        <p:txBody>
+          <a:bodyPr wrap="square" lIns="0" tIns="0" rIns="0" bIns="0" rtlCol="0" anchor="ctr"/>
+          <a:lstStyle/>
+          <a:p>
+            <a:pPr indent="0" marL="0">
+              <a:buNone/>
+            </a:pPr>
+            <a:r>
+              <a:rPr lang="en-US" sz="1200" b="1" dirty="0">
+                <a:solidFill>
+                  <a:srgbClr val="1E2761"/>
+                </a:solidFill>
+              </a:rPr>
+              <a:t>进阶路线</a:t>
+            </a:r>
+            <a:endParaRPr lang="en-US" sz="1200" dirty="0"/>
+          </a:p>
+          <a:p>
+            <a:pPr indent="0" marL="0">
+              <a:buNone/>
+            </a:pPr>
+            <a:r>
+              <a:rPr lang="en-US" sz="1200" dirty="0">
+                <a:solidFill>
+                  <a:srgbClr val="475569"/>
+                </a:solidFill>
+              </a:rPr>
+              <a:t>Week 1：熟练 Git 基础循环  →  Week 2：看懂 CC Usage 报告，优化 token 消耗  →  Week 3：独立用 AI 完成 PPT 从大纲到成品</a:t>
+            </a:r>
+            <a:endParaRPr lang="en-US" sz="1200" dirty="0"/>
+          </a:p>
+        </p:txBody>
+      </p:sp>
+    </p:spTree>
+  </p:cSld>
+  <p:clrMapOvr>
+    <a:masterClrMapping/>
+  </p:clrMapOvr>
+</p:sld>
+</file>
+
+<file path=ppt/slides/slide12.xml><?xml version="1.0" encoding="utf-8"?>
+<p:sld xmlns:a="http://schemas.openxmlformats.org/drawingml/2006/main" xmlns:r="http://schemas.openxmlformats.org/officeDocument/2006/relationships" xmlns:p="http://schemas.openxmlformats.org/presentationml/2006/main">
+  <p:cSld name="Slide 12">
     <p:bg>
       <p:bgPr>
         <a:solidFill>
@@ -5781,7 +6761,7 @@
                 <a:ea typeface="Arial" pitchFamily="34" charset="-122"/>
                 <a:cs typeface="Arial" pitchFamily="34" charset="-120"/>
               </a:rPr>
-              <a:t>CC Usage</a:t>
+              <a:t>实用工具推荐</a:t>
             </a:r>
             <a:endParaRPr lang="en-US" sz="3200" dirty="0"/>
           </a:p>
@@ -5820,7 +6800,7 @@
                 <a:ea typeface="Arial" pitchFamily="34" charset="-122"/>
                 <a:cs typeface="Arial" pitchFamily="34" charset="-120"/>
               </a:rPr>
-              <a:t>（1/2）Token 是什么，为什么要统计</a:t>
+              <a:t>DevSidecar — 解决 GitHub 网络问题</a:t>
             </a:r>
             <a:endParaRPr lang="en-US" sz="1400" dirty="0"/>
           </a:p>
@@ -5835,7 +6815,307 @@
         <p:spPr>
           <a:xfrm>
             <a:off x="548640" y="1371600"/>
-            <a:ext cx="8046720" cy="1463040"/>
+            <a:ext cx="8046720" cy="731520"/>
+          </a:xfrm>
+          <a:prstGeom prst="rect">
+            <a:avLst/>
+          </a:prstGeom>
+          <a:solidFill>
+            <a:srgbClr val="FEF3C7"/>
+          </a:solidFill>
+          <a:ln w="12700">
+            <a:solidFill>
+              <a:srgbClr val="F59E0B"/>
+            </a:solidFill>
+            <a:prstDash val="solid"/>
+          </a:ln>
+        </p:spPr>
+      </p:sp>
+      <p:sp>
+        <p:nvSpPr>
+          <p:cNvPr id="6" name="Text 4"/>
+          <p:cNvSpPr/>
+          <p:nvPr/>
+        </p:nvSpPr>
+        <p:spPr>
+          <a:xfrm>
+            <a:off x="731520" y="1463040"/>
+            <a:ext cx="7680960" cy="548640"/>
+          </a:xfrm>
+          <a:prstGeom prst="rect">
+            <a:avLst/>
+          </a:prstGeom>
+          <a:noFill/>
+          <a:ln/>
+        </p:spPr>
+        <p:txBody>
+          <a:bodyPr wrap="square" rtlCol="0" anchor="ctr"/>
+          <a:lstStyle/>
+          <a:p>
+            <a:pPr indent="0" marL="0">
+              <a:buNone/>
+            </a:pPr>
+            <a:r>
+              <a:rPr lang="en-US" sz="1200" dirty="0">
+                <a:solidFill>
+                  <a:srgbClr val="92400E"/>
+                </a:solidFill>
+                <a:latin typeface="Arial" pitchFamily="34" charset="0"/>
+                <a:ea typeface="Arial" pitchFamily="34" charset="-122"/>
+                <a:cs typeface="Arial" pitchFamily="34" charset="-120"/>
+              </a:rPr>
+              <a:t>问题：git push / git clone 连不上 GitHub，报错 timeout</a:t>
+            </a:r>
+            <a:endParaRPr lang="en-US" sz="1200" dirty="0"/>
+          </a:p>
+        </p:txBody>
+      </p:sp>
+      <p:sp>
+        <p:nvSpPr>
+          <p:cNvPr id="7" name="Text 5"/>
+          <p:cNvSpPr/>
+          <p:nvPr/>
+        </p:nvSpPr>
+        <p:spPr>
+          <a:xfrm>
+            <a:off x="548640" y="2286000"/>
+            <a:ext cx="8046720" cy="320040"/>
+          </a:xfrm>
+          <a:prstGeom prst="rect">
+            <a:avLst/>
+          </a:prstGeom>
+          <a:noFill/>
+          <a:ln/>
+        </p:spPr>
+        <p:txBody>
+          <a:bodyPr wrap="square" lIns="0" tIns="0" rIns="0" bIns="0" rtlCol="0" anchor="ctr"/>
+          <a:lstStyle/>
+          <a:p>
+            <a:pPr indent="0" marL="0">
+              <a:buNone/>
+            </a:pPr>
+            <a:r>
+              <a:rPr lang="en-US" sz="1400" b="1" dirty="0">
+                <a:solidFill>
+                  <a:srgbClr val="1E2761"/>
+                </a:solidFill>
+                <a:latin typeface="Arial" pitchFamily="34" charset="0"/>
+                <a:ea typeface="Arial" pitchFamily="34" charset="-122"/>
+                <a:cs typeface="Arial" pitchFamily="34" charset="-120"/>
+              </a:rPr>
+              <a:t>特点</a:t>
+            </a:r>
+            <a:endParaRPr lang="en-US" sz="1400" dirty="0"/>
+          </a:p>
+        </p:txBody>
+      </p:sp>
+      <p:sp>
+        <p:nvSpPr>
+          <p:cNvPr id="8" name="Text 6"/>
+          <p:cNvSpPr/>
+          <p:nvPr/>
+        </p:nvSpPr>
+        <p:spPr>
+          <a:xfrm>
+            <a:off x="548640" y="2651760"/>
+            <a:ext cx="8046720" cy="1645920"/>
+          </a:xfrm>
+          <a:prstGeom prst="rect">
+            <a:avLst/>
+          </a:prstGeom>
+          <a:noFill/>
+          <a:ln/>
+        </p:spPr>
+        <p:txBody>
+          <a:bodyPr wrap="square" rtlCol="0" anchor="ctr"/>
+          <a:lstStyle/>
+          <a:p>
+            <a:pPr indent="0" marL="0">
+              <a:lnSpc>
+                <a:spcPts val="2200"/>
+              </a:lnSpc>
+              <a:buNone/>
+            </a:pPr>
+            <a:r>
+              <a:rPr lang="en-US" sz="1200" dirty="0">
+                <a:solidFill>
+                  <a:srgbClr val="1E2761"/>
+                </a:solidFill>
+                <a:latin typeface="Arial" pitchFamily="34" charset="0"/>
+                <a:ea typeface="Arial" pitchFamily="34" charset="-122"/>
+                <a:cs typeface="Arial" pitchFamily="34" charset="-120"/>
+              </a:rPr>
+              <a:t>• </a:t>
+            </a:r>
+            <a:pPr indent="0" marL="0">
+              <a:lnSpc>
+                <a:spcPts val="2200"/>
+              </a:lnSpc>
+              <a:buNone/>
+            </a:pPr>
+            <a:r>
+              <a:rPr lang="en-US" sz="1200" dirty="0">
+                <a:solidFill>
+                  <a:srgbClr val="334155"/>
+                </a:solidFill>
+                <a:latin typeface="Arial" pitchFamily="34" charset="0"/>
+                <a:ea typeface="Arial" pitchFamily="34" charset="-122"/>
+                <a:cs typeface="Arial" pitchFamily="34" charset="-120"/>
+              </a:rPr>
+              <a:t>桌面软件，Windows / Mac / Linux 都支持</a:t>
+            </a:r>
+            <a:pPr indent="0" marL="0">
+              <a:lnSpc>
+                <a:spcPts val="2200"/>
+              </a:lnSpc>
+              <a:buNone/>
+            </a:pPr>
+            <a:endParaRPr lang="en-US" sz="1200" dirty="0"/>
+          </a:p>
+          <a:p>
+            <a:pPr indent="0" marL="0">
+              <a:lnSpc>
+                <a:spcPts val="2200"/>
+              </a:lnSpc>
+              <a:buNone/>
+            </a:pPr>
+            <a:r>
+              <a:rPr lang="en-US" sz="1200" dirty="0">
+                <a:solidFill>
+                  <a:srgbClr val="1E2761"/>
+                </a:solidFill>
+                <a:latin typeface="Arial" pitchFamily="34" charset="0"/>
+                <a:ea typeface="Arial" pitchFamily="34" charset="-122"/>
+                <a:cs typeface="Arial" pitchFamily="34" charset="-120"/>
+              </a:rPr>
+              <a:t>• </a:t>
+            </a:r>
+            <a:endParaRPr lang="en-US" sz="1200" dirty="0"/>
+          </a:p>
+          <a:p>
+            <a:pPr indent="0" marL="0">
+              <a:lnSpc>
+                <a:spcPts val="2200"/>
+              </a:lnSpc>
+              <a:buNone/>
+            </a:pPr>
+            <a:r>
+              <a:rPr lang="en-US" sz="1200" dirty="0">
+                <a:solidFill>
+                  <a:srgbClr val="334155"/>
+                </a:solidFill>
+                <a:latin typeface="Arial" pitchFamily="34" charset="0"/>
+                <a:ea typeface="Arial" pitchFamily="34" charset="-122"/>
+                <a:cs typeface="Arial" pitchFamily="34" charset="-120"/>
+              </a:rPr>
+              <a:t>点击"一键加速"，系统全局生效</a:t>
+            </a:r>
+            <a:pPr indent="0" marL="0">
+              <a:lnSpc>
+                <a:spcPts val="2200"/>
+              </a:lnSpc>
+              <a:buNone/>
+            </a:pPr>
+            <a:endParaRPr lang="en-US" sz="1200" dirty="0"/>
+          </a:p>
+          <a:p>
+            <a:pPr indent="0" marL="0">
+              <a:lnSpc>
+                <a:spcPts val="2200"/>
+              </a:lnSpc>
+              <a:buNone/>
+            </a:pPr>
+            <a:r>
+              <a:rPr lang="en-US" sz="1200" dirty="0">
+                <a:solidFill>
+                  <a:srgbClr val="1E2761"/>
+                </a:solidFill>
+                <a:latin typeface="Arial" pitchFamily="34" charset="0"/>
+                <a:ea typeface="Arial" pitchFamily="34" charset="-122"/>
+                <a:cs typeface="Arial" pitchFamily="34" charset="-120"/>
+              </a:rPr>
+              <a:t>• </a:t>
+            </a:r>
+            <a:endParaRPr lang="en-US" sz="1200" dirty="0"/>
+          </a:p>
+          <a:p>
+            <a:pPr indent="0" marL="0">
+              <a:lnSpc>
+                <a:spcPts val="2200"/>
+              </a:lnSpc>
+              <a:buNone/>
+            </a:pPr>
+            <a:r>
+              <a:rPr lang="en-US" sz="1200" dirty="0">
+                <a:solidFill>
+                  <a:srgbClr val="334155"/>
+                </a:solidFill>
+                <a:latin typeface="Arial" pitchFamily="34" charset="0"/>
+                <a:ea typeface="Arial" pitchFamily="34" charset="-122"/>
+                <a:cs typeface="Arial" pitchFamily="34" charset="-120"/>
+              </a:rPr>
+              <a:t>命令行里的 git push 也能走加速通道</a:t>
+            </a:r>
+            <a:pPr indent="0" marL="0">
+              <a:lnSpc>
+                <a:spcPts val="2200"/>
+              </a:lnSpc>
+              <a:buNone/>
+            </a:pPr>
+            <a:endParaRPr lang="en-US" sz="1200" dirty="0"/>
+          </a:p>
+          <a:p>
+            <a:pPr indent="0" marL="0">
+              <a:lnSpc>
+                <a:spcPts val="2200"/>
+              </a:lnSpc>
+              <a:buNone/>
+            </a:pPr>
+            <a:r>
+              <a:rPr lang="en-US" sz="1200" dirty="0">
+                <a:solidFill>
+                  <a:srgbClr val="1E2761"/>
+                </a:solidFill>
+                <a:latin typeface="Arial" pitchFamily="34" charset="0"/>
+                <a:ea typeface="Arial" pitchFamily="34" charset="-122"/>
+                <a:cs typeface="Arial" pitchFamily="34" charset="-120"/>
+              </a:rPr>
+              <a:t>• </a:t>
+            </a:r>
+            <a:endParaRPr lang="en-US" sz="1200" dirty="0"/>
+          </a:p>
+          <a:p>
+            <a:pPr indent="0" marL="0">
+              <a:lnSpc>
+                <a:spcPts val="2200"/>
+              </a:lnSpc>
+              <a:buNone/>
+            </a:pPr>
+            <a:r>
+              <a:rPr lang="en-US" sz="1200" dirty="0">
+                <a:solidFill>
+                  <a:srgbClr val="334155"/>
+                </a:solidFill>
+                <a:latin typeface="Arial" pitchFamily="34" charset="0"/>
+                <a:ea typeface="Arial" pitchFamily="34" charset="-122"/>
+                <a:cs typeface="Arial" pitchFamily="34" charset="-120"/>
+              </a:rPr>
+              <a:t>同时还加速 npm、pip、Stack Overflow 等</a:t>
+            </a:r>
+            <a:endParaRPr lang="en-US" sz="1200" dirty="0"/>
+          </a:p>
+        </p:txBody>
+      </p:sp>
+      <p:sp>
+        <p:nvSpPr>
+          <p:cNvPr id="9" name="Shape 7"/>
+          <p:cNvSpPr/>
+          <p:nvPr/>
+        </p:nvSpPr>
+        <p:spPr>
+          <a:xfrm>
+            <a:off x="548640" y="4389120"/>
+            <a:ext cx="8046720" cy="548640"/>
           </a:xfrm>
           <a:prstGeom prst="rect">
             <a:avLst/>
@@ -5843,7 +7123,7 @@
           <a:solidFill>
             <a:srgbClr val="F8FAFC"/>
           </a:solidFill>
-          <a:ln w="19050">
+          <a:ln w="12700">
             <a:solidFill>
               <a:srgbClr val="CADCFC"/>
             </a:solidFill>
@@ -5853,14 +7133,14 @@
       </p:sp>
       <p:sp>
         <p:nvSpPr>
-          <p:cNvPr id="6" name="Text 4"/>
-          <p:cNvSpPr/>
-          <p:nvPr/>
-        </p:nvSpPr>
-        <p:spPr>
-          <a:xfrm>
-            <a:off x="731520" y="1554480"/>
-            <a:ext cx="7680960" cy="1188720"/>
+          <p:cNvPr id="10" name="Text 8"/>
+          <p:cNvSpPr/>
+          <p:nvPr/>
+        </p:nvSpPr>
+        <p:spPr>
+          <a:xfrm>
+            <a:off x="731520" y="4434840"/>
+            <a:ext cx="7680960" cy="457200"/>
           </a:xfrm>
           <a:prstGeom prst="rect">
             <a:avLst/>
@@ -5869,396 +7149,24 @@
           <a:ln/>
         </p:spPr>
         <p:txBody>
-          <a:bodyPr wrap="square" lIns="0" tIns="0" rIns="0" bIns="0" rtlCol="0" anchor="ctr"/>
-          <a:lstStyle/>
-          <a:p>
-            <a:pPr indent="0" marL="0">
-              <a:buNone/>
-            </a:pPr>
-            <a:r>
-              <a:rPr lang="en-US" sz="1300" b="1" dirty="0">
-                <a:solidFill>
-                  <a:srgbClr val="1E2761"/>
-                </a:solidFill>
-              </a:rPr>
-              <a:t>Token = AI 模型的计费单位</a:t>
-            </a:r>
-            <a:endParaRPr lang="en-US" sz="1300" dirty="0"/>
-          </a:p>
-          <a:p>
-            <a:pPr indent="0" marL="0">
-              <a:buNone/>
-            </a:pPr>
-            <a:r>
-              <a:rPr lang="en-US" sz="1300" dirty="0">
-                <a:solidFill>
-                  <a:srgbClr val="475569"/>
-                </a:solidFill>
-              </a:rPr>
-              <a:t>· 不是字数，是模型处理文本时的最小单元</a:t>
-            </a:r>
-            <a:endParaRPr lang="en-US" sz="1300" dirty="0"/>
-          </a:p>
-          <a:p>
-            <a:pPr indent="0" marL="0">
-              <a:buNone/>
-            </a:pPr>
-            <a:r>
-              <a:rPr lang="en-US" sz="1300" dirty="0">
-                <a:solidFill>
-                  <a:srgbClr val="475569"/>
-                </a:solidFill>
-              </a:rPr>
-              <a:t>· 英文约 1 token ≈ 0.75 个单词  |  中文约 1 token ≈ 0.5 个汉字</a:t>
-            </a:r>
-            <a:endParaRPr lang="en-US" sz="1300" dirty="0"/>
-          </a:p>
-          <a:p>
-            <a:pPr indent="0" marL="0">
-              <a:buNone/>
-            </a:pPr>
-            <a:r>
-              <a:rPr lang="en-US" sz="1300" dirty="0">
-                <a:solidFill>
-                  <a:srgbClr val="475569"/>
-                </a:solidFill>
-              </a:rPr>
-              <a:t>· 输入和输出都计费</a:t>
-            </a:r>
-            <a:endParaRPr lang="en-US" sz="1300" dirty="0"/>
-          </a:p>
-        </p:txBody>
-      </p:sp>
-      <p:sp>
-        <p:nvSpPr>
-          <p:cNvPr id="7" name="Text 5"/>
-          <p:cNvSpPr/>
-          <p:nvPr/>
-        </p:nvSpPr>
-        <p:spPr>
-          <a:xfrm>
-            <a:off x="548640" y="3108960"/>
-            <a:ext cx="8046720" cy="274320"/>
-          </a:xfrm>
-          <a:prstGeom prst="rect">
-            <a:avLst/>
-          </a:prstGeom>
-          <a:noFill/>
-          <a:ln/>
-        </p:spPr>
-        <p:txBody>
-          <a:bodyPr wrap="square" lIns="0" tIns="0" rIns="0" bIns="0" rtlCol="0" anchor="ctr"/>
-          <a:lstStyle/>
-          <a:p>
-            <a:pPr indent="0" marL="0">
-              <a:buNone/>
-            </a:pPr>
-            <a:r>
-              <a:rPr lang="en-US" sz="1400" b="1" dirty="0">
-                <a:solidFill>
-                  <a:srgbClr val="1E2761"/>
+          <a:bodyPr wrap="square" rtlCol="0" anchor="ctr"/>
+          <a:lstStyle/>
+          <a:p>
+            <a:pPr indent="0" marL="0">
+              <a:buNone/>
+            </a:pPr>
+            <a:r>
+              <a:rPr lang="en-US" sz="1100" dirty="0">
+                <a:solidFill>
+                  <a:srgbClr val="64748B"/>
                 </a:solidFill>
                 <a:latin typeface="Arial" pitchFamily="34" charset="0"/>
                 <a:ea typeface="Arial" pitchFamily="34" charset="-122"/>
                 <a:cs typeface="Arial" pitchFamily="34" charset="-120"/>
               </a:rPr>
-              <a:t>为什么要监控</a:t>
-            </a:r>
-            <a:endParaRPr lang="en-US" sz="1400" dirty="0"/>
-          </a:p>
-        </p:txBody>
-      </p:sp>
-      <p:sp>
-        <p:nvSpPr>
-          <p:cNvPr id="8" name="Shape 6"/>
-          <p:cNvSpPr/>
-          <p:nvPr/>
-        </p:nvSpPr>
-        <p:spPr>
-          <a:xfrm>
-            <a:off x="548640" y="3520440"/>
-            <a:ext cx="164592" cy="164592"/>
-          </a:xfrm>
-          <a:prstGeom prst="ellipse">
-            <a:avLst/>
-          </a:prstGeom>
-          <a:solidFill>
-            <a:srgbClr val="1E2761"/>
-          </a:solidFill>
-          <a:ln/>
-        </p:spPr>
-      </p:sp>
-      <p:sp>
-        <p:nvSpPr>
-          <p:cNvPr id="9" name="Text 7"/>
-          <p:cNvSpPr/>
-          <p:nvPr/>
-        </p:nvSpPr>
-        <p:spPr>
-          <a:xfrm>
-            <a:off x="548640" y="3520440"/>
-            <a:ext cx="164592" cy="164592"/>
-          </a:xfrm>
-          <a:prstGeom prst="rect">
-            <a:avLst/>
-          </a:prstGeom>
-          <a:noFill/>
-          <a:ln/>
-        </p:spPr>
-        <p:txBody>
-          <a:bodyPr wrap="square" lIns="0" tIns="0" rIns="0" bIns="0" rtlCol="0" anchor="ctr"/>
-          <a:lstStyle/>
-          <a:p>
-            <a:pPr algn="ctr" indent="0" marL="0">
-              <a:buNone/>
-            </a:pPr>
-            <a:r>
-              <a:rPr lang="en-US" sz="900" b="1" dirty="0">
-                <a:solidFill>
-                  <a:srgbClr val="FFFFFF"/>
-                </a:solidFill>
-                <a:latin typeface="Arial" pitchFamily="34" charset="0"/>
-                <a:ea typeface="Arial" pitchFamily="34" charset="-122"/>
-                <a:cs typeface="Arial" pitchFamily="34" charset="-120"/>
-              </a:rPr>
-              <a:t>1</a:t>
-            </a:r>
-            <a:endParaRPr lang="en-US" sz="900" dirty="0"/>
-          </a:p>
-        </p:txBody>
-      </p:sp>
-      <p:sp>
-        <p:nvSpPr>
-          <p:cNvPr id="10" name="Text 8"/>
-          <p:cNvSpPr/>
-          <p:nvPr/>
-        </p:nvSpPr>
-        <p:spPr>
-          <a:xfrm>
-            <a:off x="822960" y="3502152"/>
-            <a:ext cx="7772400" cy="228600"/>
-          </a:xfrm>
-          <a:prstGeom prst="rect">
-            <a:avLst/>
-          </a:prstGeom>
-          <a:noFill/>
-          <a:ln/>
-        </p:spPr>
-        <p:txBody>
-          <a:bodyPr wrap="square" lIns="0" tIns="0" rIns="0" bIns="0" rtlCol="0" anchor="ctr"/>
-          <a:lstStyle/>
-          <a:p>
-            <a:pPr indent="0" marL="0">
-              <a:buNone/>
-            </a:pPr>
-            <a:r>
-              <a:rPr lang="en-US" sz="1200" dirty="0">
-                <a:solidFill>
-                  <a:srgbClr val="475569"/>
-                </a:solidFill>
-                <a:latin typeface="Arial" pitchFamily="34" charset="0"/>
-                <a:ea typeface="Arial" pitchFamily="34" charset="-122"/>
-                <a:cs typeface="Arial" pitchFamily="34" charset="-120"/>
-              </a:rPr>
-              <a:t>LLM 调用按 token 计费，烧多了直接体现在账单上</a:t>
-            </a:r>
-            <a:endParaRPr lang="en-US" sz="1200" dirty="0"/>
-          </a:p>
-        </p:txBody>
-      </p:sp>
-      <p:sp>
-        <p:nvSpPr>
-          <p:cNvPr id="11" name="Shape 9"/>
-          <p:cNvSpPr/>
-          <p:nvPr/>
-        </p:nvSpPr>
-        <p:spPr>
-          <a:xfrm>
-            <a:off x="548640" y="3931920"/>
-            <a:ext cx="164592" cy="164592"/>
-          </a:xfrm>
-          <a:prstGeom prst="ellipse">
-            <a:avLst/>
-          </a:prstGeom>
-          <a:solidFill>
-            <a:srgbClr val="1E2761"/>
-          </a:solidFill>
-          <a:ln/>
-        </p:spPr>
-      </p:sp>
-      <p:sp>
-        <p:nvSpPr>
-          <p:cNvPr id="12" name="Text 10"/>
-          <p:cNvSpPr/>
-          <p:nvPr/>
-        </p:nvSpPr>
-        <p:spPr>
-          <a:xfrm>
-            <a:off x="548640" y="3931920"/>
-            <a:ext cx="164592" cy="164592"/>
-          </a:xfrm>
-          <a:prstGeom prst="rect">
-            <a:avLst/>
-          </a:prstGeom>
-          <a:noFill/>
-          <a:ln/>
-        </p:spPr>
-        <p:txBody>
-          <a:bodyPr wrap="square" lIns="0" tIns="0" rIns="0" bIns="0" rtlCol="0" anchor="ctr"/>
-          <a:lstStyle/>
-          <a:p>
-            <a:pPr algn="ctr" indent="0" marL="0">
-              <a:buNone/>
-            </a:pPr>
-            <a:r>
-              <a:rPr lang="en-US" sz="900" b="1" dirty="0">
-                <a:solidFill>
-                  <a:srgbClr val="FFFFFF"/>
-                </a:solidFill>
-                <a:latin typeface="Arial" pitchFamily="34" charset="0"/>
-                <a:ea typeface="Arial" pitchFamily="34" charset="-122"/>
-                <a:cs typeface="Arial" pitchFamily="34" charset="-120"/>
-              </a:rPr>
-              <a:t>2</a:t>
-            </a:r>
-            <a:endParaRPr lang="en-US" sz="900" dirty="0"/>
-          </a:p>
-        </p:txBody>
-      </p:sp>
-      <p:sp>
-        <p:nvSpPr>
-          <p:cNvPr id="13" name="Text 11"/>
-          <p:cNvSpPr/>
-          <p:nvPr/>
-        </p:nvSpPr>
-        <p:spPr>
-          <a:xfrm>
-            <a:off x="822960" y="3913632"/>
-            <a:ext cx="7772400" cy="228600"/>
-          </a:xfrm>
-          <a:prstGeom prst="rect">
-            <a:avLst/>
-          </a:prstGeom>
-          <a:noFill/>
-          <a:ln/>
-        </p:spPr>
-        <p:txBody>
-          <a:bodyPr wrap="square" lIns="0" tIns="0" rIns="0" bIns="0" rtlCol="0" anchor="ctr"/>
-          <a:lstStyle/>
-          <a:p>
-            <a:pPr indent="0" marL="0">
-              <a:buNone/>
-            </a:pPr>
-            <a:r>
-              <a:rPr lang="en-US" sz="1200" dirty="0">
-                <a:solidFill>
-                  <a:srgbClr val="475569"/>
-                </a:solidFill>
-                <a:latin typeface="Arial" pitchFamily="34" charset="0"/>
-                <a:ea typeface="Arial" pitchFamily="34" charset="-122"/>
-                <a:cs typeface="Arial" pitchFamily="34" charset="-120"/>
-              </a:rPr>
-              <a:t>知道钱花在哪 = 知道时间花在哪</a:t>
-            </a:r>
-            <a:endParaRPr lang="en-US" sz="1200" dirty="0"/>
-          </a:p>
-        </p:txBody>
-      </p:sp>
-      <p:sp>
-        <p:nvSpPr>
-          <p:cNvPr id="14" name="Shape 12"/>
-          <p:cNvSpPr/>
-          <p:nvPr/>
-        </p:nvSpPr>
-        <p:spPr>
-          <a:xfrm>
-            <a:off x="548640" y="4343400"/>
-            <a:ext cx="164592" cy="164592"/>
-          </a:xfrm>
-          <a:prstGeom prst="ellipse">
-            <a:avLst/>
-          </a:prstGeom>
-          <a:solidFill>
-            <a:srgbClr val="1E2761"/>
-          </a:solidFill>
-          <a:ln/>
-        </p:spPr>
-      </p:sp>
-      <p:sp>
-        <p:nvSpPr>
-          <p:cNvPr id="15" name="Text 13"/>
-          <p:cNvSpPr/>
-          <p:nvPr/>
-        </p:nvSpPr>
-        <p:spPr>
-          <a:xfrm>
-            <a:off x="548640" y="4343400"/>
-            <a:ext cx="164592" cy="164592"/>
-          </a:xfrm>
-          <a:prstGeom prst="rect">
-            <a:avLst/>
-          </a:prstGeom>
-          <a:noFill/>
-          <a:ln/>
-        </p:spPr>
-        <p:txBody>
-          <a:bodyPr wrap="square" lIns="0" tIns="0" rIns="0" bIns="0" rtlCol="0" anchor="ctr"/>
-          <a:lstStyle/>
-          <a:p>
-            <a:pPr algn="ctr" indent="0" marL="0">
-              <a:buNone/>
-            </a:pPr>
-            <a:r>
-              <a:rPr lang="en-US" sz="900" b="1" dirty="0">
-                <a:solidFill>
-                  <a:srgbClr val="FFFFFF"/>
-                </a:solidFill>
-                <a:latin typeface="Arial" pitchFamily="34" charset="0"/>
-                <a:ea typeface="Arial" pitchFamily="34" charset="-122"/>
-                <a:cs typeface="Arial" pitchFamily="34" charset="-120"/>
-              </a:rPr>
-              <a:t>3</a:t>
-            </a:r>
-            <a:endParaRPr lang="en-US" sz="900" dirty="0"/>
-          </a:p>
-        </p:txBody>
-      </p:sp>
-      <p:sp>
-        <p:nvSpPr>
-          <p:cNvPr id="16" name="Text 14"/>
-          <p:cNvSpPr/>
-          <p:nvPr/>
-        </p:nvSpPr>
-        <p:spPr>
-          <a:xfrm>
-            <a:off x="822960" y="4325112"/>
-            <a:ext cx="7772400" cy="228600"/>
-          </a:xfrm>
-          <a:prstGeom prst="rect">
-            <a:avLst/>
-          </a:prstGeom>
-          <a:noFill/>
-          <a:ln/>
-        </p:spPr>
-        <p:txBody>
-          <a:bodyPr wrap="square" lIns="0" tIns="0" rIns="0" bIns="0" rtlCol="0" anchor="ctr"/>
-          <a:lstStyle/>
-          <a:p>
-            <a:pPr indent="0" marL="0">
-              <a:buNone/>
-            </a:pPr>
-            <a:r>
-              <a:rPr lang="en-US" sz="1200" dirty="0">
-                <a:solidFill>
-                  <a:srgbClr val="475569"/>
-                </a:solidFill>
-                <a:latin typeface="Arial" pitchFamily="34" charset="0"/>
-                <a:ea typeface="Arial" pitchFamily="34" charset="-122"/>
-                <a:cs typeface="Arial" pitchFamily="34" charset="-120"/>
-              </a:rPr>
-              <a:t>发现异常消耗（死循环调用、重复请求）</a:t>
-            </a:r>
-            <a:endParaRPr lang="en-US" sz="1200" dirty="0"/>
+              <a:t>适用：git clone 大型仓库、pip/npm install、GitHub Release 下载</a:t>
+            </a:r>
+            <a:endParaRPr lang="en-US" sz="1100" dirty="0"/>
           </a:p>
         </p:txBody>
       </p:sp>
@@ -6386,7 +7294,7 @@
                 <a:ea typeface="Arial" pitchFamily="34" charset="-122"/>
                 <a:cs typeface="Arial" pitchFamily="34" charset="-120"/>
               </a:rPr>
-              <a:t>（2/2）用法和省钱技巧</a:t>
+              <a:t>（1/2）Token 是什么，为什么要统计</a:t>
             </a:r>
             <a:endParaRPr lang="en-US" sz="1400" dirty="0"/>
           </a:p>
@@ -6400,16 +7308,21 @@
         </p:nvSpPr>
         <p:spPr>
           <a:xfrm>
-            <a:off x="548640" y="1280160"/>
-            <a:ext cx="4114800" cy="2194560"/>
+            <a:off x="548640" y="1371600"/>
+            <a:ext cx="8046720" cy="1463040"/>
           </a:xfrm>
           <a:prstGeom prst="rect">
             <a:avLst/>
           </a:prstGeom>
           <a:solidFill>
-            <a:srgbClr val="1E293B"/>
+            <a:srgbClr val="F8FAFC"/>
           </a:solidFill>
-          <a:ln/>
+          <a:ln w="19050">
+            <a:solidFill>
+              <a:srgbClr val="CADCFC"/>
+            </a:solidFill>
+            <a:prstDash val="solid"/>
+          </a:ln>
         </p:spPr>
       </p:sp>
       <p:sp>
@@ -6420,8 +7333,8 @@
         </p:nvSpPr>
         <p:spPr>
           <a:xfrm>
-            <a:off x="731520" y="1417320"/>
-            <a:ext cx="3749040" cy="1920240"/>
+            <a:off x="731520" y="1554480"/>
+            <a:ext cx="7680960" cy="1188720"/>
           </a:xfrm>
           <a:prstGeom prst="rect">
             <a:avLst/>
@@ -6437,142 +7350,56 @@
               <a:buNone/>
             </a:pPr>
             <a:r>
-              <a:rPr lang="en-US" sz="1000" dirty="0">
-                <a:solidFill>
-                  <a:srgbClr val="64748B"/>
-                </a:solidFill>
-                <a:latin typeface="Consolas" pitchFamily="34" charset="0"/>
-                <a:ea typeface="Consolas" pitchFamily="34" charset="-122"/>
-                <a:cs typeface="Consolas" pitchFamily="34" charset="-120"/>
-              </a:rPr>
-              <a:t># 安装</a:t>
-            </a:r>
-            <a:endParaRPr lang="en-US" sz="1000" dirty="0"/>
-          </a:p>
-          <a:p>
-            <a:pPr indent="0" marL="0">
-              <a:buNone/>
-            </a:pPr>
-            <a:r>
-              <a:rPr lang="en-US" sz="1000" dirty="0">
-                <a:solidFill>
-                  <a:srgbClr val="A5B4FC"/>
-                </a:solidFill>
-                <a:latin typeface="Consolas" pitchFamily="34" charset="0"/>
-                <a:ea typeface="Consolas" pitchFamily="34" charset="-122"/>
-                <a:cs typeface="Consolas" pitchFamily="34" charset="-120"/>
-              </a:rPr>
-              <a:t>npm install -g ccusage</a:t>
-            </a:r>
-            <a:endParaRPr lang="en-US" sz="1000" dirty="0"/>
-          </a:p>
-          <a:p>
-            <a:pPr indent="0" marL="0">
-              <a:buNone/>
-            </a:pPr>
-            <a:endParaRPr lang="en-US" sz="1000" dirty="0"/>
-          </a:p>
-          <a:p>
-            <a:pPr indent="0" marL="0">
-              <a:buNone/>
-            </a:pPr>
-            <a:r>
-              <a:rPr lang="en-US" sz="1000" dirty="0">
-                <a:solidFill>
-                  <a:srgbClr val="64748B"/>
-                </a:solidFill>
-                <a:latin typeface="Consolas" pitchFamily="34" charset="0"/>
-                <a:ea typeface="Consolas" pitchFamily="34" charset="-122"/>
-                <a:cs typeface="Consolas" pitchFamily="34" charset="-120"/>
-              </a:rPr>
-              <a:t># 常用命令</a:t>
-            </a:r>
-            <a:endParaRPr lang="en-US" sz="1000" dirty="0"/>
-          </a:p>
-          <a:p>
-            <a:pPr indent="0" marL="0">
-              <a:buNone/>
-            </a:pPr>
-            <a:r>
-              <a:rPr lang="en-US" sz="1000" dirty="0">
-                <a:solidFill>
-                  <a:srgbClr val="A5B4FC"/>
-                </a:solidFill>
-                <a:latin typeface="Consolas" pitchFamily="34" charset="0"/>
-                <a:ea typeface="Consolas" pitchFamily="34" charset="-122"/>
-                <a:cs typeface="Consolas" pitchFamily="34" charset="-120"/>
-              </a:rPr>
-              <a:t>ccusage today          # 今天</a:t>
-            </a:r>
-            <a:endParaRPr lang="en-US" sz="1000" dirty="0"/>
-          </a:p>
-          <a:p>
-            <a:pPr indent="0" marL="0">
-              <a:buNone/>
-            </a:pPr>
-            <a:r>
-              <a:rPr lang="en-US" sz="1000" dirty="0">
-                <a:solidFill>
-                  <a:srgbClr val="A5B4FC"/>
-                </a:solidFill>
-                <a:latin typeface="Consolas" pitchFamily="34" charset="0"/>
-                <a:ea typeface="Consolas" pitchFamily="34" charset="-122"/>
-                <a:cs typeface="Consolas" pitchFamily="34" charset="-120"/>
-              </a:rPr>
-              <a:t>ccusage week           # 本周</a:t>
-            </a:r>
-            <a:endParaRPr lang="en-US" sz="1000" dirty="0"/>
-          </a:p>
-          <a:p>
-            <a:pPr indent="0" marL="0">
-              <a:buNone/>
-            </a:pPr>
-            <a:r>
-              <a:rPr lang="en-US" sz="1000" dirty="0">
-                <a:solidFill>
-                  <a:srgbClr val="A5B4FC"/>
-                </a:solidFill>
-                <a:latin typeface="Consolas" pitchFamily="34" charset="0"/>
-                <a:ea typeface="Consolas" pitchFamily="34" charset="-122"/>
-                <a:cs typeface="Consolas" pitchFamily="34" charset="-120"/>
-              </a:rPr>
-              <a:t>ccusage by-model       # 按模型</a:t>
-            </a:r>
-            <a:endParaRPr lang="en-US" sz="1000" dirty="0"/>
-          </a:p>
-          <a:p>
-            <a:pPr indent="0" marL="0">
-              <a:buNone/>
-            </a:pPr>
-            <a:r>
-              <a:rPr lang="en-US" sz="1000" dirty="0">
-                <a:solidFill>
-                  <a:srgbClr val="A5B4FC"/>
-                </a:solidFill>
-                <a:latin typeface="Consolas" pitchFamily="34" charset="0"/>
-                <a:ea typeface="Consolas" pitchFamily="34" charset="-122"/>
-                <a:cs typeface="Consolas" pitchFamily="34" charset="-120"/>
-              </a:rPr>
-              <a:t>ccusage by-project     # 按项目</a:t>
-            </a:r>
-            <a:endParaRPr lang="en-US" sz="1000" dirty="0"/>
-          </a:p>
-          <a:p>
-            <a:pPr indent="0" marL="0">
-              <a:buNone/>
-            </a:pPr>
-            <a:r>
-              <a:rPr lang="en-US" sz="1000" dirty="0">
-                <a:solidFill>
-                  <a:srgbClr val="A5B4FC"/>
-                </a:solidFill>
-                <a:latin typeface="Consolas" pitchFamily="34" charset="0"/>
-                <a:ea typeface="Consolas" pitchFamily="34" charset="-122"/>
-                <a:cs typeface="Consolas" pitchFamily="34" charset="-120"/>
-              </a:rPr>
-              <a:t>ccusage export --csv   # 导出报表</a:t>
-            </a:r>
-            <a:endParaRPr lang="en-US" sz="1000" dirty="0"/>
+              <a:rPr lang="en-US" sz="1300" b="1" dirty="0">
+                <a:solidFill>
+                  <a:srgbClr val="1E2761"/>
+                </a:solidFill>
+              </a:rPr>
+              <a:t>Token = AI 模型的计费单位</a:t>
+            </a:r>
+            <a:endParaRPr lang="en-US" sz="1300" dirty="0"/>
+          </a:p>
+          <a:p>
+            <a:pPr indent="0" marL="0">
+              <a:buNone/>
+            </a:pPr>
+            <a:r>
+              <a:rPr lang="en-US" sz="1300" dirty="0">
+                <a:solidFill>
+                  <a:srgbClr val="475569"/>
+                </a:solidFill>
+              </a:rPr>
+              <a:t>· 不是字数，是模型处理文本时的最小单元</a:t>
+            </a:r>
+            <a:endParaRPr lang="en-US" sz="1300" dirty="0"/>
+          </a:p>
+          <a:p>
+            <a:pPr indent="0" marL="0">
+              <a:buNone/>
+            </a:pPr>
+            <a:r>
+              <a:rPr lang="en-US" sz="1300" dirty="0">
+                <a:solidFill>
+                  <a:srgbClr val="475569"/>
+                </a:solidFill>
+              </a:rPr>
+              <a:t>· 英文约 1 token ≈ 0.75 个单词  |  中文约 1 token ≈ 0.5 个汉字</a:t>
+            </a:r>
+            <a:endParaRPr lang="en-US" sz="1300" dirty="0"/>
+          </a:p>
+          <a:p>
+            <a:pPr indent="0" marL="0">
+              <a:buNone/>
+            </a:pPr>
+            <a:r>
+              <a:rPr lang="en-US" sz="1300" dirty="0">
+                <a:solidFill>
+                  <a:srgbClr val="475569"/>
+                </a:solidFill>
+              </a:rPr>
+              <a:t>· 输入和输出都计费</a:t>
+            </a:r>
+            <a:endParaRPr lang="en-US" sz="1300" dirty="0"/>
           </a:p>
         </p:txBody>
       </p:sp>
@@ -6584,8 +7411,8 @@
         </p:nvSpPr>
         <p:spPr>
           <a:xfrm>
-            <a:off x="4937760" y="1280160"/>
-            <a:ext cx="3657600" cy="274320"/>
+            <a:off x="548640" y="3108960"/>
+            <a:ext cx="8046720" cy="274320"/>
           </a:xfrm>
           <a:prstGeom prst="rect">
             <a:avLst/>
@@ -6609,7 +7436,7 @@
                 <a:ea typeface="Arial" pitchFamily="34" charset="-122"/>
                 <a:cs typeface="Arial" pitchFamily="34" charset="-120"/>
               </a:rPr>
-              <a:t>省钱实操</a:t>
+              <a:t>为什么要监控</a:t>
             </a:r>
             <a:endParaRPr lang="en-US" sz="1400" dirty="0"/>
           </a:p>
@@ -6623,8 +7450,8 @@
         </p:nvSpPr>
         <p:spPr>
           <a:xfrm>
-            <a:off x="4937760" y="1645920"/>
-            <a:ext cx="274320" cy="274320"/>
+            <a:off x="548640" y="3520440"/>
+            <a:ext cx="164592" cy="164592"/>
           </a:xfrm>
           <a:prstGeom prst="ellipse">
             <a:avLst/>
@@ -6643,8 +7470,8 @@
         </p:nvSpPr>
         <p:spPr>
           <a:xfrm>
-            <a:off x="4937760" y="1645920"/>
-            <a:ext cx="274320" cy="274320"/>
+            <a:off x="548640" y="3520440"/>
+            <a:ext cx="164592" cy="164592"/>
           </a:xfrm>
           <a:prstGeom prst="rect">
             <a:avLst/>
@@ -6660,7 +7487,7 @@
               <a:buNone/>
             </a:pPr>
             <a:r>
-              <a:rPr lang="en-US" sz="1100" b="1" dirty="0">
+              <a:rPr lang="en-US" sz="900" b="1" dirty="0">
                 <a:solidFill>
                   <a:srgbClr val="FFFFFF"/>
                 </a:solidFill>
@@ -6670,7 +7497,7 @@
               </a:rPr>
               <a:t>1</a:t>
             </a:r>
-            <a:endParaRPr lang="en-US" sz="1100" dirty="0"/>
+            <a:endParaRPr lang="en-US" sz="900" dirty="0"/>
           </a:p>
         </p:txBody>
       </p:sp>
@@ -6682,8 +7509,8 @@
         </p:nvSpPr>
         <p:spPr>
           <a:xfrm>
-            <a:off x="5349240" y="1645920"/>
-            <a:ext cx="3200400" cy="228600"/>
+            <a:off x="822960" y="3502152"/>
+            <a:ext cx="7772400" cy="228600"/>
           </a:xfrm>
           <a:prstGeom prst="rect">
             <a:avLst/>
@@ -6699,15 +7526,15 @@
               <a:buNone/>
             </a:pPr>
             <a:r>
-              <a:rPr lang="en-US" sz="1200" b="1" dirty="0">
-                <a:solidFill>
-                  <a:srgbClr val="1E2761"/>
+              <a:rPr lang="en-US" sz="1200" dirty="0">
+                <a:solidFill>
+                  <a:srgbClr val="475569"/>
                 </a:solidFill>
                 <a:latin typeface="Arial" pitchFamily="34" charset="0"/>
                 <a:ea typeface="Arial" pitchFamily="34" charset="-122"/>
                 <a:cs typeface="Arial" pitchFamily="34" charset="-120"/>
               </a:rPr>
-              <a:t>开发期用便宜模型</a:t>
+              <a:t>LLM 调用按 token 计费，烧多了直接体现在账单上</a:t>
             </a:r>
             <a:endParaRPr lang="en-US" sz="1200" dirty="0"/>
           </a:p>
@@ -6715,14 +7542,34 @@
       </p:sp>
       <p:sp>
         <p:nvSpPr>
-          <p:cNvPr id="11" name="Text 9"/>
-          <p:cNvSpPr/>
-          <p:nvPr/>
-        </p:nvSpPr>
-        <p:spPr>
-          <a:xfrm>
-            <a:off x="5349240" y="1874520"/>
-            <a:ext cx="3200400" cy="228600"/>
+          <p:cNvPr id="11" name="Shape 9"/>
+          <p:cNvSpPr/>
+          <p:nvPr/>
+        </p:nvSpPr>
+        <p:spPr>
+          <a:xfrm>
+            <a:off x="548640" y="3931920"/>
+            <a:ext cx="164592" cy="164592"/>
+          </a:xfrm>
+          <a:prstGeom prst="ellipse">
+            <a:avLst/>
+          </a:prstGeom>
+          <a:solidFill>
+            <a:srgbClr val="1E2761"/>
+          </a:solidFill>
+          <a:ln/>
+        </p:spPr>
+      </p:sp>
+      <p:sp>
+        <p:nvSpPr>
+          <p:cNvPr id="12" name="Text 10"/>
+          <p:cNvSpPr/>
+          <p:nvPr/>
+        </p:nvSpPr>
+        <p:spPr>
+          <a:xfrm>
+            <a:off x="548640" y="3931920"/>
+            <a:ext cx="164592" cy="164592"/>
           </a:xfrm>
           <a:prstGeom prst="rect">
             <a:avLst/>
@@ -6734,34 +7581,73 @@
           <a:bodyPr wrap="square" lIns="0" tIns="0" rIns="0" bIns="0" rtlCol="0" anchor="ctr"/>
           <a:lstStyle/>
           <a:p>
-            <a:pPr indent="0" marL="0">
-              <a:buNone/>
-            </a:pPr>
-            <a:r>
-              <a:rPr lang="en-US" sz="1100" dirty="0">
-                <a:solidFill>
-                  <a:srgbClr val="475569"/>
+            <a:pPr algn="ctr" indent="0" marL="0">
+              <a:buNone/>
+            </a:pPr>
+            <a:r>
+              <a:rPr lang="en-US" sz="900" b="1" dirty="0">
+                <a:solidFill>
+                  <a:srgbClr val="FFFFFF"/>
                 </a:solidFill>
                 <a:latin typeface="Arial" pitchFamily="34" charset="0"/>
                 <a:ea typeface="Arial" pitchFamily="34" charset="-122"/>
                 <a:cs typeface="Arial" pitchFamily="34" charset="-120"/>
               </a:rPr>
-              <a:t>GPT-4o-mini 调试，好了再上贵的</a:t>
-            </a:r>
-            <a:endParaRPr lang="en-US" sz="1100" dirty="0"/>
-          </a:p>
-        </p:txBody>
-      </p:sp>
-      <p:sp>
-        <p:nvSpPr>
-          <p:cNvPr id="12" name="Shape 10"/>
-          <p:cNvSpPr/>
-          <p:nvPr/>
-        </p:nvSpPr>
-        <p:spPr>
-          <a:xfrm>
-            <a:off x="4937760" y="2148840"/>
-            <a:ext cx="274320" cy="274320"/>
+              <a:t>2</a:t>
+            </a:r>
+            <a:endParaRPr lang="en-US" sz="900" dirty="0"/>
+          </a:p>
+        </p:txBody>
+      </p:sp>
+      <p:sp>
+        <p:nvSpPr>
+          <p:cNvPr id="13" name="Text 11"/>
+          <p:cNvSpPr/>
+          <p:nvPr/>
+        </p:nvSpPr>
+        <p:spPr>
+          <a:xfrm>
+            <a:off x="822960" y="3913632"/>
+            <a:ext cx="7772400" cy="228600"/>
+          </a:xfrm>
+          <a:prstGeom prst="rect">
+            <a:avLst/>
+          </a:prstGeom>
+          <a:noFill/>
+          <a:ln/>
+        </p:spPr>
+        <p:txBody>
+          <a:bodyPr wrap="square" lIns="0" tIns="0" rIns="0" bIns="0" rtlCol="0" anchor="ctr"/>
+          <a:lstStyle/>
+          <a:p>
+            <a:pPr indent="0" marL="0">
+              <a:buNone/>
+            </a:pPr>
+            <a:r>
+              <a:rPr lang="en-US" sz="1200" dirty="0">
+                <a:solidFill>
+                  <a:srgbClr val="475569"/>
+                </a:solidFill>
+                <a:latin typeface="Arial" pitchFamily="34" charset="0"/>
+                <a:ea typeface="Arial" pitchFamily="34" charset="-122"/>
+                <a:cs typeface="Arial" pitchFamily="34" charset="-120"/>
+              </a:rPr>
+              <a:t>知道钱花在哪 = 知道时间花在哪</a:t>
+            </a:r>
+            <a:endParaRPr lang="en-US" sz="1200" dirty="0"/>
+          </a:p>
+        </p:txBody>
+      </p:sp>
+      <p:sp>
+        <p:nvSpPr>
+          <p:cNvPr id="14" name="Shape 12"/>
+          <p:cNvSpPr/>
+          <p:nvPr/>
+        </p:nvSpPr>
+        <p:spPr>
+          <a:xfrm>
+            <a:off x="548640" y="4343400"/>
+            <a:ext cx="164592" cy="164592"/>
           </a:xfrm>
           <a:prstGeom prst="ellipse">
             <a:avLst/>
@@ -6774,14 +7660,14 @@
       </p:sp>
       <p:sp>
         <p:nvSpPr>
-          <p:cNvPr id="13" name="Text 11"/>
-          <p:cNvSpPr/>
-          <p:nvPr/>
-        </p:nvSpPr>
-        <p:spPr>
-          <a:xfrm>
-            <a:off x="4937760" y="2148840"/>
-            <a:ext cx="274320" cy="274320"/>
+          <p:cNvPr id="15" name="Text 13"/>
+          <p:cNvSpPr/>
+          <p:nvPr/>
+        </p:nvSpPr>
+        <p:spPr>
+          <a:xfrm>
+            <a:off x="548640" y="4343400"/>
+            <a:ext cx="164592" cy="164592"/>
           </a:xfrm>
           <a:prstGeom prst="rect">
             <a:avLst/>
@@ -6797,7 +7683,7 @@
               <a:buNone/>
             </a:pPr>
             <a:r>
-              <a:rPr lang="en-US" sz="1100" b="1" dirty="0">
+              <a:rPr lang="en-US" sz="900" b="1" dirty="0">
                 <a:solidFill>
                   <a:srgbClr val="FFFFFF"/>
                 </a:solidFill>
@@ -6805,22 +7691,22 @@
                 <a:ea typeface="Arial" pitchFamily="34" charset="-122"/>
                 <a:cs typeface="Arial" pitchFamily="34" charset="-120"/>
               </a:rPr>
-              <a:t>2</a:t>
-            </a:r>
-            <a:endParaRPr lang="en-US" sz="1100" dirty="0"/>
-          </a:p>
-        </p:txBody>
-      </p:sp>
-      <p:sp>
-        <p:nvSpPr>
-          <p:cNvPr id="14" name="Text 12"/>
-          <p:cNvSpPr/>
-          <p:nvPr/>
-        </p:nvSpPr>
-        <p:spPr>
-          <a:xfrm>
-            <a:off x="5349240" y="2148840"/>
-            <a:ext cx="3200400" cy="228600"/>
+              <a:t>3</a:t>
+            </a:r>
+            <a:endParaRPr lang="en-US" sz="900" dirty="0"/>
+          </a:p>
+        </p:txBody>
+      </p:sp>
+      <p:sp>
+        <p:nvSpPr>
+          <p:cNvPr id="16" name="Text 14"/>
+          <p:cNvSpPr/>
+          <p:nvPr/>
+        </p:nvSpPr>
+        <p:spPr>
+          <a:xfrm>
+            <a:off x="822960" y="4325112"/>
+            <a:ext cx="7772400" cy="228600"/>
           </a:xfrm>
           <a:prstGeom prst="rect">
             <a:avLst/>
@@ -6836,330 +7722,17 @@
               <a:buNone/>
             </a:pPr>
             <a:r>
-              <a:rPr lang="en-US" sz="1200" b="1" dirty="0">
-                <a:solidFill>
-                  <a:srgbClr val="1E2761"/>
+              <a:rPr lang="en-US" sz="1200" dirty="0">
+                <a:solidFill>
+                  <a:srgbClr val="475569"/>
                 </a:solidFill>
                 <a:latin typeface="Arial" pitchFamily="34" charset="0"/>
                 <a:ea typeface="Arial" pitchFamily="34" charset="-122"/>
                 <a:cs typeface="Arial" pitchFamily="34" charset="-120"/>
               </a:rPr>
-              <a:t>上下文只放必要</a:t>
+              <a:t>发现异常消耗（死循环调用、重复请求）</a:t>
             </a:r>
             <a:endParaRPr lang="en-US" sz="1200" dirty="0"/>
-          </a:p>
-        </p:txBody>
-      </p:sp>
-      <p:sp>
-        <p:nvSpPr>
-          <p:cNvPr id="15" name="Text 13"/>
-          <p:cNvSpPr/>
-          <p:nvPr/>
-        </p:nvSpPr>
-        <p:spPr>
-          <a:xfrm>
-            <a:off x="5349240" y="2377440"/>
-            <a:ext cx="3200400" cy="228600"/>
-          </a:xfrm>
-          <a:prstGeom prst="rect">
-            <a:avLst/>
-          </a:prstGeom>
-          <a:noFill/>
-          <a:ln/>
-        </p:spPr>
-        <p:txBody>
-          <a:bodyPr wrap="square" lIns="0" tIns="0" rIns="0" bIns="0" rtlCol="0" anchor="ctr"/>
-          <a:lstStyle/>
-          <a:p>
-            <a:pPr indent="0" marL="0">
-              <a:buNone/>
-            </a:pPr>
-            <a:r>
-              <a:rPr lang="en-US" sz="1100" dirty="0">
-                <a:solidFill>
-                  <a:srgbClr val="475569"/>
-                </a:solidFill>
-                <a:latin typeface="Arial" pitchFamily="34" charset="0"/>
-                <a:ea typeface="Arial" pitchFamily="34" charset="-122"/>
-                <a:cs typeface="Arial" pitchFamily="34" charset="-120"/>
-              </a:rPr>
-              <a:t>历史对话太长会累积计费</a:t>
-            </a:r>
-            <a:endParaRPr lang="en-US" sz="1100" dirty="0"/>
-          </a:p>
-        </p:txBody>
-      </p:sp>
-      <p:sp>
-        <p:nvSpPr>
-          <p:cNvPr id="16" name="Shape 14"/>
-          <p:cNvSpPr/>
-          <p:nvPr/>
-        </p:nvSpPr>
-        <p:spPr>
-          <a:xfrm>
-            <a:off x="4937760" y="2651760"/>
-            <a:ext cx="274320" cy="274320"/>
-          </a:xfrm>
-          <a:prstGeom prst="ellipse">
-            <a:avLst/>
-          </a:prstGeom>
-          <a:solidFill>
-            <a:srgbClr val="1E2761"/>
-          </a:solidFill>
-          <a:ln/>
-        </p:spPr>
-      </p:sp>
-      <p:sp>
-        <p:nvSpPr>
-          <p:cNvPr id="17" name="Text 15"/>
-          <p:cNvSpPr/>
-          <p:nvPr/>
-        </p:nvSpPr>
-        <p:spPr>
-          <a:xfrm>
-            <a:off x="4937760" y="2651760"/>
-            <a:ext cx="274320" cy="274320"/>
-          </a:xfrm>
-          <a:prstGeom prst="rect">
-            <a:avLst/>
-          </a:prstGeom>
-          <a:noFill/>
-          <a:ln/>
-        </p:spPr>
-        <p:txBody>
-          <a:bodyPr wrap="square" lIns="0" tIns="0" rIns="0" bIns="0" rtlCol="0" anchor="ctr"/>
-          <a:lstStyle/>
-          <a:p>
-            <a:pPr algn="ctr" indent="0" marL="0">
-              <a:buNone/>
-            </a:pPr>
-            <a:r>
-              <a:rPr lang="en-US" sz="1100" b="1" dirty="0">
-                <a:solidFill>
-                  <a:srgbClr val="FFFFFF"/>
-                </a:solidFill>
-                <a:latin typeface="Arial" pitchFamily="34" charset="0"/>
-                <a:ea typeface="Arial" pitchFamily="34" charset="-122"/>
-                <a:cs typeface="Arial" pitchFamily="34" charset="-120"/>
-              </a:rPr>
-              <a:t>3</a:t>
-            </a:r>
-            <a:endParaRPr lang="en-US" sz="1100" dirty="0"/>
-          </a:p>
-        </p:txBody>
-      </p:sp>
-      <p:sp>
-        <p:nvSpPr>
-          <p:cNvPr id="18" name="Text 16"/>
-          <p:cNvSpPr/>
-          <p:nvPr/>
-        </p:nvSpPr>
-        <p:spPr>
-          <a:xfrm>
-            <a:off x="5349240" y="2651760"/>
-            <a:ext cx="3200400" cy="228600"/>
-          </a:xfrm>
-          <a:prstGeom prst="rect">
-            <a:avLst/>
-          </a:prstGeom>
-          <a:noFill/>
-          <a:ln/>
-        </p:spPr>
-        <p:txBody>
-          <a:bodyPr wrap="square" lIns="0" tIns="0" rIns="0" bIns="0" rtlCol="0" anchor="ctr"/>
-          <a:lstStyle/>
-          <a:p>
-            <a:pPr indent="0" marL="0">
-              <a:buNone/>
-            </a:pPr>
-            <a:r>
-              <a:rPr lang="en-US" sz="1200" b="1" dirty="0">
-                <a:solidFill>
-                  <a:srgbClr val="1E2761"/>
-                </a:solidFill>
-                <a:latin typeface="Arial" pitchFamily="34" charset="0"/>
-                <a:ea typeface="Arial" pitchFamily="34" charset="-122"/>
-                <a:cs typeface="Arial" pitchFamily="34" charset="-120"/>
-              </a:rPr>
-              <a:t>批量处理</a:t>
-            </a:r>
-            <a:endParaRPr lang="en-US" sz="1200" dirty="0"/>
-          </a:p>
-        </p:txBody>
-      </p:sp>
-      <p:sp>
-        <p:nvSpPr>
-          <p:cNvPr id="19" name="Text 17"/>
-          <p:cNvSpPr/>
-          <p:nvPr/>
-        </p:nvSpPr>
-        <p:spPr>
-          <a:xfrm>
-            <a:off x="5349240" y="2880360"/>
-            <a:ext cx="3200400" cy="228600"/>
-          </a:xfrm>
-          <a:prstGeom prst="rect">
-            <a:avLst/>
-          </a:prstGeom>
-          <a:noFill/>
-          <a:ln/>
-        </p:spPr>
-        <p:txBody>
-          <a:bodyPr wrap="square" lIns="0" tIns="0" rIns="0" bIns="0" rtlCol="0" anchor="ctr"/>
-          <a:lstStyle/>
-          <a:p>
-            <a:pPr indent="0" marL="0">
-              <a:buNone/>
-            </a:pPr>
-            <a:r>
-              <a:rPr lang="en-US" sz="1100" dirty="0">
-                <a:solidFill>
-                  <a:srgbClr val="475569"/>
-                </a:solidFill>
-                <a:latin typeface="Arial" pitchFamily="34" charset="0"/>
-                <a:ea typeface="Arial" pitchFamily="34" charset="-122"/>
-                <a:cs typeface="Arial" pitchFamily="34" charset="-120"/>
-              </a:rPr>
-              <a:t>批量比单条循环省 token</a:t>
-            </a:r>
-            <a:endParaRPr lang="en-US" sz="1100" dirty="0"/>
-          </a:p>
-        </p:txBody>
-      </p:sp>
-      <p:sp>
-        <p:nvSpPr>
-          <p:cNvPr id="20" name="Shape 18"/>
-          <p:cNvSpPr/>
-          <p:nvPr/>
-        </p:nvSpPr>
-        <p:spPr>
-          <a:xfrm>
-            <a:off x="4937760" y="3154680"/>
-            <a:ext cx="274320" cy="274320"/>
-          </a:xfrm>
-          <a:prstGeom prst="ellipse">
-            <a:avLst/>
-          </a:prstGeom>
-          <a:solidFill>
-            <a:srgbClr val="1E2761"/>
-          </a:solidFill>
-          <a:ln/>
-        </p:spPr>
-      </p:sp>
-      <p:sp>
-        <p:nvSpPr>
-          <p:cNvPr id="21" name="Text 19"/>
-          <p:cNvSpPr/>
-          <p:nvPr/>
-        </p:nvSpPr>
-        <p:spPr>
-          <a:xfrm>
-            <a:off x="4937760" y="3154680"/>
-            <a:ext cx="274320" cy="274320"/>
-          </a:xfrm>
-          <a:prstGeom prst="rect">
-            <a:avLst/>
-          </a:prstGeom>
-          <a:noFill/>
-          <a:ln/>
-        </p:spPr>
-        <p:txBody>
-          <a:bodyPr wrap="square" lIns="0" tIns="0" rIns="0" bIns="0" rtlCol="0" anchor="ctr"/>
-          <a:lstStyle/>
-          <a:p>
-            <a:pPr algn="ctr" indent="0" marL="0">
-              <a:buNone/>
-            </a:pPr>
-            <a:r>
-              <a:rPr lang="en-US" sz="1100" b="1" dirty="0">
-                <a:solidFill>
-                  <a:srgbClr val="FFFFFF"/>
-                </a:solidFill>
-                <a:latin typeface="Arial" pitchFamily="34" charset="0"/>
-                <a:ea typeface="Arial" pitchFamily="34" charset="-122"/>
-                <a:cs typeface="Arial" pitchFamily="34" charset="-120"/>
-              </a:rPr>
-              <a:t>4</a:t>
-            </a:r>
-            <a:endParaRPr lang="en-US" sz="1100" dirty="0"/>
-          </a:p>
-        </p:txBody>
-      </p:sp>
-      <p:sp>
-        <p:nvSpPr>
-          <p:cNvPr id="22" name="Text 20"/>
-          <p:cNvSpPr/>
-          <p:nvPr/>
-        </p:nvSpPr>
-        <p:spPr>
-          <a:xfrm>
-            <a:off x="5349240" y="3154680"/>
-            <a:ext cx="3200400" cy="228600"/>
-          </a:xfrm>
-          <a:prstGeom prst="rect">
-            <a:avLst/>
-          </a:prstGeom>
-          <a:noFill/>
-          <a:ln/>
-        </p:spPr>
-        <p:txBody>
-          <a:bodyPr wrap="square" lIns="0" tIns="0" rIns="0" bIns="0" rtlCol="0" anchor="ctr"/>
-          <a:lstStyle/>
-          <a:p>
-            <a:pPr indent="0" marL="0">
-              <a:buNone/>
-            </a:pPr>
-            <a:r>
-              <a:rPr lang="en-US" sz="1200" b="1" dirty="0">
-                <a:solidFill>
-                  <a:srgbClr val="1E2761"/>
-                </a:solidFill>
-                <a:latin typeface="Arial" pitchFamily="34" charset="0"/>
-                <a:ea typeface="Arial" pitchFamily="34" charset="-122"/>
-                <a:cs typeface="Arial" pitchFamily="34" charset="-120"/>
-              </a:rPr>
-              <a:t>定期看一眼</a:t>
-            </a:r>
-            <a:endParaRPr lang="en-US" sz="1200" dirty="0"/>
-          </a:p>
-        </p:txBody>
-      </p:sp>
-      <p:sp>
-        <p:nvSpPr>
-          <p:cNvPr id="23" name="Text 21"/>
-          <p:cNvSpPr/>
-          <p:nvPr/>
-        </p:nvSpPr>
-        <p:spPr>
-          <a:xfrm>
-            <a:off x="5349240" y="3383280"/>
-            <a:ext cx="3200400" cy="228600"/>
-          </a:xfrm>
-          <a:prstGeom prst="rect">
-            <a:avLst/>
-          </a:prstGeom>
-          <a:noFill/>
-          <a:ln/>
-        </p:spPr>
-        <p:txBody>
-          <a:bodyPr wrap="square" lIns="0" tIns="0" rIns="0" bIns="0" rtlCol="0" anchor="ctr"/>
-          <a:lstStyle/>
-          <a:p>
-            <a:pPr indent="0" marL="0">
-              <a:buNone/>
-            </a:pPr>
-            <a:r>
-              <a:rPr lang="en-US" sz="1100" dirty="0">
-                <a:solidFill>
-                  <a:srgbClr val="475569"/>
-                </a:solidFill>
-                <a:latin typeface="Arial" pitchFamily="34" charset="0"/>
-                <a:ea typeface="Arial" pitchFamily="34" charset="-122"/>
-                <a:cs typeface="Arial" pitchFamily="34" charset="-120"/>
-              </a:rPr>
-              <a:t>ccusage week，异常早发现</a:t>
-            </a:r>
-            <a:endParaRPr lang="en-US" sz="1100" dirty="0"/>
           </a:p>
         </p:txBody>
       </p:sp>
@@ -7248,7 +7821,7 @@
                 <a:ea typeface="Arial" pitchFamily="34" charset="-122"/>
                 <a:cs typeface="Arial" pitchFamily="34" charset="-120"/>
               </a:rPr>
-              <a:t>AI 辅助做 PPT</a:t>
+              <a:t>CC Usage</a:t>
             </a:r>
             <a:endParaRPr lang="en-US" sz="3200" dirty="0"/>
           </a:p>
@@ -7287,6 +7860,907 @@
                 <a:ea typeface="Arial" pitchFamily="34" charset="-122"/>
                 <a:cs typeface="Arial" pitchFamily="34" charset="-120"/>
               </a:rPr>
+              <a:t>（2/2）用法和省钱技巧</a:t>
+            </a:r>
+            <a:endParaRPr lang="en-US" sz="1400" dirty="0"/>
+          </a:p>
+        </p:txBody>
+      </p:sp>
+      <p:sp>
+        <p:nvSpPr>
+          <p:cNvPr id="5" name="Shape 3"/>
+          <p:cNvSpPr/>
+          <p:nvPr/>
+        </p:nvSpPr>
+        <p:spPr>
+          <a:xfrm>
+            <a:off x="548640" y="1280160"/>
+            <a:ext cx="4114800" cy="2194560"/>
+          </a:xfrm>
+          <a:prstGeom prst="rect">
+            <a:avLst/>
+          </a:prstGeom>
+          <a:solidFill>
+            <a:srgbClr val="1E293B"/>
+          </a:solidFill>
+          <a:ln/>
+        </p:spPr>
+      </p:sp>
+      <p:sp>
+        <p:nvSpPr>
+          <p:cNvPr id="6" name="Text 4"/>
+          <p:cNvSpPr/>
+          <p:nvPr/>
+        </p:nvSpPr>
+        <p:spPr>
+          <a:xfrm>
+            <a:off x="731520" y="1417320"/>
+            <a:ext cx="3749040" cy="1920240"/>
+          </a:xfrm>
+          <a:prstGeom prst="rect">
+            <a:avLst/>
+          </a:prstGeom>
+          <a:noFill/>
+          <a:ln/>
+        </p:spPr>
+        <p:txBody>
+          <a:bodyPr wrap="square" lIns="0" tIns="0" rIns="0" bIns="0" rtlCol="0" anchor="ctr"/>
+          <a:lstStyle/>
+          <a:p>
+            <a:pPr indent="0" marL="0">
+              <a:buNone/>
+            </a:pPr>
+            <a:r>
+              <a:rPr lang="en-US" sz="1000" dirty="0">
+                <a:solidFill>
+                  <a:srgbClr val="64748B"/>
+                </a:solidFill>
+                <a:latin typeface="Consolas" pitchFamily="34" charset="0"/>
+                <a:ea typeface="Consolas" pitchFamily="34" charset="-122"/>
+                <a:cs typeface="Consolas" pitchFamily="34" charset="-120"/>
+              </a:rPr>
+              <a:t># 安装</a:t>
+            </a:r>
+            <a:endParaRPr lang="en-US" sz="1000" dirty="0"/>
+          </a:p>
+          <a:p>
+            <a:pPr indent="0" marL="0">
+              <a:buNone/>
+            </a:pPr>
+            <a:r>
+              <a:rPr lang="en-US" sz="1000" dirty="0">
+                <a:solidFill>
+                  <a:srgbClr val="A5B4FC"/>
+                </a:solidFill>
+                <a:latin typeface="Consolas" pitchFamily="34" charset="0"/>
+                <a:ea typeface="Consolas" pitchFamily="34" charset="-122"/>
+                <a:cs typeface="Consolas" pitchFamily="34" charset="-120"/>
+              </a:rPr>
+              <a:t>npm install -g ccusage</a:t>
+            </a:r>
+            <a:endParaRPr lang="en-US" sz="1000" dirty="0"/>
+          </a:p>
+          <a:p>
+            <a:pPr indent="0" marL="0">
+              <a:buNone/>
+            </a:pPr>
+            <a:endParaRPr lang="en-US" sz="1000" dirty="0"/>
+          </a:p>
+          <a:p>
+            <a:pPr indent="0" marL="0">
+              <a:buNone/>
+            </a:pPr>
+            <a:r>
+              <a:rPr lang="en-US" sz="1000" dirty="0">
+                <a:solidFill>
+                  <a:srgbClr val="64748B"/>
+                </a:solidFill>
+                <a:latin typeface="Consolas" pitchFamily="34" charset="0"/>
+                <a:ea typeface="Consolas" pitchFamily="34" charset="-122"/>
+                <a:cs typeface="Consolas" pitchFamily="34" charset="-120"/>
+              </a:rPr>
+              <a:t># 常用命令</a:t>
+            </a:r>
+            <a:endParaRPr lang="en-US" sz="1000" dirty="0"/>
+          </a:p>
+          <a:p>
+            <a:pPr indent="0" marL="0">
+              <a:buNone/>
+            </a:pPr>
+            <a:r>
+              <a:rPr lang="en-US" sz="1000" dirty="0">
+                <a:solidFill>
+                  <a:srgbClr val="A5B4FC"/>
+                </a:solidFill>
+                <a:latin typeface="Consolas" pitchFamily="34" charset="0"/>
+                <a:ea typeface="Consolas" pitchFamily="34" charset="-122"/>
+                <a:cs typeface="Consolas" pitchFamily="34" charset="-120"/>
+              </a:rPr>
+              <a:t>ccusage today          # 今天</a:t>
+            </a:r>
+            <a:endParaRPr lang="en-US" sz="1000" dirty="0"/>
+          </a:p>
+          <a:p>
+            <a:pPr indent="0" marL="0">
+              <a:buNone/>
+            </a:pPr>
+            <a:r>
+              <a:rPr lang="en-US" sz="1000" dirty="0">
+                <a:solidFill>
+                  <a:srgbClr val="A5B4FC"/>
+                </a:solidFill>
+                <a:latin typeface="Consolas" pitchFamily="34" charset="0"/>
+                <a:ea typeface="Consolas" pitchFamily="34" charset="-122"/>
+                <a:cs typeface="Consolas" pitchFamily="34" charset="-120"/>
+              </a:rPr>
+              <a:t>ccusage week           # 本周</a:t>
+            </a:r>
+            <a:endParaRPr lang="en-US" sz="1000" dirty="0"/>
+          </a:p>
+          <a:p>
+            <a:pPr indent="0" marL="0">
+              <a:buNone/>
+            </a:pPr>
+            <a:r>
+              <a:rPr lang="en-US" sz="1000" dirty="0">
+                <a:solidFill>
+                  <a:srgbClr val="A5B4FC"/>
+                </a:solidFill>
+                <a:latin typeface="Consolas" pitchFamily="34" charset="0"/>
+                <a:ea typeface="Consolas" pitchFamily="34" charset="-122"/>
+                <a:cs typeface="Consolas" pitchFamily="34" charset="-120"/>
+              </a:rPr>
+              <a:t>ccusage by-model       # 按模型</a:t>
+            </a:r>
+            <a:endParaRPr lang="en-US" sz="1000" dirty="0"/>
+          </a:p>
+          <a:p>
+            <a:pPr indent="0" marL="0">
+              <a:buNone/>
+            </a:pPr>
+            <a:r>
+              <a:rPr lang="en-US" sz="1000" dirty="0">
+                <a:solidFill>
+                  <a:srgbClr val="A5B4FC"/>
+                </a:solidFill>
+                <a:latin typeface="Consolas" pitchFamily="34" charset="0"/>
+                <a:ea typeface="Consolas" pitchFamily="34" charset="-122"/>
+                <a:cs typeface="Consolas" pitchFamily="34" charset="-120"/>
+              </a:rPr>
+              <a:t>ccusage by-project     # 按项目</a:t>
+            </a:r>
+            <a:endParaRPr lang="en-US" sz="1000" dirty="0"/>
+          </a:p>
+          <a:p>
+            <a:pPr indent="0" marL="0">
+              <a:buNone/>
+            </a:pPr>
+            <a:r>
+              <a:rPr lang="en-US" sz="1000" dirty="0">
+                <a:solidFill>
+                  <a:srgbClr val="A5B4FC"/>
+                </a:solidFill>
+                <a:latin typeface="Consolas" pitchFamily="34" charset="0"/>
+                <a:ea typeface="Consolas" pitchFamily="34" charset="-122"/>
+                <a:cs typeface="Consolas" pitchFamily="34" charset="-120"/>
+              </a:rPr>
+              <a:t>ccusage export --csv   # 导出报表</a:t>
+            </a:r>
+            <a:endParaRPr lang="en-US" sz="1000" dirty="0"/>
+          </a:p>
+        </p:txBody>
+      </p:sp>
+      <p:sp>
+        <p:nvSpPr>
+          <p:cNvPr id="7" name="Text 5"/>
+          <p:cNvSpPr/>
+          <p:nvPr/>
+        </p:nvSpPr>
+        <p:spPr>
+          <a:xfrm>
+            <a:off x="4937760" y="1280160"/>
+            <a:ext cx="3657600" cy="274320"/>
+          </a:xfrm>
+          <a:prstGeom prst="rect">
+            <a:avLst/>
+          </a:prstGeom>
+          <a:noFill/>
+          <a:ln/>
+        </p:spPr>
+        <p:txBody>
+          <a:bodyPr wrap="square" lIns="0" tIns="0" rIns="0" bIns="0" rtlCol="0" anchor="ctr"/>
+          <a:lstStyle/>
+          <a:p>
+            <a:pPr indent="0" marL="0">
+              <a:buNone/>
+            </a:pPr>
+            <a:r>
+              <a:rPr lang="en-US" sz="1400" b="1" dirty="0">
+                <a:solidFill>
+                  <a:srgbClr val="1E2761"/>
+                </a:solidFill>
+                <a:latin typeface="Arial" pitchFamily="34" charset="0"/>
+                <a:ea typeface="Arial" pitchFamily="34" charset="-122"/>
+                <a:cs typeface="Arial" pitchFamily="34" charset="-120"/>
+              </a:rPr>
+              <a:t>省钱实操</a:t>
+            </a:r>
+            <a:endParaRPr lang="en-US" sz="1400" dirty="0"/>
+          </a:p>
+        </p:txBody>
+      </p:sp>
+      <p:sp>
+        <p:nvSpPr>
+          <p:cNvPr id="8" name="Shape 6"/>
+          <p:cNvSpPr/>
+          <p:nvPr/>
+        </p:nvSpPr>
+        <p:spPr>
+          <a:xfrm>
+            <a:off x="4937760" y="1645920"/>
+            <a:ext cx="274320" cy="274320"/>
+          </a:xfrm>
+          <a:prstGeom prst="ellipse">
+            <a:avLst/>
+          </a:prstGeom>
+          <a:solidFill>
+            <a:srgbClr val="1E2761"/>
+          </a:solidFill>
+          <a:ln/>
+        </p:spPr>
+      </p:sp>
+      <p:sp>
+        <p:nvSpPr>
+          <p:cNvPr id="9" name="Text 7"/>
+          <p:cNvSpPr/>
+          <p:nvPr/>
+        </p:nvSpPr>
+        <p:spPr>
+          <a:xfrm>
+            <a:off x="4937760" y="1645920"/>
+            <a:ext cx="274320" cy="274320"/>
+          </a:xfrm>
+          <a:prstGeom prst="rect">
+            <a:avLst/>
+          </a:prstGeom>
+          <a:noFill/>
+          <a:ln/>
+        </p:spPr>
+        <p:txBody>
+          <a:bodyPr wrap="square" lIns="0" tIns="0" rIns="0" bIns="0" rtlCol="0" anchor="ctr"/>
+          <a:lstStyle/>
+          <a:p>
+            <a:pPr algn="ctr" indent="0" marL="0">
+              <a:buNone/>
+            </a:pPr>
+            <a:r>
+              <a:rPr lang="en-US" sz="1100" b="1" dirty="0">
+                <a:solidFill>
+                  <a:srgbClr val="FFFFFF"/>
+                </a:solidFill>
+                <a:latin typeface="Arial" pitchFamily="34" charset="0"/>
+                <a:ea typeface="Arial" pitchFamily="34" charset="-122"/>
+                <a:cs typeface="Arial" pitchFamily="34" charset="-120"/>
+              </a:rPr>
+              <a:t>1</a:t>
+            </a:r>
+            <a:endParaRPr lang="en-US" sz="1100" dirty="0"/>
+          </a:p>
+        </p:txBody>
+      </p:sp>
+      <p:sp>
+        <p:nvSpPr>
+          <p:cNvPr id="10" name="Text 8"/>
+          <p:cNvSpPr/>
+          <p:nvPr/>
+        </p:nvSpPr>
+        <p:spPr>
+          <a:xfrm>
+            <a:off x="5349240" y="1645920"/>
+            <a:ext cx="3200400" cy="228600"/>
+          </a:xfrm>
+          <a:prstGeom prst="rect">
+            <a:avLst/>
+          </a:prstGeom>
+          <a:noFill/>
+          <a:ln/>
+        </p:spPr>
+        <p:txBody>
+          <a:bodyPr wrap="square" lIns="0" tIns="0" rIns="0" bIns="0" rtlCol="0" anchor="ctr"/>
+          <a:lstStyle/>
+          <a:p>
+            <a:pPr indent="0" marL="0">
+              <a:buNone/>
+            </a:pPr>
+            <a:r>
+              <a:rPr lang="en-US" sz="1200" b="1" dirty="0">
+                <a:solidFill>
+                  <a:srgbClr val="1E2761"/>
+                </a:solidFill>
+                <a:latin typeface="Arial" pitchFamily="34" charset="0"/>
+                <a:ea typeface="Arial" pitchFamily="34" charset="-122"/>
+                <a:cs typeface="Arial" pitchFamily="34" charset="-120"/>
+              </a:rPr>
+              <a:t>开发期用便宜模型</a:t>
+            </a:r>
+            <a:endParaRPr lang="en-US" sz="1200" dirty="0"/>
+          </a:p>
+        </p:txBody>
+      </p:sp>
+      <p:sp>
+        <p:nvSpPr>
+          <p:cNvPr id="11" name="Text 9"/>
+          <p:cNvSpPr/>
+          <p:nvPr/>
+        </p:nvSpPr>
+        <p:spPr>
+          <a:xfrm>
+            <a:off x="5349240" y="1874520"/>
+            <a:ext cx="3200400" cy="228600"/>
+          </a:xfrm>
+          <a:prstGeom prst="rect">
+            <a:avLst/>
+          </a:prstGeom>
+          <a:noFill/>
+          <a:ln/>
+        </p:spPr>
+        <p:txBody>
+          <a:bodyPr wrap="square" lIns="0" tIns="0" rIns="0" bIns="0" rtlCol="0" anchor="ctr"/>
+          <a:lstStyle/>
+          <a:p>
+            <a:pPr indent="0" marL="0">
+              <a:buNone/>
+            </a:pPr>
+            <a:r>
+              <a:rPr lang="en-US" sz="1100" dirty="0">
+                <a:solidFill>
+                  <a:srgbClr val="475569"/>
+                </a:solidFill>
+                <a:latin typeface="Arial" pitchFamily="34" charset="0"/>
+                <a:ea typeface="Arial" pitchFamily="34" charset="-122"/>
+                <a:cs typeface="Arial" pitchFamily="34" charset="-120"/>
+              </a:rPr>
+              <a:t>GPT-4o-mini 调试，好了再上贵的</a:t>
+            </a:r>
+            <a:endParaRPr lang="en-US" sz="1100" dirty="0"/>
+          </a:p>
+        </p:txBody>
+      </p:sp>
+      <p:sp>
+        <p:nvSpPr>
+          <p:cNvPr id="12" name="Shape 10"/>
+          <p:cNvSpPr/>
+          <p:nvPr/>
+        </p:nvSpPr>
+        <p:spPr>
+          <a:xfrm>
+            <a:off x="4937760" y="2148840"/>
+            <a:ext cx="274320" cy="274320"/>
+          </a:xfrm>
+          <a:prstGeom prst="ellipse">
+            <a:avLst/>
+          </a:prstGeom>
+          <a:solidFill>
+            <a:srgbClr val="1E2761"/>
+          </a:solidFill>
+          <a:ln/>
+        </p:spPr>
+      </p:sp>
+      <p:sp>
+        <p:nvSpPr>
+          <p:cNvPr id="13" name="Text 11"/>
+          <p:cNvSpPr/>
+          <p:nvPr/>
+        </p:nvSpPr>
+        <p:spPr>
+          <a:xfrm>
+            <a:off x="4937760" y="2148840"/>
+            <a:ext cx="274320" cy="274320"/>
+          </a:xfrm>
+          <a:prstGeom prst="rect">
+            <a:avLst/>
+          </a:prstGeom>
+          <a:noFill/>
+          <a:ln/>
+        </p:spPr>
+        <p:txBody>
+          <a:bodyPr wrap="square" lIns="0" tIns="0" rIns="0" bIns="0" rtlCol="0" anchor="ctr"/>
+          <a:lstStyle/>
+          <a:p>
+            <a:pPr algn="ctr" indent="0" marL="0">
+              <a:buNone/>
+            </a:pPr>
+            <a:r>
+              <a:rPr lang="en-US" sz="1100" b="1" dirty="0">
+                <a:solidFill>
+                  <a:srgbClr val="FFFFFF"/>
+                </a:solidFill>
+                <a:latin typeface="Arial" pitchFamily="34" charset="0"/>
+                <a:ea typeface="Arial" pitchFamily="34" charset="-122"/>
+                <a:cs typeface="Arial" pitchFamily="34" charset="-120"/>
+              </a:rPr>
+              <a:t>2</a:t>
+            </a:r>
+            <a:endParaRPr lang="en-US" sz="1100" dirty="0"/>
+          </a:p>
+        </p:txBody>
+      </p:sp>
+      <p:sp>
+        <p:nvSpPr>
+          <p:cNvPr id="14" name="Text 12"/>
+          <p:cNvSpPr/>
+          <p:nvPr/>
+        </p:nvSpPr>
+        <p:spPr>
+          <a:xfrm>
+            <a:off x="5349240" y="2148840"/>
+            <a:ext cx="3200400" cy="228600"/>
+          </a:xfrm>
+          <a:prstGeom prst="rect">
+            <a:avLst/>
+          </a:prstGeom>
+          <a:noFill/>
+          <a:ln/>
+        </p:spPr>
+        <p:txBody>
+          <a:bodyPr wrap="square" lIns="0" tIns="0" rIns="0" bIns="0" rtlCol="0" anchor="ctr"/>
+          <a:lstStyle/>
+          <a:p>
+            <a:pPr indent="0" marL="0">
+              <a:buNone/>
+            </a:pPr>
+            <a:r>
+              <a:rPr lang="en-US" sz="1200" b="1" dirty="0">
+                <a:solidFill>
+                  <a:srgbClr val="1E2761"/>
+                </a:solidFill>
+                <a:latin typeface="Arial" pitchFamily="34" charset="0"/>
+                <a:ea typeface="Arial" pitchFamily="34" charset="-122"/>
+                <a:cs typeface="Arial" pitchFamily="34" charset="-120"/>
+              </a:rPr>
+              <a:t>上下文只放必要</a:t>
+            </a:r>
+            <a:endParaRPr lang="en-US" sz="1200" dirty="0"/>
+          </a:p>
+        </p:txBody>
+      </p:sp>
+      <p:sp>
+        <p:nvSpPr>
+          <p:cNvPr id="15" name="Text 13"/>
+          <p:cNvSpPr/>
+          <p:nvPr/>
+        </p:nvSpPr>
+        <p:spPr>
+          <a:xfrm>
+            <a:off x="5349240" y="2377440"/>
+            <a:ext cx="3200400" cy="228600"/>
+          </a:xfrm>
+          <a:prstGeom prst="rect">
+            <a:avLst/>
+          </a:prstGeom>
+          <a:noFill/>
+          <a:ln/>
+        </p:spPr>
+        <p:txBody>
+          <a:bodyPr wrap="square" lIns="0" tIns="0" rIns="0" bIns="0" rtlCol="0" anchor="ctr"/>
+          <a:lstStyle/>
+          <a:p>
+            <a:pPr indent="0" marL="0">
+              <a:buNone/>
+            </a:pPr>
+            <a:r>
+              <a:rPr lang="en-US" sz="1100" dirty="0">
+                <a:solidFill>
+                  <a:srgbClr val="475569"/>
+                </a:solidFill>
+                <a:latin typeface="Arial" pitchFamily="34" charset="0"/>
+                <a:ea typeface="Arial" pitchFamily="34" charset="-122"/>
+                <a:cs typeface="Arial" pitchFamily="34" charset="-120"/>
+              </a:rPr>
+              <a:t>历史对话太长会累积计费</a:t>
+            </a:r>
+            <a:endParaRPr lang="en-US" sz="1100" dirty="0"/>
+          </a:p>
+        </p:txBody>
+      </p:sp>
+      <p:sp>
+        <p:nvSpPr>
+          <p:cNvPr id="16" name="Shape 14"/>
+          <p:cNvSpPr/>
+          <p:nvPr/>
+        </p:nvSpPr>
+        <p:spPr>
+          <a:xfrm>
+            <a:off x="4937760" y="2651760"/>
+            <a:ext cx="274320" cy="274320"/>
+          </a:xfrm>
+          <a:prstGeom prst="ellipse">
+            <a:avLst/>
+          </a:prstGeom>
+          <a:solidFill>
+            <a:srgbClr val="1E2761"/>
+          </a:solidFill>
+          <a:ln/>
+        </p:spPr>
+      </p:sp>
+      <p:sp>
+        <p:nvSpPr>
+          <p:cNvPr id="17" name="Text 15"/>
+          <p:cNvSpPr/>
+          <p:nvPr/>
+        </p:nvSpPr>
+        <p:spPr>
+          <a:xfrm>
+            <a:off x="4937760" y="2651760"/>
+            <a:ext cx="274320" cy="274320"/>
+          </a:xfrm>
+          <a:prstGeom prst="rect">
+            <a:avLst/>
+          </a:prstGeom>
+          <a:noFill/>
+          <a:ln/>
+        </p:spPr>
+        <p:txBody>
+          <a:bodyPr wrap="square" lIns="0" tIns="0" rIns="0" bIns="0" rtlCol="0" anchor="ctr"/>
+          <a:lstStyle/>
+          <a:p>
+            <a:pPr algn="ctr" indent="0" marL="0">
+              <a:buNone/>
+            </a:pPr>
+            <a:r>
+              <a:rPr lang="en-US" sz="1100" b="1" dirty="0">
+                <a:solidFill>
+                  <a:srgbClr val="FFFFFF"/>
+                </a:solidFill>
+                <a:latin typeface="Arial" pitchFamily="34" charset="0"/>
+                <a:ea typeface="Arial" pitchFamily="34" charset="-122"/>
+                <a:cs typeface="Arial" pitchFamily="34" charset="-120"/>
+              </a:rPr>
+              <a:t>3</a:t>
+            </a:r>
+            <a:endParaRPr lang="en-US" sz="1100" dirty="0"/>
+          </a:p>
+        </p:txBody>
+      </p:sp>
+      <p:sp>
+        <p:nvSpPr>
+          <p:cNvPr id="18" name="Text 16"/>
+          <p:cNvSpPr/>
+          <p:nvPr/>
+        </p:nvSpPr>
+        <p:spPr>
+          <a:xfrm>
+            <a:off x="5349240" y="2651760"/>
+            <a:ext cx="3200400" cy="228600"/>
+          </a:xfrm>
+          <a:prstGeom prst="rect">
+            <a:avLst/>
+          </a:prstGeom>
+          <a:noFill/>
+          <a:ln/>
+        </p:spPr>
+        <p:txBody>
+          <a:bodyPr wrap="square" lIns="0" tIns="0" rIns="0" bIns="0" rtlCol="0" anchor="ctr"/>
+          <a:lstStyle/>
+          <a:p>
+            <a:pPr indent="0" marL="0">
+              <a:buNone/>
+            </a:pPr>
+            <a:r>
+              <a:rPr lang="en-US" sz="1200" b="1" dirty="0">
+                <a:solidFill>
+                  <a:srgbClr val="1E2761"/>
+                </a:solidFill>
+                <a:latin typeface="Arial" pitchFamily="34" charset="0"/>
+                <a:ea typeface="Arial" pitchFamily="34" charset="-122"/>
+                <a:cs typeface="Arial" pitchFamily="34" charset="-120"/>
+              </a:rPr>
+              <a:t>批量处理</a:t>
+            </a:r>
+            <a:endParaRPr lang="en-US" sz="1200" dirty="0"/>
+          </a:p>
+        </p:txBody>
+      </p:sp>
+      <p:sp>
+        <p:nvSpPr>
+          <p:cNvPr id="19" name="Text 17"/>
+          <p:cNvSpPr/>
+          <p:nvPr/>
+        </p:nvSpPr>
+        <p:spPr>
+          <a:xfrm>
+            <a:off x="5349240" y="2880360"/>
+            <a:ext cx="3200400" cy="228600"/>
+          </a:xfrm>
+          <a:prstGeom prst="rect">
+            <a:avLst/>
+          </a:prstGeom>
+          <a:noFill/>
+          <a:ln/>
+        </p:spPr>
+        <p:txBody>
+          <a:bodyPr wrap="square" lIns="0" tIns="0" rIns="0" bIns="0" rtlCol="0" anchor="ctr"/>
+          <a:lstStyle/>
+          <a:p>
+            <a:pPr indent="0" marL="0">
+              <a:buNone/>
+            </a:pPr>
+            <a:r>
+              <a:rPr lang="en-US" sz="1100" dirty="0">
+                <a:solidFill>
+                  <a:srgbClr val="475569"/>
+                </a:solidFill>
+                <a:latin typeface="Arial" pitchFamily="34" charset="0"/>
+                <a:ea typeface="Arial" pitchFamily="34" charset="-122"/>
+                <a:cs typeface="Arial" pitchFamily="34" charset="-120"/>
+              </a:rPr>
+              <a:t>批量比单条循环省 token</a:t>
+            </a:r>
+            <a:endParaRPr lang="en-US" sz="1100" dirty="0"/>
+          </a:p>
+        </p:txBody>
+      </p:sp>
+      <p:sp>
+        <p:nvSpPr>
+          <p:cNvPr id="20" name="Shape 18"/>
+          <p:cNvSpPr/>
+          <p:nvPr/>
+        </p:nvSpPr>
+        <p:spPr>
+          <a:xfrm>
+            <a:off x="4937760" y="3154680"/>
+            <a:ext cx="274320" cy="274320"/>
+          </a:xfrm>
+          <a:prstGeom prst="ellipse">
+            <a:avLst/>
+          </a:prstGeom>
+          <a:solidFill>
+            <a:srgbClr val="1E2761"/>
+          </a:solidFill>
+          <a:ln/>
+        </p:spPr>
+      </p:sp>
+      <p:sp>
+        <p:nvSpPr>
+          <p:cNvPr id="21" name="Text 19"/>
+          <p:cNvSpPr/>
+          <p:nvPr/>
+        </p:nvSpPr>
+        <p:spPr>
+          <a:xfrm>
+            <a:off x="4937760" y="3154680"/>
+            <a:ext cx="274320" cy="274320"/>
+          </a:xfrm>
+          <a:prstGeom prst="rect">
+            <a:avLst/>
+          </a:prstGeom>
+          <a:noFill/>
+          <a:ln/>
+        </p:spPr>
+        <p:txBody>
+          <a:bodyPr wrap="square" lIns="0" tIns="0" rIns="0" bIns="0" rtlCol="0" anchor="ctr"/>
+          <a:lstStyle/>
+          <a:p>
+            <a:pPr algn="ctr" indent="0" marL="0">
+              <a:buNone/>
+            </a:pPr>
+            <a:r>
+              <a:rPr lang="en-US" sz="1100" b="1" dirty="0">
+                <a:solidFill>
+                  <a:srgbClr val="FFFFFF"/>
+                </a:solidFill>
+                <a:latin typeface="Arial" pitchFamily="34" charset="0"/>
+                <a:ea typeface="Arial" pitchFamily="34" charset="-122"/>
+                <a:cs typeface="Arial" pitchFamily="34" charset="-120"/>
+              </a:rPr>
+              <a:t>4</a:t>
+            </a:r>
+            <a:endParaRPr lang="en-US" sz="1100" dirty="0"/>
+          </a:p>
+        </p:txBody>
+      </p:sp>
+      <p:sp>
+        <p:nvSpPr>
+          <p:cNvPr id="22" name="Text 20"/>
+          <p:cNvSpPr/>
+          <p:nvPr/>
+        </p:nvSpPr>
+        <p:spPr>
+          <a:xfrm>
+            <a:off x="5349240" y="3154680"/>
+            <a:ext cx="3200400" cy="228600"/>
+          </a:xfrm>
+          <a:prstGeom prst="rect">
+            <a:avLst/>
+          </a:prstGeom>
+          <a:noFill/>
+          <a:ln/>
+        </p:spPr>
+        <p:txBody>
+          <a:bodyPr wrap="square" lIns="0" tIns="0" rIns="0" bIns="0" rtlCol="0" anchor="ctr"/>
+          <a:lstStyle/>
+          <a:p>
+            <a:pPr indent="0" marL="0">
+              <a:buNone/>
+            </a:pPr>
+            <a:r>
+              <a:rPr lang="en-US" sz="1200" b="1" dirty="0">
+                <a:solidFill>
+                  <a:srgbClr val="1E2761"/>
+                </a:solidFill>
+                <a:latin typeface="Arial" pitchFamily="34" charset="0"/>
+                <a:ea typeface="Arial" pitchFamily="34" charset="-122"/>
+                <a:cs typeface="Arial" pitchFamily="34" charset="-120"/>
+              </a:rPr>
+              <a:t>定期看一眼</a:t>
+            </a:r>
+            <a:endParaRPr lang="en-US" sz="1200" dirty="0"/>
+          </a:p>
+        </p:txBody>
+      </p:sp>
+      <p:sp>
+        <p:nvSpPr>
+          <p:cNvPr id="23" name="Text 21"/>
+          <p:cNvSpPr/>
+          <p:nvPr/>
+        </p:nvSpPr>
+        <p:spPr>
+          <a:xfrm>
+            <a:off x="5349240" y="3383280"/>
+            <a:ext cx="3200400" cy="228600"/>
+          </a:xfrm>
+          <a:prstGeom prst="rect">
+            <a:avLst/>
+          </a:prstGeom>
+          <a:noFill/>
+          <a:ln/>
+        </p:spPr>
+        <p:txBody>
+          <a:bodyPr wrap="square" lIns="0" tIns="0" rIns="0" bIns="0" rtlCol="0" anchor="ctr"/>
+          <a:lstStyle/>
+          <a:p>
+            <a:pPr indent="0" marL="0">
+              <a:buNone/>
+            </a:pPr>
+            <a:r>
+              <a:rPr lang="en-US" sz="1100" dirty="0">
+                <a:solidFill>
+                  <a:srgbClr val="475569"/>
+                </a:solidFill>
+                <a:latin typeface="Arial" pitchFamily="34" charset="0"/>
+                <a:ea typeface="Arial" pitchFamily="34" charset="-122"/>
+                <a:cs typeface="Arial" pitchFamily="34" charset="-120"/>
+              </a:rPr>
+              <a:t>ccusage week，异常早发现</a:t>
+            </a:r>
+            <a:endParaRPr lang="en-US" sz="1100" dirty="0"/>
+          </a:p>
+        </p:txBody>
+      </p:sp>
+    </p:spTree>
+  </p:cSld>
+  <p:clrMapOvr>
+    <a:masterClrMapping/>
+  </p:clrMapOvr>
+</p:sld>
+</file>
+
+<file path=ppt/slides/slide9.xml><?xml version="1.0" encoding="utf-8"?>
+<p:sld xmlns:a="http://schemas.openxmlformats.org/drawingml/2006/main" xmlns:r="http://schemas.openxmlformats.org/officeDocument/2006/relationships" xmlns:p="http://schemas.openxmlformats.org/presentationml/2006/main">
+  <p:cSld name="Slide 9">
+    <p:bg>
+      <p:bgPr>
+        <a:solidFill>
+          <a:srgbClr val="FFFFFF"/>
+        </a:solidFill>
+      </p:bgPr>
+    </p:bg>
+    <p:spTree>
+      <p:nvGrpSpPr>
+        <p:cNvPr id="1" name=""/>
+        <p:cNvGrpSpPr/>
+        <p:nvPr/>
+      </p:nvGrpSpPr>
+      <p:grpSpPr>
+        <a:xfrm>
+          <a:off x="0" y="0"/>
+          <a:ext cx="0" cy="0"/>
+          <a:chOff x="0" y="0"/>
+          <a:chExt cx="0" cy="0"/>
+        </a:xfrm>
+      </p:grpSpPr>
+      <p:sp>
+        <p:nvSpPr>
+          <p:cNvPr id="2" name="Shape 0"/>
+          <p:cNvSpPr/>
+          <p:nvPr/>
+        </p:nvSpPr>
+        <p:spPr>
+          <a:xfrm>
+            <a:off x="0" y="0"/>
+            <a:ext cx="137160" cy="5143500"/>
+          </a:xfrm>
+          <a:prstGeom prst="rect">
+            <a:avLst/>
+          </a:prstGeom>
+          <a:solidFill>
+            <a:srgbClr val="1E2761"/>
+          </a:solidFill>
+          <a:ln/>
+        </p:spPr>
+      </p:sp>
+      <p:sp>
+        <p:nvSpPr>
+          <p:cNvPr id="3" name="Text 1"/>
+          <p:cNvSpPr/>
+          <p:nvPr/>
+        </p:nvSpPr>
+        <p:spPr>
+          <a:xfrm>
+            <a:off x="548640" y="320040"/>
+            <a:ext cx="8046720" cy="548640"/>
+          </a:xfrm>
+          <a:prstGeom prst="rect">
+            <a:avLst/>
+          </a:prstGeom>
+          <a:noFill/>
+          <a:ln/>
+        </p:spPr>
+        <p:txBody>
+          <a:bodyPr wrap="square" lIns="0" tIns="0" rIns="0" bIns="0" rtlCol="0" anchor="ctr"/>
+          <a:lstStyle/>
+          <a:p>
+            <a:pPr indent="0" marL="0">
+              <a:buNone/>
+            </a:pPr>
+            <a:r>
+              <a:rPr lang="en-US" sz="3200" b="1" dirty="0">
+                <a:solidFill>
+                  <a:srgbClr val="1E2761"/>
+                </a:solidFill>
+                <a:latin typeface="Arial" pitchFamily="34" charset="0"/>
+                <a:ea typeface="Arial" pitchFamily="34" charset="-122"/>
+                <a:cs typeface="Arial" pitchFamily="34" charset="-120"/>
+              </a:rPr>
+              <a:t>AI 辅助做 PPT</a:t>
+            </a:r>
+            <a:endParaRPr lang="en-US" sz="3200" dirty="0"/>
+          </a:p>
+        </p:txBody>
+      </p:sp>
+      <p:sp>
+        <p:nvSpPr>
+          <p:cNvPr id="4" name="Text 2"/>
+          <p:cNvSpPr/>
+          <p:nvPr/>
+        </p:nvSpPr>
+        <p:spPr>
+          <a:xfrm>
+            <a:off x="548640" y="822960"/>
+            <a:ext cx="8046720" cy="320040"/>
+          </a:xfrm>
+          <a:prstGeom prst="rect">
+            <a:avLst/>
+          </a:prstGeom>
+          <a:noFill/>
+          <a:ln/>
+        </p:spPr>
+        <p:txBody>
+          <a:bodyPr wrap="square" lIns="0" tIns="0" rIns="0" bIns="0" rtlCol="0" anchor="ctr"/>
+          <a:lstStyle/>
+          <a:p>
+            <a:pPr indent="0" marL="0">
+              <a:buNone/>
+            </a:pPr>
+            <a:r>
+              <a:rPr lang="en-US" sz="1400" dirty="0">
+                <a:solidFill>
+                  <a:srgbClr val="64748B"/>
+                </a:solidFill>
+                <a:latin typeface="Arial" pitchFamily="34" charset="0"/>
+                <a:ea typeface="Arial" pitchFamily="34" charset="-122"/>
+                <a:cs typeface="Arial" pitchFamily="34" charset="-120"/>
+              </a:rPr>
               <a:t>（1/2）工作流对比</a:t>
             </a:r>
             <a:endParaRPr lang="en-US" sz="1400" dirty="0"/>
@@ -7295,7 +8769,7 @@
       </p:sp>
       <p:graphicFrame>
         <p:nvGraphicFramePr>
-          <p:cNvPr id="9" name="Table 0"/>
+          <p:cNvPr id="10" name="Table 0"/>
           <p:cNvGraphicFramePr>
             <a:graphicFrameLocks noGrp="1"/>
           </p:cNvGraphicFramePr>
@@ -8390,897 +9864,6 @@
               <a:t>给 AI 的指令 = 主题 + 受众 + 页数 + 风格 + 特殊要求</a:t>
             </a:r>
             <a:endParaRPr lang="en-US" sz="1300" dirty="0"/>
-          </a:p>
-        </p:txBody>
-      </p:sp>
-    </p:spTree>
-  </p:cSld>
-  <p:clrMapOvr>
-    <a:masterClrMapping/>
-  </p:clrMapOvr>
-</p:sld>
-</file>
-
-<file path=ppt/slides/slide9.xml><?xml version="1.0" encoding="utf-8"?>
-<p:sld xmlns:a="http://schemas.openxmlformats.org/drawingml/2006/main" xmlns:r="http://schemas.openxmlformats.org/officeDocument/2006/relationships" xmlns:p="http://schemas.openxmlformats.org/presentationml/2006/main">
-  <p:cSld name="Slide 9">
-    <p:bg>
-      <p:bgPr>
-        <a:solidFill>
-          <a:srgbClr val="FFFFFF"/>
-        </a:solidFill>
-      </p:bgPr>
-    </p:bg>
-    <p:spTree>
-      <p:nvGrpSpPr>
-        <p:cNvPr id="1" name=""/>
-        <p:cNvGrpSpPr/>
-        <p:nvPr/>
-      </p:nvGrpSpPr>
-      <p:grpSpPr>
-        <a:xfrm>
-          <a:off x="0" y="0"/>
-          <a:ext cx="0" cy="0"/>
-          <a:chOff x="0" y="0"/>
-          <a:chExt cx="0" cy="0"/>
-        </a:xfrm>
-      </p:grpSpPr>
-      <p:sp>
-        <p:nvSpPr>
-          <p:cNvPr id="2" name="Shape 0"/>
-          <p:cNvSpPr/>
-          <p:nvPr/>
-        </p:nvSpPr>
-        <p:spPr>
-          <a:xfrm>
-            <a:off x="0" y="0"/>
-            <a:ext cx="137160" cy="5143500"/>
-          </a:xfrm>
-          <a:prstGeom prst="rect">
-            <a:avLst/>
-          </a:prstGeom>
-          <a:solidFill>
-            <a:srgbClr val="1E2761"/>
-          </a:solidFill>
-          <a:ln/>
-        </p:spPr>
-      </p:sp>
-      <p:sp>
-        <p:nvSpPr>
-          <p:cNvPr id="3" name="Text 1"/>
-          <p:cNvSpPr/>
-          <p:nvPr/>
-        </p:nvSpPr>
-        <p:spPr>
-          <a:xfrm>
-            <a:off x="548640" y="320040"/>
-            <a:ext cx="8046720" cy="548640"/>
-          </a:xfrm>
-          <a:prstGeom prst="rect">
-            <a:avLst/>
-          </a:prstGeom>
-          <a:noFill/>
-          <a:ln/>
-        </p:spPr>
-        <p:txBody>
-          <a:bodyPr wrap="square" lIns="0" tIns="0" rIns="0" bIns="0" rtlCol="0" anchor="ctr"/>
-          <a:lstStyle/>
-          <a:p>
-            <a:pPr indent="0" marL="0">
-              <a:buNone/>
-            </a:pPr>
-            <a:r>
-              <a:rPr lang="en-US" sz="3200" b="1" dirty="0">
-                <a:solidFill>
-                  <a:srgbClr val="1E2761"/>
-                </a:solidFill>
-                <a:latin typeface="Arial" pitchFamily="34" charset="0"/>
-                <a:ea typeface="Arial" pitchFamily="34" charset="-122"/>
-                <a:cs typeface="Arial" pitchFamily="34" charset="-120"/>
-              </a:rPr>
-              <a:t>AI 辅助做 PPT</a:t>
-            </a:r>
-            <a:endParaRPr lang="en-US" sz="3200" dirty="0"/>
-          </a:p>
-        </p:txBody>
-      </p:sp>
-      <p:sp>
-        <p:nvSpPr>
-          <p:cNvPr id="4" name="Text 2"/>
-          <p:cNvSpPr/>
-          <p:nvPr/>
-        </p:nvSpPr>
-        <p:spPr>
-          <a:xfrm>
-            <a:off x="548640" y="822960"/>
-            <a:ext cx="8046720" cy="320040"/>
-          </a:xfrm>
-          <a:prstGeom prst="rect">
-            <a:avLst/>
-          </a:prstGeom>
-          <a:noFill/>
-          <a:ln/>
-        </p:spPr>
-        <p:txBody>
-          <a:bodyPr wrap="square" lIns="0" tIns="0" rIns="0" bIns="0" rtlCol="0" anchor="ctr"/>
-          <a:lstStyle/>
-          <a:p>
-            <a:pPr indent="0" marL="0">
-              <a:buNone/>
-            </a:pPr>
-            <a:r>
-              <a:rPr lang="en-US" sz="1400" dirty="0">
-                <a:solidFill>
-                  <a:srgbClr val="64748B"/>
-                </a:solidFill>
-                <a:latin typeface="Arial" pitchFamily="34" charset="0"/>
-                <a:ea typeface="Arial" pitchFamily="34" charset="-122"/>
-                <a:cs typeface="Arial" pitchFamily="34" charset="-120"/>
-              </a:rPr>
-              <a:t>（2/2）实操步骤</a:t>
-            </a:r>
-            <a:endParaRPr lang="en-US" sz="1400" dirty="0"/>
-          </a:p>
-        </p:txBody>
-      </p:sp>
-      <p:sp>
-        <p:nvSpPr>
-          <p:cNvPr id="5" name="Shape 3"/>
-          <p:cNvSpPr/>
-          <p:nvPr/>
-        </p:nvSpPr>
-        <p:spPr>
-          <a:xfrm>
-            <a:off x="548640" y="1371600"/>
-            <a:ext cx="3931920" cy="1737360"/>
-          </a:xfrm>
-          <a:prstGeom prst="rect">
-            <a:avLst/>
-          </a:prstGeom>
-          <a:solidFill>
-            <a:srgbClr val="FFFFFF"/>
-          </a:solidFill>
-          <a:ln w="12700">
-            <a:solidFill>
-              <a:srgbClr val="E2E8F0"/>
-            </a:solidFill>
-            <a:prstDash val="solid"/>
-          </a:ln>
-          <a:effectLst>
-            <a:outerShdw sx="100000" sy="100000" kx="0" ky="0" algn="bl" rotWithShape="0" blurRad="76200" dist="25400" dir="8100000">
-              <a:srgbClr val="000000">
-                <a:alpha val="12000"/>
-              </a:srgbClr>
-            </a:outerShdw>
-          </a:effectLst>
-        </p:spPr>
-      </p:sp>
-      <p:sp>
-        <p:nvSpPr>
-          <p:cNvPr id="6" name="Shape 4"/>
-          <p:cNvSpPr/>
-          <p:nvPr/>
-        </p:nvSpPr>
-        <p:spPr>
-          <a:xfrm>
-            <a:off x="731520" y="1508760"/>
-            <a:ext cx="731520" cy="256032"/>
-          </a:xfrm>
-          <a:prstGeom prst="rect">
-            <a:avLst/>
-          </a:prstGeom>
-          <a:solidFill>
-            <a:srgbClr val="1E2761"/>
-          </a:solidFill>
-          <a:ln/>
-        </p:spPr>
-      </p:sp>
-      <p:sp>
-        <p:nvSpPr>
-          <p:cNvPr id="7" name="Text 5"/>
-          <p:cNvSpPr/>
-          <p:nvPr/>
-        </p:nvSpPr>
-        <p:spPr>
-          <a:xfrm>
-            <a:off x="731520" y="1508760"/>
-            <a:ext cx="731520" cy="256032"/>
-          </a:xfrm>
-          <a:prstGeom prst="rect">
-            <a:avLst/>
-          </a:prstGeom>
-          <a:noFill/>
-          <a:ln/>
-        </p:spPr>
-        <p:txBody>
-          <a:bodyPr wrap="square" lIns="0" tIns="0" rIns="0" bIns="0" rtlCol="0" anchor="ctr"/>
-          <a:lstStyle/>
-          <a:p>
-            <a:pPr algn="ctr" indent="0" marL="0">
-              <a:buNone/>
-            </a:pPr>
-            <a:r>
-              <a:rPr lang="en-US" sz="1000" b="1" dirty="0">
-                <a:solidFill>
-                  <a:srgbClr val="FFFFFF"/>
-                </a:solidFill>
-                <a:latin typeface="Arial" pitchFamily="34" charset="0"/>
-                <a:ea typeface="Arial" pitchFamily="34" charset="-122"/>
-                <a:cs typeface="Arial" pitchFamily="34" charset="-120"/>
-              </a:rPr>
-              <a:t>Step 1</a:t>
-            </a:r>
-            <a:endParaRPr lang="en-US" sz="1000" dirty="0"/>
-          </a:p>
-        </p:txBody>
-      </p:sp>
-      <p:sp>
-        <p:nvSpPr>
-          <p:cNvPr id="8" name="Text 6"/>
-          <p:cNvSpPr/>
-          <p:nvPr/>
-        </p:nvSpPr>
-        <p:spPr>
-          <a:xfrm>
-            <a:off x="1554480" y="1508760"/>
-            <a:ext cx="2743200" cy="274320"/>
-          </a:xfrm>
-          <a:prstGeom prst="rect">
-            <a:avLst/>
-          </a:prstGeom>
-          <a:noFill/>
-          <a:ln/>
-        </p:spPr>
-        <p:txBody>
-          <a:bodyPr wrap="square" lIns="0" tIns="0" rIns="0" bIns="0" rtlCol="0" anchor="ctr"/>
-          <a:lstStyle/>
-          <a:p>
-            <a:pPr indent="0" marL="0">
-              <a:buNone/>
-            </a:pPr>
-            <a:r>
-              <a:rPr lang="en-US" sz="1400" b="1" dirty="0">
-                <a:solidFill>
-                  <a:srgbClr val="1E2761"/>
-                </a:solidFill>
-                <a:latin typeface="Arial" pitchFamily="34" charset="0"/>
-                <a:ea typeface="Arial" pitchFamily="34" charset="-122"/>
-                <a:cs typeface="Arial" pitchFamily="34" charset="-120"/>
-              </a:rPr>
-              <a:t>生成大纲</a:t>
-            </a:r>
-            <a:endParaRPr lang="en-US" sz="1400" dirty="0"/>
-          </a:p>
-        </p:txBody>
-      </p:sp>
-      <p:sp>
-        <p:nvSpPr>
-          <p:cNvPr id="9" name="Text 7"/>
-          <p:cNvSpPr/>
-          <p:nvPr/>
-        </p:nvSpPr>
-        <p:spPr>
-          <a:xfrm>
-            <a:off x="731520" y="1874520"/>
-            <a:ext cx="3566160" cy="1097280"/>
-          </a:xfrm>
-          <a:prstGeom prst="rect">
-            <a:avLst/>
-          </a:prstGeom>
-          <a:noFill/>
-          <a:ln/>
-        </p:spPr>
-        <p:txBody>
-          <a:bodyPr wrap="square" lIns="0" tIns="0" rIns="0" bIns="0" rtlCol="0" anchor="t"/>
-          <a:lstStyle/>
-          <a:p>
-            <a:pPr indent="0" marL="0">
-              <a:buNone/>
-            </a:pPr>
-            <a:r>
-              <a:rPr lang="en-US" sz="1100" dirty="0">
-                <a:solidFill>
-                  <a:srgbClr val="475569"/>
-                </a:solidFill>
-                <a:latin typeface="Arial" pitchFamily="34" charset="0"/>
-                <a:ea typeface="Arial" pitchFamily="34" charset="-122"/>
-                <a:cs typeface="Arial" pitchFamily="34" charset="-120"/>
-              </a:rPr>
-              <a:t>给 AI 主题 + 受众 + 页数 + 风格</a:t>
-            </a:r>
-            <a:endParaRPr lang="en-US" sz="1100" dirty="0"/>
-          </a:p>
-          <a:p>
-            <a:pPr indent="0" marL="0">
-              <a:buNone/>
-            </a:pPr>
-            <a:r>
-              <a:rPr lang="en-US" sz="1100" dirty="0">
-                <a:solidFill>
-                  <a:srgbClr val="475569"/>
-                </a:solidFill>
-                <a:latin typeface="Arial" pitchFamily="34" charset="0"/>
-                <a:ea typeface="Arial" pitchFamily="34" charset="-122"/>
-                <a:cs typeface="Arial" pitchFamily="34" charset="-120"/>
-              </a:rPr>
-              <a:t>AI 输出结构化的每页标题和要点</a:t>
-            </a:r>
-            <a:endParaRPr lang="en-US" sz="1100" dirty="0"/>
-          </a:p>
-        </p:txBody>
-      </p:sp>
-      <p:sp>
-        <p:nvSpPr>
-          <p:cNvPr id="10" name="Shape 8"/>
-          <p:cNvSpPr/>
-          <p:nvPr/>
-        </p:nvSpPr>
-        <p:spPr>
-          <a:xfrm>
-            <a:off x="4663440" y="1371600"/>
-            <a:ext cx="3931920" cy="1737360"/>
-          </a:xfrm>
-          <a:prstGeom prst="rect">
-            <a:avLst/>
-          </a:prstGeom>
-          <a:solidFill>
-            <a:srgbClr val="FFFFFF"/>
-          </a:solidFill>
-          <a:ln w="12700">
-            <a:solidFill>
-              <a:srgbClr val="E2E8F0"/>
-            </a:solidFill>
-            <a:prstDash val="solid"/>
-          </a:ln>
-          <a:effectLst>
-            <a:outerShdw sx="100000" sy="100000" kx="0" ky="0" algn="bl" rotWithShape="0" blurRad="76200" dist="25400" dir="8100000">
-              <a:srgbClr val="000000">
-                <a:alpha val="12000"/>
-              </a:srgbClr>
-            </a:outerShdw>
-          </a:effectLst>
-        </p:spPr>
-      </p:sp>
-      <p:sp>
-        <p:nvSpPr>
-          <p:cNvPr id="11" name="Shape 9"/>
-          <p:cNvSpPr/>
-          <p:nvPr/>
-        </p:nvSpPr>
-        <p:spPr>
-          <a:xfrm>
-            <a:off x="4846320" y="1508760"/>
-            <a:ext cx="731520" cy="256032"/>
-          </a:xfrm>
-          <a:prstGeom prst="rect">
-            <a:avLst/>
-          </a:prstGeom>
-          <a:solidFill>
-            <a:srgbClr val="1E2761"/>
-          </a:solidFill>
-          <a:ln/>
-        </p:spPr>
-      </p:sp>
-      <p:sp>
-        <p:nvSpPr>
-          <p:cNvPr id="12" name="Text 10"/>
-          <p:cNvSpPr/>
-          <p:nvPr/>
-        </p:nvSpPr>
-        <p:spPr>
-          <a:xfrm>
-            <a:off x="4846320" y="1508760"/>
-            <a:ext cx="731520" cy="256032"/>
-          </a:xfrm>
-          <a:prstGeom prst="rect">
-            <a:avLst/>
-          </a:prstGeom>
-          <a:noFill/>
-          <a:ln/>
-        </p:spPr>
-        <p:txBody>
-          <a:bodyPr wrap="square" lIns="0" tIns="0" rIns="0" bIns="0" rtlCol="0" anchor="ctr"/>
-          <a:lstStyle/>
-          <a:p>
-            <a:pPr algn="ctr" indent="0" marL="0">
-              <a:buNone/>
-            </a:pPr>
-            <a:r>
-              <a:rPr lang="en-US" sz="1000" b="1" dirty="0">
-                <a:solidFill>
-                  <a:srgbClr val="FFFFFF"/>
-                </a:solidFill>
-                <a:latin typeface="Arial" pitchFamily="34" charset="0"/>
-                <a:ea typeface="Arial" pitchFamily="34" charset="-122"/>
-                <a:cs typeface="Arial" pitchFamily="34" charset="-120"/>
-              </a:rPr>
-              <a:t>Step 2</a:t>
-            </a:r>
-            <a:endParaRPr lang="en-US" sz="1000" dirty="0"/>
-          </a:p>
-        </p:txBody>
-      </p:sp>
-      <p:sp>
-        <p:nvSpPr>
-          <p:cNvPr id="13" name="Text 11"/>
-          <p:cNvSpPr/>
-          <p:nvPr/>
-        </p:nvSpPr>
-        <p:spPr>
-          <a:xfrm>
-            <a:off x="5669280" y="1508760"/>
-            <a:ext cx="2743200" cy="274320"/>
-          </a:xfrm>
-          <a:prstGeom prst="rect">
-            <a:avLst/>
-          </a:prstGeom>
-          <a:noFill/>
-          <a:ln/>
-        </p:spPr>
-        <p:txBody>
-          <a:bodyPr wrap="square" lIns="0" tIns="0" rIns="0" bIns="0" rtlCol="0" anchor="ctr"/>
-          <a:lstStyle/>
-          <a:p>
-            <a:pPr indent="0" marL="0">
-              <a:buNone/>
-            </a:pPr>
-            <a:r>
-              <a:rPr lang="en-US" sz="1400" b="1" dirty="0">
-                <a:solidFill>
-                  <a:srgbClr val="1E2761"/>
-                </a:solidFill>
-                <a:latin typeface="Arial" pitchFamily="34" charset="0"/>
-                <a:ea typeface="Arial" pitchFamily="34" charset="-122"/>
-                <a:cs typeface="Arial" pitchFamily="34" charset="-120"/>
-              </a:rPr>
-              <a:t>扩写内容</a:t>
-            </a:r>
-            <a:endParaRPr lang="en-US" sz="1400" dirty="0"/>
-          </a:p>
-        </p:txBody>
-      </p:sp>
-      <p:sp>
-        <p:nvSpPr>
-          <p:cNvPr id="14" name="Text 12"/>
-          <p:cNvSpPr/>
-          <p:nvPr/>
-        </p:nvSpPr>
-        <p:spPr>
-          <a:xfrm>
-            <a:off x="4846320" y="1874520"/>
-            <a:ext cx="3566160" cy="1097280"/>
-          </a:xfrm>
-          <a:prstGeom prst="rect">
-            <a:avLst/>
-          </a:prstGeom>
-          <a:noFill/>
-          <a:ln/>
-        </p:spPr>
-        <p:txBody>
-          <a:bodyPr wrap="square" lIns="0" tIns="0" rIns="0" bIns="0" rtlCol="0" anchor="t"/>
-          <a:lstStyle/>
-          <a:p>
-            <a:pPr indent="0" marL="0">
-              <a:buNone/>
-            </a:pPr>
-            <a:r>
-              <a:rPr lang="en-US" sz="1100" dirty="0">
-                <a:solidFill>
-                  <a:srgbClr val="475569"/>
-                </a:solidFill>
-                <a:latin typeface="Arial" pitchFamily="34" charset="0"/>
-                <a:ea typeface="Arial" pitchFamily="34" charset="-122"/>
-                <a:cs typeface="Arial" pitchFamily="34" charset="-120"/>
-              </a:rPr>
-              <a:t>把大纲每页丢给 AI</a:t>
-            </a:r>
-            <a:endParaRPr lang="en-US" sz="1100" dirty="0"/>
-          </a:p>
-          <a:p>
-            <a:pPr indent="0" marL="0">
-              <a:buNone/>
-            </a:pPr>
-            <a:r>
-              <a:rPr lang="en-US" sz="1100" dirty="0">
-                <a:solidFill>
-                  <a:srgbClr val="475569"/>
-                </a:solidFill>
-                <a:latin typeface="Arial" pitchFamily="34" charset="0"/>
-                <a:ea typeface="Arial" pitchFamily="34" charset="-122"/>
-                <a:cs typeface="Arial" pitchFamily="34" charset="-120"/>
-              </a:rPr>
-              <a:t>要求扩写成 bullet points</a:t>
-            </a:r>
-            <a:endParaRPr lang="en-US" sz="1100" dirty="0"/>
-          </a:p>
-        </p:txBody>
-      </p:sp>
-      <p:sp>
-        <p:nvSpPr>
-          <p:cNvPr id="15" name="Shape 13"/>
-          <p:cNvSpPr/>
-          <p:nvPr/>
-        </p:nvSpPr>
-        <p:spPr>
-          <a:xfrm>
-            <a:off x="548640" y="3291840"/>
-            <a:ext cx="3931920" cy="1737360"/>
-          </a:xfrm>
-          <a:prstGeom prst="rect">
-            <a:avLst/>
-          </a:prstGeom>
-          <a:solidFill>
-            <a:srgbClr val="FFFFFF"/>
-          </a:solidFill>
-          <a:ln w="12700">
-            <a:solidFill>
-              <a:srgbClr val="E2E8F0"/>
-            </a:solidFill>
-            <a:prstDash val="solid"/>
-          </a:ln>
-          <a:effectLst>
-            <a:outerShdw sx="100000" sy="100000" kx="0" ky="0" algn="bl" rotWithShape="0" blurRad="76200" dist="25400" dir="8100000">
-              <a:srgbClr val="000000">
-                <a:alpha val="12000"/>
-              </a:srgbClr>
-            </a:outerShdw>
-          </a:effectLst>
-        </p:spPr>
-      </p:sp>
-      <p:sp>
-        <p:nvSpPr>
-          <p:cNvPr id="16" name="Shape 14"/>
-          <p:cNvSpPr/>
-          <p:nvPr/>
-        </p:nvSpPr>
-        <p:spPr>
-          <a:xfrm>
-            <a:off x="731520" y="3429000"/>
-            <a:ext cx="731520" cy="256032"/>
-          </a:xfrm>
-          <a:prstGeom prst="rect">
-            <a:avLst/>
-          </a:prstGeom>
-          <a:solidFill>
-            <a:srgbClr val="1E2761"/>
-          </a:solidFill>
-          <a:ln/>
-        </p:spPr>
-      </p:sp>
-      <p:sp>
-        <p:nvSpPr>
-          <p:cNvPr id="17" name="Text 15"/>
-          <p:cNvSpPr/>
-          <p:nvPr/>
-        </p:nvSpPr>
-        <p:spPr>
-          <a:xfrm>
-            <a:off x="731520" y="3429000"/>
-            <a:ext cx="731520" cy="256032"/>
-          </a:xfrm>
-          <a:prstGeom prst="rect">
-            <a:avLst/>
-          </a:prstGeom>
-          <a:noFill/>
-          <a:ln/>
-        </p:spPr>
-        <p:txBody>
-          <a:bodyPr wrap="square" lIns="0" tIns="0" rIns="0" bIns="0" rtlCol="0" anchor="ctr"/>
-          <a:lstStyle/>
-          <a:p>
-            <a:pPr algn="ctr" indent="0" marL="0">
-              <a:buNone/>
-            </a:pPr>
-            <a:r>
-              <a:rPr lang="en-US" sz="1000" b="1" dirty="0">
-                <a:solidFill>
-                  <a:srgbClr val="FFFFFF"/>
-                </a:solidFill>
-                <a:latin typeface="Arial" pitchFamily="34" charset="0"/>
-                <a:ea typeface="Arial" pitchFamily="34" charset="-122"/>
-                <a:cs typeface="Arial" pitchFamily="34" charset="-120"/>
-              </a:rPr>
-              <a:t>Step 3</a:t>
-            </a:r>
-            <a:endParaRPr lang="en-US" sz="1000" dirty="0"/>
-          </a:p>
-        </p:txBody>
-      </p:sp>
-      <p:sp>
-        <p:nvSpPr>
-          <p:cNvPr id="18" name="Text 16"/>
-          <p:cNvSpPr/>
-          <p:nvPr/>
-        </p:nvSpPr>
-        <p:spPr>
-          <a:xfrm>
-            <a:off x="1554480" y="3429000"/>
-            <a:ext cx="2743200" cy="274320"/>
-          </a:xfrm>
-          <a:prstGeom prst="rect">
-            <a:avLst/>
-          </a:prstGeom>
-          <a:noFill/>
-          <a:ln/>
-        </p:spPr>
-        <p:txBody>
-          <a:bodyPr wrap="square" lIns="0" tIns="0" rIns="0" bIns="0" rtlCol="0" anchor="ctr"/>
-          <a:lstStyle/>
-          <a:p>
-            <a:pPr indent="0" marL="0">
-              <a:buNone/>
-            </a:pPr>
-            <a:r>
-              <a:rPr lang="en-US" sz="1400" b="1" dirty="0">
-                <a:solidFill>
-                  <a:srgbClr val="1E2761"/>
-                </a:solidFill>
-                <a:latin typeface="Arial" pitchFamily="34" charset="0"/>
-                <a:ea typeface="Arial" pitchFamily="34" charset="-122"/>
-                <a:cs typeface="Arial" pitchFamily="34" charset="-120"/>
-              </a:rPr>
-              <a:t>生成 PPT 文件</a:t>
-            </a:r>
-            <a:endParaRPr lang="en-US" sz="1400" dirty="0"/>
-          </a:p>
-        </p:txBody>
-      </p:sp>
-      <p:sp>
-        <p:nvSpPr>
-          <p:cNvPr id="19" name="Text 17"/>
-          <p:cNvSpPr/>
-          <p:nvPr/>
-        </p:nvSpPr>
-        <p:spPr>
-          <a:xfrm>
-            <a:off x="731520" y="3794760"/>
-            <a:ext cx="3566160" cy="1097280"/>
-          </a:xfrm>
-          <a:prstGeom prst="rect">
-            <a:avLst/>
-          </a:prstGeom>
-          <a:noFill/>
-          <a:ln/>
-        </p:spPr>
-        <p:txBody>
-          <a:bodyPr wrap="square" lIns="0" tIns="0" rIns="0" bIns="0" rtlCol="0" anchor="t"/>
-          <a:lstStyle/>
-          <a:p>
-            <a:pPr indent="0" marL="0">
-              <a:buNone/>
-            </a:pPr>
-            <a:r>
-              <a:rPr lang="en-US" sz="1100" dirty="0">
-                <a:solidFill>
-                  <a:srgbClr val="475569"/>
-                </a:solidFill>
-                <a:latin typeface="Arial" pitchFamily="34" charset="0"/>
-                <a:ea typeface="Arial" pitchFamily="34" charset="-122"/>
-                <a:cs typeface="Arial" pitchFamily="34" charset="-120"/>
-              </a:rPr>
-              <a:t>· Claude Code 的 pptx skill 直接生成 .pptx</a:t>
-            </a:r>
-            <a:endParaRPr lang="en-US" sz="1100" dirty="0"/>
-          </a:p>
-          <a:p>
-            <a:pPr indent="0" marL="0">
-              <a:buNone/>
-            </a:pPr>
-            <a:r>
-              <a:rPr lang="en-US" sz="1100" dirty="0">
-                <a:solidFill>
-                  <a:srgbClr val="475569"/>
-                </a:solidFill>
-                <a:latin typeface="Arial" pitchFamily="34" charset="0"/>
-                <a:ea typeface="Arial" pitchFamily="34" charset="-122"/>
-                <a:cs typeface="Arial" pitchFamily="34" charset="-120"/>
-              </a:rPr>
-              <a:t>· 或在线工具（Gamma、Tome）导入 Markdown</a:t>
-            </a:r>
-            <a:endParaRPr lang="en-US" sz="1100" dirty="0"/>
-          </a:p>
-        </p:txBody>
-      </p:sp>
-      <p:sp>
-        <p:nvSpPr>
-          <p:cNvPr id="20" name="Shape 18"/>
-          <p:cNvSpPr/>
-          <p:nvPr/>
-        </p:nvSpPr>
-        <p:spPr>
-          <a:xfrm>
-            <a:off x="4663440" y="3291840"/>
-            <a:ext cx="3931920" cy="1737360"/>
-          </a:xfrm>
-          <a:prstGeom prst="rect">
-            <a:avLst/>
-          </a:prstGeom>
-          <a:solidFill>
-            <a:srgbClr val="FFFFFF"/>
-          </a:solidFill>
-          <a:ln w="12700">
-            <a:solidFill>
-              <a:srgbClr val="E2E8F0"/>
-            </a:solidFill>
-            <a:prstDash val="solid"/>
-          </a:ln>
-          <a:effectLst>
-            <a:outerShdw sx="100000" sy="100000" kx="0" ky="0" algn="bl" rotWithShape="0" blurRad="76200" dist="25400" dir="8100000">
-              <a:srgbClr val="000000">
-                <a:alpha val="12000"/>
-              </a:srgbClr>
-            </a:outerShdw>
-          </a:effectLst>
-        </p:spPr>
-      </p:sp>
-      <p:sp>
-        <p:nvSpPr>
-          <p:cNvPr id="21" name="Shape 19"/>
-          <p:cNvSpPr/>
-          <p:nvPr/>
-        </p:nvSpPr>
-        <p:spPr>
-          <a:xfrm>
-            <a:off x="4846320" y="3429000"/>
-            <a:ext cx="731520" cy="256032"/>
-          </a:xfrm>
-          <a:prstGeom prst="rect">
-            <a:avLst/>
-          </a:prstGeom>
-          <a:solidFill>
-            <a:srgbClr val="1E2761"/>
-          </a:solidFill>
-          <a:ln/>
-        </p:spPr>
-      </p:sp>
-      <p:sp>
-        <p:nvSpPr>
-          <p:cNvPr id="22" name="Text 20"/>
-          <p:cNvSpPr/>
-          <p:nvPr/>
-        </p:nvSpPr>
-        <p:spPr>
-          <a:xfrm>
-            <a:off x="4846320" y="3429000"/>
-            <a:ext cx="731520" cy="256032"/>
-          </a:xfrm>
-          <a:prstGeom prst="rect">
-            <a:avLst/>
-          </a:prstGeom>
-          <a:noFill/>
-          <a:ln/>
-        </p:spPr>
-        <p:txBody>
-          <a:bodyPr wrap="square" lIns="0" tIns="0" rIns="0" bIns="0" rtlCol="0" anchor="ctr"/>
-          <a:lstStyle/>
-          <a:p>
-            <a:pPr algn="ctr" indent="0" marL="0">
-              <a:buNone/>
-            </a:pPr>
-            <a:r>
-              <a:rPr lang="en-US" sz="1000" b="1" dirty="0">
-                <a:solidFill>
-                  <a:srgbClr val="FFFFFF"/>
-                </a:solidFill>
-                <a:latin typeface="Arial" pitchFamily="34" charset="0"/>
-                <a:ea typeface="Arial" pitchFamily="34" charset="-122"/>
-                <a:cs typeface="Arial" pitchFamily="34" charset="-120"/>
-              </a:rPr>
-              <a:t>Step 4</a:t>
-            </a:r>
-            <a:endParaRPr lang="en-US" sz="1000" dirty="0"/>
-          </a:p>
-        </p:txBody>
-      </p:sp>
-      <p:sp>
-        <p:nvSpPr>
-          <p:cNvPr id="23" name="Text 21"/>
-          <p:cNvSpPr/>
-          <p:nvPr/>
-        </p:nvSpPr>
-        <p:spPr>
-          <a:xfrm>
-            <a:off x="5669280" y="3429000"/>
-            <a:ext cx="2743200" cy="274320"/>
-          </a:xfrm>
-          <a:prstGeom prst="rect">
-            <a:avLst/>
-          </a:prstGeom>
-          <a:noFill/>
-          <a:ln/>
-        </p:spPr>
-        <p:txBody>
-          <a:bodyPr wrap="square" lIns="0" tIns="0" rIns="0" bIns="0" rtlCol="0" anchor="ctr"/>
-          <a:lstStyle/>
-          <a:p>
-            <a:pPr indent="0" marL="0">
-              <a:buNone/>
-            </a:pPr>
-            <a:r>
-              <a:rPr lang="en-US" sz="1400" b="1" dirty="0">
-                <a:solidFill>
-                  <a:srgbClr val="1E2761"/>
-                </a:solidFill>
-                <a:latin typeface="Arial" pitchFamily="34" charset="0"/>
-                <a:ea typeface="Arial" pitchFamily="34" charset="-122"/>
-                <a:cs typeface="Arial" pitchFamily="34" charset="-120"/>
-              </a:rPr>
-              <a:t>人工润色</a:t>
-            </a:r>
-            <a:endParaRPr lang="en-US" sz="1400" dirty="0"/>
-          </a:p>
-        </p:txBody>
-      </p:sp>
-      <p:sp>
-        <p:nvSpPr>
-          <p:cNvPr id="24" name="Text 22"/>
-          <p:cNvSpPr/>
-          <p:nvPr/>
-        </p:nvSpPr>
-        <p:spPr>
-          <a:xfrm>
-            <a:off x="4846320" y="3794760"/>
-            <a:ext cx="3566160" cy="1097280"/>
-          </a:xfrm>
-          <a:prstGeom prst="rect">
-            <a:avLst/>
-          </a:prstGeom>
-          <a:noFill/>
-          <a:ln/>
-        </p:spPr>
-        <p:txBody>
-          <a:bodyPr wrap="square" lIns="0" tIns="0" rIns="0" bIns="0" rtlCol="0" anchor="t"/>
-          <a:lstStyle/>
-          <a:p>
-            <a:pPr indent="0" marL="0">
-              <a:buNone/>
-            </a:pPr>
-            <a:r>
-              <a:rPr lang="en-US" sz="1100" dirty="0">
-                <a:solidFill>
-                  <a:srgbClr val="475569"/>
-                </a:solidFill>
-                <a:latin typeface="Arial" pitchFamily="34" charset="0"/>
-                <a:ea typeface="Arial" pitchFamily="34" charset="-122"/>
-                <a:cs typeface="Arial" pitchFamily="34" charset="-120"/>
-              </a:rPr>
-              <a:t>· AI 生成的是骨架，数据必须自己核对</a:t>
-            </a:r>
-            <a:endParaRPr lang="en-US" sz="1100" dirty="0"/>
-          </a:p>
-          <a:p>
-            <a:pPr indent="0" marL="0">
-              <a:buNone/>
-            </a:pPr>
-            <a:r>
-              <a:rPr lang="en-US" sz="1100" dirty="0">
-                <a:solidFill>
-                  <a:srgbClr val="475569"/>
-                </a:solidFill>
-                <a:latin typeface="Arial" pitchFamily="34" charset="0"/>
-                <a:ea typeface="Arial" pitchFamily="34" charset="-122"/>
-                <a:cs typeface="Arial" pitchFamily="34" charset="-120"/>
-              </a:rPr>
-              <a:t>· 关键结论和数字，人工 double-check</a:t>
-            </a:r>
-            <a:endParaRPr lang="en-US" sz="1100" dirty="0"/>
-          </a:p>
-          <a:p>
-            <a:pPr indent="0" marL="0">
-              <a:buNone/>
-            </a:pPr>
-            <a:r>
-              <a:rPr lang="en-US" sz="1100" dirty="0">
-                <a:solidFill>
-                  <a:srgbClr val="475569"/>
-                </a:solidFill>
-                <a:latin typeface="Arial" pitchFamily="34" charset="0"/>
-                <a:ea typeface="Arial" pitchFamily="34" charset="-122"/>
-                <a:cs typeface="Arial" pitchFamily="34" charset="-120"/>
-              </a:rPr>
-              <a:t>· 配色和字体按公司规范调整</a:t>
-            </a:r>
-            <a:endParaRPr lang="en-US" sz="1100" dirty="0"/>
           </a:p>
         </p:txBody>
       </p:sp>
